--- a/2025/LEC/05-2 Оценка надежности предсказаний ВР.pptx
+++ b/2025/LEC/05-2 Оценка надежности предсказаний ВР.pptx
@@ -5,7 +5,7 @@
     <p:sldMasterId id="2147483648" r:id="rId1"/>
   </p:sldMasterIdLst>
   <p:notesMasterIdLst>
-    <p:notesMasterId r:id="rId26"/>
+    <p:notesMasterId r:id="rId27"/>
   </p:notesMasterIdLst>
   <p:sldIdLst>
     <p:sldId id="477" r:id="rId2"/>
@@ -14,24 +14,25 @@
     <p:sldId id="462" r:id="rId5"/>
     <p:sldId id="465" r:id="rId6"/>
     <p:sldId id="463" r:id="rId7"/>
-    <p:sldId id="464" r:id="rId8"/>
-    <p:sldId id="469" r:id="rId9"/>
-    <p:sldId id="466" r:id="rId10"/>
-    <p:sldId id="467" r:id="rId11"/>
-    <p:sldId id="470" r:id="rId12"/>
-    <p:sldId id="471" r:id="rId13"/>
-    <p:sldId id="475" r:id="rId14"/>
-    <p:sldId id="474" r:id="rId15"/>
-    <p:sldId id="473" r:id="rId16"/>
-    <p:sldId id="483" r:id="rId17"/>
-    <p:sldId id="481" r:id="rId18"/>
-    <p:sldId id="480" r:id="rId19"/>
-    <p:sldId id="484" r:id="rId20"/>
-    <p:sldId id="485" r:id="rId21"/>
-    <p:sldId id="472" r:id="rId22"/>
-    <p:sldId id="479" r:id="rId23"/>
-    <p:sldId id="468" r:id="rId24"/>
-    <p:sldId id="461" r:id="rId25"/>
+    <p:sldId id="486" r:id="rId8"/>
+    <p:sldId id="464" r:id="rId9"/>
+    <p:sldId id="469" r:id="rId10"/>
+    <p:sldId id="466" r:id="rId11"/>
+    <p:sldId id="467" r:id="rId12"/>
+    <p:sldId id="470" r:id="rId13"/>
+    <p:sldId id="471" r:id="rId14"/>
+    <p:sldId id="475" r:id="rId15"/>
+    <p:sldId id="474" r:id="rId16"/>
+    <p:sldId id="473" r:id="rId17"/>
+    <p:sldId id="483" r:id="rId18"/>
+    <p:sldId id="481" r:id="rId19"/>
+    <p:sldId id="480" r:id="rId20"/>
+    <p:sldId id="484" r:id="rId21"/>
+    <p:sldId id="485" r:id="rId22"/>
+    <p:sldId id="472" r:id="rId23"/>
+    <p:sldId id="479" r:id="rId24"/>
+    <p:sldId id="468" r:id="rId25"/>
+    <p:sldId id="461" r:id="rId26"/>
   </p:sldIdLst>
   <p:sldSz cx="12192000" cy="6858000"/>
   <p:notesSz cx="6858000" cy="9144000"/>
@@ -220,7 +221,7 @@
           <a:p>
             <a:fld id="{C730246F-5962-E14A-AAF2-985CCFDAC345}" type="datetimeFigureOut">
               <a:rPr lang="ru-RU" smtClean="0"/>
-              <a:t>23.07.2025</a:t>
+              <a:t>08.08.2025</a:t>
             </a:fld>
             <a:endParaRPr lang="ru-RU"/>
           </a:p>
@@ -636,7 +637,7 @@
           <a:p>
             <a:fld id="{44343DC6-30E4-4569-999A-C703F926F2AF}" type="datetimeFigureOut">
               <a:rPr lang="en-US" smtClean="0"/>
-              <a:t>7/23/2025</a:t>
+              <a:t>8/8/25</a:t>
             </a:fld>
             <a:endParaRPr lang="en-US"/>
           </a:p>
@@ -836,7 +837,7 @@
           <a:p>
             <a:fld id="{44343DC6-30E4-4569-999A-C703F926F2AF}" type="datetimeFigureOut">
               <a:rPr lang="en-US" smtClean="0"/>
-              <a:t>7/23/2025</a:t>
+              <a:t>8/8/25</a:t>
             </a:fld>
             <a:endParaRPr lang="en-US"/>
           </a:p>
@@ -1046,7 +1047,7 @@
           <a:p>
             <a:fld id="{44343DC6-30E4-4569-999A-C703F926F2AF}" type="datetimeFigureOut">
               <a:rPr lang="en-US" smtClean="0"/>
-              <a:t>7/23/2025</a:t>
+              <a:t>8/8/25</a:t>
             </a:fld>
             <a:endParaRPr lang="en-US"/>
           </a:p>
@@ -1246,7 +1247,7 @@
           <a:p>
             <a:fld id="{44343DC6-30E4-4569-999A-C703F926F2AF}" type="datetimeFigureOut">
               <a:rPr lang="en-US" smtClean="0"/>
-              <a:t>7/23/2025</a:t>
+              <a:t>8/8/25</a:t>
             </a:fld>
             <a:endParaRPr lang="en-US"/>
           </a:p>
@@ -1522,7 +1523,7 @@
           <a:p>
             <a:fld id="{44343DC6-30E4-4569-999A-C703F926F2AF}" type="datetimeFigureOut">
               <a:rPr lang="en-US" smtClean="0"/>
-              <a:t>7/23/2025</a:t>
+              <a:t>8/8/25</a:t>
             </a:fld>
             <a:endParaRPr lang="en-US"/>
           </a:p>
@@ -1790,7 +1791,7 @@
           <a:p>
             <a:fld id="{44343DC6-30E4-4569-999A-C703F926F2AF}" type="datetimeFigureOut">
               <a:rPr lang="en-US" smtClean="0"/>
-              <a:t>7/23/2025</a:t>
+              <a:t>8/8/25</a:t>
             </a:fld>
             <a:endParaRPr lang="en-US"/>
           </a:p>
@@ -2205,7 +2206,7 @@
           <a:p>
             <a:fld id="{44343DC6-30E4-4569-999A-C703F926F2AF}" type="datetimeFigureOut">
               <a:rPr lang="en-US" smtClean="0"/>
-              <a:t>7/23/2025</a:t>
+              <a:t>8/8/25</a:t>
             </a:fld>
             <a:endParaRPr lang="en-US"/>
           </a:p>
@@ -2347,7 +2348,7 @@
           <a:p>
             <a:fld id="{44343DC6-30E4-4569-999A-C703F926F2AF}" type="datetimeFigureOut">
               <a:rPr lang="en-US" smtClean="0"/>
-              <a:t>7/23/2025</a:t>
+              <a:t>8/8/25</a:t>
             </a:fld>
             <a:endParaRPr lang="en-US"/>
           </a:p>
@@ -2460,7 +2461,7 @@
           <a:p>
             <a:fld id="{44343DC6-30E4-4569-999A-C703F926F2AF}" type="datetimeFigureOut">
               <a:rPr lang="en-US" smtClean="0"/>
-              <a:t>7/23/2025</a:t>
+              <a:t>8/8/25</a:t>
             </a:fld>
             <a:endParaRPr lang="en-US"/>
           </a:p>
@@ -2773,7 +2774,7 @@
           <a:p>
             <a:fld id="{44343DC6-30E4-4569-999A-C703F926F2AF}" type="datetimeFigureOut">
               <a:rPr lang="en-US" smtClean="0"/>
-              <a:t>7/23/2025</a:t>
+              <a:t>8/8/25</a:t>
             </a:fld>
             <a:endParaRPr lang="en-US"/>
           </a:p>
@@ -3062,7 +3063,7 @@
           <a:p>
             <a:fld id="{44343DC6-30E4-4569-999A-C703F926F2AF}" type="datetimeFigureOut">
               <a:rPr lang="en-US" smtClean="0"/>
-              <a:t>7/23/2025</a:t>
+              <a:t>8/8/25</a:t>
             </a:fld>
             <a:endParaRPr lang="en-US"/>
           </a:p>
@@ -3305,7 +3306,7 @@
           <a:p>
             <a:fld id="{44343DC6-30E4-4569-999A-C703F926F2AF}" type="datetimeFigureOut">
               <a:rPr lang="en-US" smtClean="0"/>
-              <a:t>7/23/2025</a:t>
+              <a:t>8/8/25</a:t>
             </a:fld>
             <a:endParaRPr lang="en-US"/>
           </a:p>
@@ -3738,10 +3739,9 @@
           <a:lstStyle/>
           <a:p>
             <a:r>
-              <a:rPr lang="ru-RU" dirty="0" smtClean="0"/>
+              <a:rPr lang="ru-RU" dirty="0"/>
               <a:t>Оценка надежности предсказаний ВР</a:t>
             </a:r>
-            <a:endParaRPr lang="ru-RU" dirty="0"/>
           </a:p>
         </p:txBody>
       </p:sp>
@@ -3774,17 +3774,432 @@
   <p:clrMapOvr>
     <a:masterClrMapping/>
   </p:clrMapOvr>
-  <p:timing>
-    <p:tnLst>
-      <p:par>
-        <p:cTn id="1" dur="indefinite" restart="never" nodeType="tmRoot"/>
-      </p:par>
-    </p:tnLst>
-  </p:timing>
 </p:sld>
 </file>
 
 <file path=ppt/slides/slide10.xml><?xml version="1.0" encoding="utf-8"?>
+<p:sld xmlns:a="http://schemas.openxmlformats.org/drawingml/2006/main" xmlns:r="http://schemas.openxmlformats.org/officeDocument/2006/relationships" xmlns:p="http://schemas.openxmlformats.org/presentationml/2006/main">
+  <p:cSld>
+    <p:spTree>
+      <p:nvGrpSpPr>
+        <p:cNvPr id="1" name=""/>
+        <p:cNvGrpSpPr/>
+        <p:nvPr/>
+      </p:nvGrpSpPr>
+      <p:grpSpPr>
+        <a:xfrm>
+          <a:off x="0" y="0"/>
+          <a:ext cx="0" cy="0"/>
+          <a:chOff x="0" y="0"/>
+          <a:chExt cx="0" cy="0"/>
+        </a:xfrm>
+      </p:grpSpPr>
+      <p:sp>
+        <p:nvSpPr>
+          <p:cNvPr id="2" name="Заголовок 1"/>
+          <p:cNvSpPr>
+            <a:spLocks noGrp="1"/>
+          </p:cNvSpPr>
+          <p:nvPr>
+            <p:ph type="title"/>
+          </p:nvPr>
+        </p:nvSpPr>
+        <p:spPr>
+          <a:xfrm>
+            <a:off x="307428" y="129977"/>
+            <a:ext cx="11180379" cy="620220"/>
+          </a:xfrm>
+        </p:spPr>
+        <p:txBody>
+          <a:bodyPr>
+            <a:normAutofit fontScale="90000"/>
+          </a:bodyPr>
+          <a:lstStyle/>
+          <a:p>
+            <a:pPr algn="ctr"/>
+            <a:r>
+              <a:rPr lang="ru-RU" dirty="0"/>
+              <a:t>Преимущества</a:t>
+            </a:r>
+            <a:r>
+              <a:rPr lang="en-US" dirty="0"/>
+              <a:t> Walk-forward</a:t>
+            </a:r>
+            <a:r>
+              <a:rPr lang="ru-RU" dirty="0"/>
+              <a:t> </a:t>
+            </a:r>
+            <a:r>
+              <a:rPr lang="en-US" dirty="0"/>
+              <a:t>cross validation</a:t>
+            </a:r>
+            <a:endParaRPr lang="ru-RU" b="1" dirty="0"/>
+          </a:p>
+        </p:txBody>
+      </p:sp>
+      <p:sp>
+        <p:nvSpPr>
+          <p:cNvPr id="3" name="Объект 2"/>
+          <p:cNvSpPr>
+            <a:spLocks noGrp="1"/>
+          </p:cNvSpPr>
+          <p:nvPr>
+            <p:ph idx="1"/>
+          </p:nvPr>
+        </p:nvSpPr>
+        <p:spPr>
+          <a:xfrm>
+            <a:off x="307428" y="875037"/>
+            <a:ext cx="11351172" cy="5191617"/>
+          </a:xfrm>
+        </p:spPr>
+        <p:txBody>
+          <a:bodyPr>
+            <a:normAutofit/>
+          </a:bodyPr>
+          <a:lstStyle/>
+          <a:p>
+            <a:pPr marL="0" indent="0">
+              <a:buNone/>
+            </a:pPr>
+            <a:r>
+              <a:rPr lang="ru-RU" sz="2400" dirty="0"/>
+              <a:t> </a:t>
+            </a:r>
+          </a:p>
+        </p:txBody>
+      </p:sp>
+      <p:sp>
+        <p:nvSpPr>
+          <p:cNvPr id="4" name="Прямоугольник 3"/>
+          <p:cNvSpPr/>
+          <p:nvPr/>
+        </p:nvSpPr>
+        <p:spPr>
+          <a:xfrm>
+            <a:off x="6386813" y="6437836"/>
+            <a:ext cx="5732338" cy="307777"/>
+          </a:xfrm>
+          <a:prstGeom prst="rect">
+            <a:avLst/>
+          </a:prstGeom>
+        </p:spPr>
+        <p:txBody>
+          <a:bodyPr wrap="none">
+            <a:spAutoFit/>
+          </a:bodyPr>
+          <a:lstStyle/>
+          <a:p>
+            <a:r>
+              <a:rPr lang="en-US" sz="1400" b="1" dirty="0"/>
+              <a:t>https://github.com/tinkoff-ai/etna/blob/master/examples/backtest.ipynb</a:t>
+            </a:r>
+            <a:endParaRPr lang="ru-RU" sz="1400" b="1" dirty="0"/>
+          </a:p>
+        </p:txBody>
+      </p:sp>
+      <p:sp>
+        <p:nvSpPr>
+          <p:cNvPr id="7" name="Прямоугольник 6"/>
+          <p:cNvSpPr/>
+          <p:nvPr/>
+        </p:nvSpPr>
+        <p:spPr>
+          <a:xfrm>
+            <a:off x="473220" y="5268286"/>
+            <a:ext cx="6016383" cy="1323439"/>
+          </a:xfrm>
+          <a:prstGeom prst="rect">
+            <a:avLst/>
+          </a:prstGeom>
+        </p:spPr>
+        <p:txBody>
+          <a:bodyPr wrap="square">
+            <a:spAutoFit/>
+          </a:bodyPr>
+          <a:lstStyle/>
+          <a:p>
+            <a:r>
+              <a:rPr lang="ru-RU" sz="2000" i="1" u="sng" dirty="0"/>
+              <a:t>Иногда модель дополнительно тестируют на перевернутом</a:t>
+            </a:r>
+          </a:p>
+          <a:p>
+            <a:r>
+              <a:rPr lang="ru-RU" sz="2000" i="1" u="sng" dirty="0"/>
+              <a:t> временном ряду для повышения надежности выводов  </a:t>
+            </a:r>
+          </a:p>
+        </p:txBody>
+      </p:sp>
+      <p:pic>
+        <p:nvPicPr>
+          <p:cNvPr id="6" name="Рисунок 5"/>
+          <p:cNvPicPr>
+            <a:picLocks noChangeAspect="1"/>
+          </p:cNvPicPr>
+          <p:nvPr/>
+        </p:nvPicPr>
+        <p:blipFill>
+          <a:blip r:embed="rId2"/>
+          <a:stretch>
+            <a:fillRect/>
+          </a:stretch>
+        </p:blipFill>
+        <p:spPr>
+          <a:xfrm>
+            <a:off x="6579501" y="3266272"/>
+            <a:ext cx="5257980" cy="2926270"/>
+          </a:xfrm>
+          <a:prstGeom prst="rect">
+            <a:avLst/>
+          </a:prstGeom>
+        </p:spPr>
+      </p:pic>
+      <p:sp>
+        <p:nvSpPr>
+          <p:cNvPr id="12" name="Объект 2"/>
+          <p:cNvSpPr txBox="1">
+            <a:spLocks/>
+          </p:cNvSpPr>
+          <p:nvPr/>
+        </p:nvSpPr>
+        <p:spPr>
+          <a:xfrm>
+            <a:off x="310136" y="753168"/>
+            <a:ext cx="11706225" cy="5176838"/>
+          </a:xfrm>
+          <a:prstGeom prst="rect">
+            <a:avLst/>
+          </a:prstGeom>
+        </p:spPr>
+        <p:txBody>
+          <a:bodyPr vert="horz" lIns="91440" tIns="45720" rIns="91440" bIns="45720" rtlCol="0">
+            <a:normAutofit/>
+          </a:bodyPr>
+          <a:lstStyle>
+            <a:lvl1pPr marL="228600" indent="-228600" algn="l" defTabSz="914400" rtl="0" eaLnBrk="1" latinLnBrk="0" hangingPunct="1">
+              <a:lnSpc>
+                <a:spcPct val="90000"/>
+              </a:lnSpc>
+              <a:spcBef>
+                <a:spcPts val="1000"/>
+              </a:spcBef>
+              <a:buFont typeface="Arial" panose="020B0604020202020204" pitchFamily="34" charset="0"/>
+              <a:buChar char="•"/>
+              <a:defRPr sz="2800" kern="1200">
+                <a:solidFill>
+                  <a:schemeClr val="tx1"/>
+                </a:solidFill>
+                <a:latin typeface="+mn-lt"/>
+                <a:ea typeface="+mn-ea"/>
+                <a:cs typeface="+mn-cs"/>
+              </a:defRPr>
+            </a:lvl1pPr>
+            <a:lvl2pPr marL="685800" indent="-228600" algn="l" defTabSz="914400" rtl="0" eaLnBrk="1" latinLnBrk="0" hangingPunct="1">
+              <a:lnSpc>
+                <a:spcPct val="90000"/>
+              </a:lnSpc>
+              <a:spcBef>
+                <a:spcPts val="500"/>
+              </a:spcBef>
+              <a:buFont typeface="Arial" panose="020B0604020202020204" pitchFamily="34" charset="0"/>
+              <a:buChar char="•"/>
+              <a:defRPr sz="2400" kern="1200">
+                <a:solidFill>
+                  <a:schemeClr val="tx1"/>
+                </a:solidFill>
+                <a:latin typeface="+mn-lt"/>
+                <a:ea typeface="+mn-ea"/>
+                <a:cs typeface="+mn-cs"/>
+              </a:defRPr>
+            </a:lvl2pPr>
+            <a:lvl3pPr marL="1143000" indent="-228600" algn="l" defTabSz="914400" rtl="0" eaLnBrk="1" latinLnBrk="0" hangingPunct="1">
+              <a:lnSpc>
+                <a:spcPct val="90000"/>
+              </a:lnSpc>
+              <a:spcBef>
+                <a:spcPts val="500"/>
+              </a:spcBef>
+              <a:buFont typeface="Arial" panose="020B0604020202020204" pitchFamily="34" charset="0"/>
+              <a:buChar char="•"/>
+              <a:defRPr sz="2000" kern="1200">
+                <a:solidFill>
+                  <a:schemeClr val="tx1"/>
+                </a:solidFill>
+                <a:latin typeface="+mn-lt"/>
+                <a:ea typeface="+mn-ea"/>
+                <a:cs typeface="+mn-cs"/>
+              </a:defRPr>
+            </a:lvl3pPr>
+            <a:lvl4pPr marL="1600200" indent="-228600" algn="l" defTabSz="914400" rtl="0" eaLnBrk="1" latinLnBrk="0" hangingPunct="1">
+              <a:lnSpc>
+                <a:spcPct val="90000"/>
+              </a:lnSpc>
+              <a:spcBef>
+                <a:spcPts val="500"/>
+              </a:spcBef>
+              <a:buFont typeface="Arial" panose="020B0604020202020204" pitchFamily="34" charset="0"/>
+              <a:buChar char="•"/>
+              <a:defRPr sz="1800" kern="1200">
+                <a:solidFill>
+                  <a:schemeClr val="tx1"/>
+                </a:solidFill>
+                <a:latin typeface="+mn-lt"/>
+                <a:ea typeface="+mn-ea"/>
+                <a:cs typeface="+mn-cs"/>
+              </a:defRPr>
+            </a:lvl4pPr>
+            <a:lvl5pPr marL="2057400" indent="-228600" algn="l" defTabSz="914400" rtl="0" eaLnBrk="1" latinLnBrk="0" hangingPunct="1">
+              <a:lnSpc>
+                <a:spcPct val="90000"/>
+              </a:lnSpc>
+              <a:spcBef>
+                <a:spcPts val="500"/>
+              </a:spcBef>
+              <a:buFont typeface="Arial" panose="020B0604020202020204" pitchFamily="34" charset="0"/>
+              <a:buChar char="•"/>
+              <a:defRPr sz="1800" kern="1200">
+                <a:solidFill>
+                  <a:schemeClr val="tx1"/>
+                </a:solidFill>
+                <a:latin typeface="+mn-lt"/>
+                <a:ea typeface="+mn-ea"/>
+                <a:cs typeface="+mn-cs"/>
+              </a:defRPr>
+            </a:lvl5pPr>
+            <a:lvl6pPr marL="2514600" indent="-228600" algn="l" defTabSz="914400" rtl="0" eaLnBrk="1" latinLnBrk="0" hangingPunct="1">
+              <a:lnSpc>
+                <a:spcPct val="90000"/>
+              </a:lnSpc>
+              <a:spcBef>
+                <a:spcPts val="500"/>
+              </a:spcBef>
+              <a:buFont typeface="Arial" panose="020B0604020202020204" pitchFamily="34" charset="0"/>
+              <a:buChar char="•"/>
+              <a:defRPr sz="1800" kern="1200">
+                <a:solidFill>
+                  <a:schemeClr val="tx1"/>
+                </a:solidFill>
+                <a:latin typeface="+mn-lt"/>
+                <a:ea typeface="+mn-ea"/>
+                <a:cs typeface="+mn-cs"/>
+              </a:defRPr>
+            </a:lvl6pPr>
+            <a:lvl7pPr marL="2971800" indent="-228600" algn="l" defTabSz="914400" rtl="0" eaLnBrk="1" latinLnBrk="0" hangingPunct="1">
+              <a:lnSpc>
+                <a:spcPct val="90000"/>
+              </a:lnSpc>
+              <a:spcBef>
+                <a:spcPts val="500"/>
+              </a:spcBef>
+              <a:buFont typeface="Arial" panose="020B0604020202020204" pitchFamily="34" charset="0"/>
+              <a:buChar char="•"/>
+              <a:defRPr sz="1800" kern="1200">
+                <a:solidFill>
+                  <a:schemeClr val="tx1"/>
+                </a:solidFill>
+                <a:latin typeface="+mn-lt"/>
+                <a:ea typeface="+mn-ea"/>
+                <a:cs typeface="+mn-cs"/>
+              </a:defRPr>
+            </a:lvl7pPr>
+            <a:lvl8pPr marL="3429000" indent="-228600" algn="l" defTabSz="914400" rtl="0" eaLnBrk="1" latinLnBrk="0" hangingPunct="1">
+              <a:lnSpc>
+                <a:spcPct val="90000"/>
+              </a:lnSpc>
+              <a:spcBef>
+                <a:spcPts val="500"/>
+              </a:spcBef>
+              <a:buFont typeface="Arial" panose="020B0604020202020204" pitchFamily="34" charset="0"/>
+              <a:buChar char="•"/>
+              <a:defRPr sz="1800" kern="1200">
+                <a:solidFill>
+                  <a:schemeClr val="tx1"/>
+                </a:solidFill>
+                <a:latin typeface="+mn-lt"/>
+                <a:ea typeface="+mn-ea"/>
+                <a:cs typeface="+mn-cs"/>
+              </a:defRPr>
+            </a:lvl8pPr>
+            <a:lvl9pPr marL="3886200" indent="-228600" algn="l" defTabSz="914400" rtl="0" eaLnBrk="1" latinLnBrk="0" hangingPunct="1">
+              <a:lnSpc>
+                <a:spcPct val="90000"/>
+              </a:lnSpc>
+              <a:spcBef>
+                <a:spcPts val="500"/>
+              </a:spcBef>
+              <a:buFont typeface="Arial" panose="020B0604020202020204" pitchFamily="34" charset="0"/>
+              <a:buChar char="•"/>
+              <a:defRPr sz="1800" kern="1200">
+                <a:solidFill>
+                  <a:schemeClr val="tx1"/>
+                </a:solidFill>
+                <a:latin typeface="+mn-lt"/>
+                <a:ea typeface="+mn-ea"/>
+                <a:cs typeface="+mn-cs"/>
+              </a:defRPr>
+            </a:lvl9pPr>
+          </a:lstStyle>
+          <a:p>
+            <a:r>
+              <a:rPr lang="ru-RU" sz="2400" dirty="0"/>
+              <a:t>Снижение смещения оценки метрик по сравнению с одноразовой разбивкой. </a:t>
+            </a:r>
+            <a:endParaRPr lang="en-US" sz="2400" dirty="0"/>
+          </a:p>
+          <a:p>
+            <a:r>
+              <a:rPr lang="ru-RU" sz="2400" dirty="0"/>
+              <a:t>Оценка дисперсии метрик</a:t>
+            </a:r>
+          </a:p>
+          <a:p>
+            <a:r>
+              <a:rPr lang="ru-RU" sz="2400" dirty="0"/>
+              <a:t>Поиск "плавающих" ошибок в модели данных. </a:t>
+            </a:r>
+          </a:p>
+          <a:p>
+            <a:pPr lvl="1"/>
+            <a:r>
+              <a:rPr lang="ru-RU" sz="2000" dirty="0"/>
+              <a:t>То есть редкие, но достаточно регулярные ошибки (неучтенную </a:t>
+            </a:r>
+            <a:r>
+              <a:rPr lang="ru-RU" sz="2000" dirty="0" err="1"/>
+              <a:t>информоацию</a:t>
+            </a:r>
+            <a:r>
+              <a:rPr lang="ru-RU" sz="2000" dirty="0"/>
+              <a:t>), которые можно участь в модели.</a:t>
+            </a:r>
+          </a:p>
+          <a:p>
+            <a:r>
+              <a:rPr lang="ru-RU" sz="2400" dirty="0"/>
+              <a:t>Оценка важности факторов в модели.</a:t>
+            </a:r>
+          </a:p>
+          <a:p>
+            <a:endParaRPr lang="ru-RU" sz="2400" dirty="0"/>
+          </a:p>
+        </p:txBody>
+      </p:sp>
+    </p:spTree>
+    <p:extLst>
+      <p:ext uri="{BB962C8B-B14F-4D97-AF65-F5344CB8AC3E}">
+        <p14:creationId xmlns:p14="http://schemas.microsoft.com/office/powerpoint/2010/main" val="3873255510"/>
+      </p:ext>
+    </p:extLst>
+  </p:cSld>
+  <p:clrMapOvr>
+    <a:masterClrMapping/>
+  </p:clrMapOvr>
+</p:sld>
+</file>
+
+<file path=ppt/slides/slide11.xml><?xml version="1.0" encoding="utf-8"?>
 <p:sld xmlns:a="http://schemas.openxmlformats.org/drawingml/2006/main" xmlns:r="http://schemas.openxmlformats.org/officeDocument/2006/relationships" xmlns:p="http://schemas.openxmlformats.org/presentationml/2006/main">
   <p:cSld>
     <p:spTree>
@@ -3824,11 +4239,11 @@
           <a:lstStyle/>
           <a:p>
             <a:r>
-              <a:rPr lang="ru-RU" dirty="0" smtClean="0"/>
+              <a:rPr lang="ru-RU" dirty="0"/>
               <a:t>Особенности кросс-</a:t>
             </a:r>
             <a:r>
-              <a:rPr lang="ru-RU" dirty="0" err="1" smtClean="0"/>
+              <a:rPr lang="ru-RU" dirty="0" err="1"/>
               <a:t>валидации</a:t>
             </a:r>
             <a:endParaRPr lang="ru-RU" dirty="0"/>
@@ -3858,72 +4273,72 @@
           <a:lstStyle/>
           <a:p>
             <a:r>
-              <a:rPr lang="ru-RU" sz="2400" dirty="0" smtClean="0"/>
+              <a:rPr lang="ru-RU" sz="2400" dirty="0"/>
               <a:t>Стратегию кросс-</a:t>
             </a:r>
             <a:r>
-              <a:rPr lang="ru-RU" sz="2400" dirty="0" err="1" smtClean="0"/>
+              <a:rPr lang="ru-RU" sz="2400" dirty="0" err="1"/>
               <a:t>валидации</a:t>
             </a:r>
             <a:r>
-              <a:rPr lang="ru-RU" sz="2400" dirty="0" smtClean="0"/>
+              <a:rPr lang="ru-RU" sz="2400" dirty="0"/>
               <a:t> надо выбирать сообразно задаче</a:t>
             </a:r>
           </a:p>
           <a:p>
             <a:pPr lvl="1"/>
             <a:r>
-              <a:rPr lang="ru-RU" sz="2000" dirty="0" smtClean="0"/>
+              <a:rPr lang="ru-RU" sz="2000" dirty="0"/>
               <a:t>Если предполагается </a:t>
             </a:r>
             <a:r>
-              <a:rPr lang="ru-RU" sz="2000" dirty="0" err="1" smtClean="0"/>
+              <a:rPr lang="ru-RU" sz="2000" dirty="0" err="1"/>
               <a:t>дообучение</a:t>
             </a:r>
             <a:r>
-              <a:rPr lang="ru-RU" sz="2000" dirty="0" smtClean="0"/>
+              <a:rPr lang="ru-RU" sz="2000" dirty="0"/>
               <a:t> модели можно взять расширяющееся окно, </a:t>
             </a:r>
           </a:p>
           <a:p>
             <a:pPr lvl="1"/>
             <a:r>
-              <a:rPr lang="ru-RU" sz="2000" dirty="0" smtClean="0"/>
+              <a:rPr lang="ru-RU" sz="2000" dirty="0"/>
               <a:t>если данные устаревают, то скользящее окно. </a:t>
             </a:r>
           </a:p>
           <a:p>
             <a:pPr lvl="1"/>
             <a:r>
-              <a:rPr lang="ru-RU" sz="2000" dirty="0" smtClean="0"/>
+              <a:rPr lang="ru-RU" sz="2000" dirty="0"/>
               <a:t>Возможны также комбинации, напр. смещения окна 1 раз в год при горизонте в 1 месяц.</a:t>
             </a:r>
           </a:p>
           <a:p>
             <a:r>
-              <a:rPr lang="ru-RU" sz="2400" dirty="0" smtClean="0"/>
+              <a:rPr lang="ru-RU" sz="2400" dirty="0"/>
               <a:t>Важно выбирать окна </a:t>
             </a:r>
             <a:r>
-              <a:rPr lang="ru-RU" sz="2400" dirty="0" err="1" smtClean="0"/>
+              <a:rPr lang="ru-RU" sz="2400" dirty="0" err="1"/>
               <a:t>валидации</a:t>
             </a:r>
             <a:r>
-              <a:rPr lang="ru-RU" sz="2400" dirty="0" smtClean="0"/>
+              <a:rPr lang="ru-RU" sz="2400" dirty="0"/>
               <a:t> из требований к реальным данным</a:t>
             </a:r>
           </a:p>
           <a:p>
             <a:pPr lvl="1"/>
             <a:r>
-              <a:rPr lang="ru-RU" sz="2000" dirty="0" smtClean="0"/>
+              <a:rPr lang="ru-RU" sz="2000" dirty="0"/>
               <a:t>Частое окно не репрезентативно, может пропустить паттерн, приведет к смещению оценки – так как шумы не достаточно интегрированы, </a:t>
             </a:r>
           </a:p>
           <a:p>
             <a:pPr lvl="1"/>
             <a:r>
-              <a:rPr lang="ru-RU" sz="2000" dirty="0" smtClean="0"/>
+              <a:rPr lang="ru-RU" sz="2000" dirty="0"/>
               <a:t>длинное окно не даст корректную оценку разброс показаний.</a:t>
             </a:r>
           </a:p>
@@ -4002,17 +4417,10 @@
   <p:clrMapOvr>
     <a:masterClrMapping/>
   </p:clrMapOvr>
-  <p:timing>
-    <p:tnLst>
-      <p:par>
-        <p:cTn id="1" dur="indefinite" restart="never" nodeType="tmRoot"/>
-      </p:par>
-    </p:tnLst>
-  </p:timing>
 </p:sld>
 </file>
 
-<file path=ppt/slides/slide11.xml><?xml version="1.0" encoding="utf-8"?>
+<file path=ppt/slides/slide12.xml><?xml version="1.0" encoding="utf-8"?>
 <p:sld xmlns:a="http://schemas.openxmlformats.org/drawingml/2006/main" xmlns:r="http://schemas.openxmlformats.org/officeDocument/2006/relationships" xmlns:p="http://schemas.openxmlformats.org/presentationml/2006/main">
   <p:cSld>
     <p:spTree>
@@ -4053,10 +4461,9 @@
           <a:p>
             <a:pPr algn="ctr"/>
             <a:r>
-              <a:rPr lang="ru-RU" dirty="0" smtClean="0"/>
+              <a:rPr lang="ru-RU" dirty="0"/>
               <a:t>Многошаговые особенности оценки точности</a:t>
             </a:r>
-            <a:endParaRPr lang="ru-RU" dirty="0"/>
           </a:p>
         </p:txBody>
       </p:sp>
@@ -4083,24 +4490,22 @@
           <a:lstStyle/>
           <a:p>
             <a:r>
-              <a:rPr lang="ru-RU" sz="2400" dirty="0" smtClean="0"/>
+              <a:rPr lang="ru-RU" sz="2400" dirty="0"/>
               <a:t>Статические (оценка на следующем шаге опирается на истинные значения предыдущих шагов)</a:t>
             </a:r>
-            <a:endParaRPr lang="ru-RU" sz="2400" dirty="0"/>
-          </a:p>
-          <a:p>
-            <a:r>
-              <a:rPr lang="ru-RU" sz="2400" dirty="0" smtClean="0"/>
+          </a:p>
+          <a:p>
+            <a:r>
+              <a:rPr lang="ru-RU" sz="2400" dirty="0"/>
               <a:t>Динамическими (рекурсивным, оценка на следующем шаге опирается на оценки на предыдущих шагах ) </a:t>
             </a:r>
           </a:p>
           <a:p>
             <a:pPr lvl="1"/>
             <a:r>
-              <a:rPr lang="ru-RU" sz="2000" dirty="0" smtClean="0"/>
+              <a:rPr lang="ru-RU" sz="2000" dirty="0"/>
               <a:t>Могут быть более сложные варианты, напр. оценка опирается  на моды распределений оценок на предыдущих шагах</a:t>
             </a:r>
-            <a:endParaRPr lang="ru-RU" sz="2000" dirty="0"/>
           </a:p>
         </p:txBody>
       </p:sp>
@@ -4206,10 +4611,9 @@
           <a:lstStyle/>
           <a:p>
             <a:r>
-              <a:rPr lang="ru-RU" dirty="0" smtClean="0"/>
+              <a:rPr lang="ru-RU" dirty="0"/>
               <a:t>Динамическая оценка  предполагает использование предсказанных данных вместо истинных в окне предсказания</a:t>
             </a:r>
-            <a:endParaRPr lang="ru-RU" dirty="0"/>
           </a:p>
         </p:txBody>
       </p:sp>
@@ -4276,10 +4680,9 @@
           <a:lstStyle/>
           <a:p>
             <a:r>
-              <a:rPr lang="ru-RU" dirty="0" smtClean="0"/>
+              <a:rPr lang="ru-RU" dirty="0"/>
               <a:t>Статическая оценка предполагает использование известных данных в исторических данных </a:t>
             </a:r>
-            <a:endParaRPr lang="ru-RU" dirty="0"/>
           </a:p>
         </p:txBody>
       </p:sp>
@@ -4305,10 +4708,9 @@
           <a:lstStyle/>
           <a:p>
             <a:r>
-              <a:rPr lang="ru-RU" sz="1200" dirty="0" smtClean="0"/>
+              <a:rPr lang="ru-RU" sz="1200" dirty="0"/>
               <a:t>https://skforecast.org/0.7.0/introduction-forecasting/introduction-forecasting</a:t>
             </a:r>
-            <a:endParaRPr lang="ru-RU" sz="1200" dirty="0"/>
           </a:p>
         </p:txBody>
       </p:sp>
@@ -4350,17 +4752,10 @@
   <p:clrMapOvr>
     <a:masterClrMapping/>
   </p:clrMapOvr>
-  <p:timing>
-    <p:tnLst>
-      <p:par>
-        <p:cTn id="1" dur="indefinite" restart="never" nodeType="tmRoot"/>
-      </p:par>
-    </p:tnLst>
-  </p:timing>
 </p:sld>
 </file>
 
-<file path=ppt/slides/slide12.xml><?xml version="1.0" encoding="utf-8"?>
+<file path=ppt/slides/slide13.xml><?xml version="1.0" encoding="utf-8"?>
 <p:sld xmlns:a="http://schemas.openxmlformats.org/drawingml/2006/main" xmlns:r="http://schemas.openxmlformats.org/officeDocument/2006/relationships" xmlns:p="http://schemas.openxmlformats.org/presentationml/2006/main">
   <p:cSld>
     <p:spTree>
@@ -4401,10 +4796,9 @@
           <a:p>
             <a:pPr algn="ctr"/>
             <a:r>
-              <a:rPr lang="ru-RU" dirty="0" smtClean="0"/>
+              <a:rPr lang="ru-RU" dirty="0"/>
               <a:t>Особенности оценки неопределенности </a:t>
             </a:r>
-            <a:endParaRPr lang="ru-RU" dirty="0"/>
           </a:p>
         </p:txBody>
       </p:sp>
@@ -4434,7 +4828,7 @@
               <a:buNone/>
             </a:pPr>
             <a:r>
-              <a:rPr lang="ru-RU" sz="2100" b="1" dirty="0" smtClean="0"/>
+              <a:rPr lang="ru-RU" sz="2100" b="1" dirty="0"/>
               <a:t>Источники ошибки предсказаний</a:t>
             </a:r>
           </a:p>
@@ -4442,70 +4836,60 @@
             <a:pPr lvl="1"/>
             <a:r>
               <a:rPr lang="ru-RU" sz="2000" dirty="0"/>
-              <a:t>Случайная ошибка </a:t>
-            </a:r>
-            <a:r>
-              <a:rPr lang="ru-RU" sz="2000" dirty="0" smtClean="0"/>
-              <a:t>(флуктуации, шум)</a:t>
+              <a:t>Случайная ошибка (флуктуации, шум)</a:t>
             </a:r>
           </a:p>
           <a:p>
             <a:pPr lvl="1"/>
             <a:r>
-              <a:rPr lang="ru-RU" sz="2000" dirty="0" smtClean="0"/>
-              <a:t>Смещенные оценки </a:t>
-            </a:r>
-            <a:r>
               <a:rPr lang="ru-RU" sz="2000" dirty="0"/>
-              <a:t>параметров </a:t>
-            </a:r>
-            <a:endParaRPr lang="ru-RU" sz="2000" dirty="0" smtClean="0"/>
+              <a:t>Смещенные оценки параметров </a:t>
+            </a:r>
           </a:p>
           <a:p>
             <a:pPr lvl="1"/>
             <a:r>
-              <a:rPr lang="ru-RU" sz="2000" dirty="0" smtClean="0"/>
+              <a:rPr lang="ru-RU" sz="2000" dirty="0"/>
               <a:t>Дрейф данных (из за ограниченности выборки не все паттерны теста учтены в </a:t>
             </a:r>
             <a:r>
-              <a:rPr lang="ru-RU" sz="2000" dirty="0" err="1" smtClean="0"/>
-              <a:t>трейне</a:t>
-            </a:r>
-            <a:r>
-              <a:rPr lang="ru-RU" sz="2000" dirty="0" smtClean="0"/>
-              <a:t>)</a:t>
-            </a:r>
-          </a:p>
-          <a:p>
-            <a:pPr lvl="1"/>
-            <a:r>
-              <a:rPr lang="ru-RU" sz="2000" dirty="0" smtClean="0"/>
-              <a:t>Дрейф концепции (появление истинно новых </a:t>
-            </a:r>
-            <a:r>
-              <a:rPr lang="ru-RU" sz="2000" dirty="0" err="1" smtClean="0"/>
-              <a:t>патетрнов</a:t>
-            </a:r>
-            <a:r>
-              <a:rPr lang="ru-RU" sz="2000" dirty="0" smtClean="0"/>
-              <a:t> в </a:t>
-            </a:r>
-            <a:r>
-              <a:rPr lang="ru-RU" sz="2000" dirty="0" err="1" smtClean="0"/>
+              <a:rPr lang="ru-RU" sz="2000" dirty="0" err="1"/>
               <a:t>трейне</a:t>
             </a:r>
             <a:r>
               <a:rPr lang="ru-RU" sz="2000" dirty="0"/>
               <a:t>)</a:t>
             </a:r>
-            <a:endParaRPr lang="ru-RU" sz="2000" dirty="0" smtClean="0"/>
+          </a:p>
+          <a:p>
+            <a:pPr lvl="1"/>
+            <a:r>
+              <a:rPr lang="ru-RU" sz="2000" dirty="0"/>
+              <a:t>Дрейф концепции (появление истинно новых </a:t>
+            </a:r>
+            <a:r>
+              <a:rPr lang="ru-RU" sz="2000" dirty="0" err="1"/>
+              <a:t>патетрнов</a:t>
+            </a:r>
+            <a:r>
+              <a:rPr lang="ru-RU" sz="2000" dirty="0"/>
+              <a:t> в </a:t>
+            </a:r>
+            <a:r>
+              <a:rPr lang="ru-RU" sz="2000" dirty="0" err="1"/>
+              <a:t>трейне</a:t>
+            </a:r>
+            <a:r>
+              <a:rPr lang="ru-RU" sz="2000" dirty="0"/>
+              <a:t>)</a:t>
+            </a:r>
           </a:p>
           <a:p>
             <a:pPr marL="0" indent="0">
               <a:buNone/>
             </a:pPr>
             <a:r>
-              <a:rPr lang="ru-RU" sz="2100" b="1" dirty="0" smtClean="0"/>
+              <a:rPr lang="ru-RU" sz="2100" b="1" dirty="0"/>
               <a:t>Ошибки предсказаний приводят к неопределённости предсказаний</a:t>
             </a:r>
           </a:p>
@@ -4759,10 +5143,9 @@
           <a:lstStyle/>
           <a:p>
             <a:r>
-              <a:rPr lang="ru-RU" dirty="0" smtClean="0"/>
+              <a:rPr lang="ru-RU" dirty="0"/>
               <a:t>Неучтенная информация?</a:t>
             </a:r>
-            <a:endParaRPr lang="ru-RU" dirty="0"/>
           </a:p>
         </p:txBody>
       </p:sp>
@@ -4805,17 +5188,10 @@
   <p:clrMapOvr>
     <a:masterClrMapping/>
   </p:clrMapOvr>
-  <p:timing>
-    <p:tnLst>
-      <p:par>
-        <p:cTn id="1" dur="indefinite" restart="never" nodeType="tmRoot"/>
-      </p:par>
-    </p:tnLst>
-  </p:timing>
 </p:sld>
 </file>
 
-<file path=ppt/slides/slide13.xml><?xml version="1.0" encoding="utf-8"?>
+<file path=ppt/slides/slide14.xml><?xml version="1.0" encoding="utf-8"?>
 <p:sld xmlns:a="http://schemas.openxmlformats.org/drawingml/2006/main" xmlns:r="http://schemas.openxmlformats.org/officeDocument/2006/relationships" xmlns:p="http://schemas.openxmlformats.org/presentationml/2006/main">
   <p:cSld>
     <p:spTree>
@@ -4856,10 +5232,9 @@
           <a:p>
             <a:pPr algn="ctr"/>
             <a:r>
-              <a:rPr lang="ru-RU" dirty="0" smtClean="0"/>
+              <a:rPr lang="ru-RU" dirty="0"/>
               <a:t>Особенности оценки неопределенности </a:t>
             </a:r>
-            <a:endParaRPr lang="ru-RU" dirty="0"/>
           </a:p>
         </p:txBody>
       </p:sp>
@@ -4891,54 +5266,54 @@
                   <a:buNone/>
                 </a:pPr>
                 <a:r>
-                  <a:rPr lang="ru-RU" sz="2100" b="1" dirty="0" smtClean="0"/>
+                  <a:rPr lang="ru-RU" sz="2100" b="1" dirty="0"/>
                   <a:t>Оценка неопределенности предсказание позволяет:</a:t>
                 </a:r>
               </a:p>
               <a:p>
                 <a:r>
-                  <a:rPr lang="ru-RU" sz="2100" dirty="0" smtClean="0"/>
+                  <a:rPr lang="ru-RU" sz="2100" dirty="0"/>
                   <a:t>Оценить диапазон возможных значений</a:t>
                 </a:r>
               </a:p>
               <a:p>
                 <a:pPr lvl="1"/>
                 <a:r>
-                  <a:rPr lang="ru-RU" sz="1700" dirty="0" smtClean="0"/>
+                  <a:rPr lang="ru-RU" sz="1700" dirty="0"/>
                   <a:t>Выход за диапазон –показатель дрейфа\аномалий или других факторов ненадежности модели</a:t>
                 </a:r>
               </a:p>
               <a:p>
                 <a:r>
-                  <a:rPr lang="ru-RU" sz="2100" dirty="0" smtClean="0"/>
+                  <a:rPr lang="ru-RU" sz="2100" dirty="0"/>
                   <a:t>Оценить точность модели</a:t>
                 </a:r>
               </a:p>
               <a:p>
                 <a:pPr lvl="1"/>
                 <a:r>
-                  <a:rPr lang="ru-RU" sz="1700" dirty="0" smtClean="0"/>
+                  <a:rPr lang="ru-RU" sz="1700" dirty="0"/>
                   <a:t>Напр. чем уже диапазон неопределённости на тесте – тем лучше.</a:t>
                 </a:r>
               </a:p>
               <a:p>
                 <a:pPr lvl="1"/>
                 <a:r>
-                  <a:rPr lang="ru-RU" sz="1700" dirty="0" smtClean="0"/>
+                  <a:rPr lang="ru-RU" sz="1700" dirty="0"/>
                   <a:t>Резкое сужение диапазона на </a:t>
                 </a:r>
                 <a:r>
-                  <a:rPr lang="ru-RU" sz="1700" dirty="0" err="1" smtClean="0"/>
+                  <a:rPr lang="ru-RU" sz="1700" dirty="0" err="1"/>
                   <a:t>трейн</a:t>
                 </a:r>
                 <a:r>
-                  <a:rPr lang="ru-RU" sz="1700" dirty="0" smtClean="0"/>
+                  <a:rPr lang="ru-RU" sz="1700" dirty="0"/>
                   <a:t> – индикатор переобучения.</a:t>
                 </a:r>
               </a:p>
               <a:p>
                 <a:r>
-                  <a:rPr lang="ru-RU" sz="2100" dirty="0" smtClean="0"/>
+                  <a:rPr lang="ru-RU" sz="2100" dirty="0"/>
                   <a:t>Оценить риски модели</a:t>
                 </a:r>
               </a:p>
@@ -4946,56 +5321,52 @@
                 <a:pPr lvl="1"/>
                 <a:r>
                   <a:rPr lang="ru-RU" sz="1700" dirty="0"/>
-                  <a:t>Напр. разброс позволяет говорить что тренд может и </a:t>
-                </a:r>
-                <a:r>
-                  <a:rPr lang="ru-RU" sz="1700" dirty="0" smtClean="0"/>
-                  <a:t>поменяться</a:t>
+                  <a:t>Напр. разброс позволяет говорить что тренд может и поменяться</a:t>
                 </a:r>
               </a:p>
               <a:p>
                 <a:r>
-                  <a:rPr lang="ru-RU" sz="2100" dirty="0" smtClean="0"/>
+                  <a:rPr lang="ru-RU" sz="2100" dirty="0"/>
                   <a:t>Повысить предметную интерпретируемость модели</a:t>
                 </a:r>
               </a:p>
               <a:p>
                 <a:pPr lvl="1"/>
                 <a:r>
-                  <a:rPr lang="ru-RU" sz="1700" dirty="0" smtClean="0"/>
+                  <a:rPr lang="ru-RU" sz="1700" dirty="0"/>
                   <a:t>позволяет более реалистично оценить результаты </a:t>
                 </a:r>
                 <a:br>
-                  <a:rPr lang="ru-RU" sz="1700" dirty="0" smtClean="0"/>
+                  <a:rPr lang="ru-RU" sz="1700" dirty="0"/>
                 </a:br>
                 <a:r>
-                  <a:rPr lang="ru-RU" sz="1700" dirty="0" smtClean="0"/>
+                  <a:rPr lang="ru-RU" sz="1700" dirty="0"/>
                   <a:t>работы модели в предметной логике</a:t>
                 </a:r>
               </a:p>
               <a:p>
                 <a:pPr lvl="1"/>
                 <a:r>
-                  <a:rPr lang="ru-RU" sz="1700" dirty="0" smtClean="0"/>
+                  <a:rPr lang="ru-RU" sz="1700" dirty="0"/>
                   <a:t>Напр. средняя оценка загрузки </a:t>
                 </a:r>
                 <a:r>
-                  <a:rPr lang="ru-RU" sz="1700" dirty="0" err="1" smtClean="0"/>
+                  <a:rPr lang="ru-RU" sz="1700" dirty="0" err="1"/>
                   <a:t>колл</a:t>
                 </a:r>
                 <a:r>
-                  <a:rPr lang="ru-RU" sz="1700" dirty="0" smtClean="0"/>
+                  <a:rPr lang="ru-RU" sz="1700" dirty="0"/>
                   <a:t>-центра соответствует </a:t>
                 </a:r>
                 <a:br>
-                  <a:rPr lang="ru-RU" sz="1700" dirty="0" smtClean="0"/>
+                  <a:rPr lang="ru-RU" sz="1700" dirty="0"/>
                 </a:br>
                 <a:r>
-                  <a:rPr lang="ru-RU" sz="1700" dirty="0" smtClean="0"/>
+                  <a:rPr lang="ru-RU" sz="1700" dirty="0"/>
                   <a:t>нагрузке 10 специалистов, но разброс </a:t>
                 </a:r>
                 <a:r>
-                  <a:rPr lang="ru-RU" sz="1400" dirty="0" smtClean="0"/>
+                  <a:rPr lang="ru-RU" sz="1400" dirty="0"/>
                   <a:t>соответствует </a:t>
                 </a:r>
                 <a14:m>
@@ -5009,22 +5380,22 @@
                   </m:oMath>
                 </a14:m>
                 <a:r>
-                  <a:rPr lang="ru-RU" sz="1300" dirty="0" smtClean="0"/>
+                  <a:rPr lang="ru-RU" sz="1300" dirty="0"/>
                   <a:t>2 </a:t>
                 </a:r>
                 <a:r>
-                  <a:rPr lang="ru-RU" sz="1300" dirty="0" err="1" smtClean="0"/>
+                  <a:rPr lang="ru-RU" sz="1300" dirty="0" err="1"/>
                   <a:t>специлистам</a:t>
                 </a:r>
                 <a:r>
-                  <a:rPr lang="ru-RU" sz="1300" dirty="0" smtClean="0"/>
+                  <a:rPr lang="ru-RU" sz="1300" dirty="0"/>
                   <a:t>.</a:t>
                 </a:r>
                 <a:endParaRPr lang="en-US" sz="1300" dirty="0"/>
               </a:p>
               <a:p>
                 <a:pPr lvl="1"/>
-                <a:endParaRPr lang="ru-RU" sz="1700" b="1" dirty="0" smtClean="0"/>
+                <a:endParaRPr lang="ru-RU" sz="1700" b="1" dirty="0"/>
               </a:p>
               <a:p>
                 <a:pPr marL="0" indent="0">
@@ -5034,7 +5405,6 @@
                   <a:rPr lang="ru-RU" sz="2100" b="1" dirty="0"/>
                   <a:t>	</a:t>
                 </a:r>
-                <a:endParaRPr lang="ru-RU" sz="2100" b="1" dirty="0" smtClean="0"/>
               </a:p>
             </p:txBody>
           </p:sp>
@@ -5325,10 +5695,9 @@
           <a:lstStyle/>
           <a:p>
             <a:r>
-              <a:rPr lang="ru-RU" dirty="0" smtClean="0"/>
+              <a:rPr lang="ru-RU" dirty="0"/>
               <a:t>Неучтенная информация?</a:t>
             </a:r>
-            <a:endParaRPr lang="ru-RU" dirty="0"/>
           </a:p>
         </p:txBody>
       </p:sp>
@@ -5370,17 +5739,10 @@
   <p:clrMapOvr>
     <a:masterClrMapping/>
   </p:clrMapOvr>
-  <p:timing>
-    <p:tnLst>
-      <p:par>
-        <p:cTn id="1" dur="indefinite" restart="never" nodeType="tmRoot"/>
-      </p:par>
-    </p:tnLst>
-  </p:timing>
 </p:sld>
 </file>
 
-<file path=ppt/slides/slide14.xml><?xml version="1.0" encoding="utf-8"?>
+<file path=ppt/slides/slide15.xml><?xml version="1.0" encoding="utf-8"?>
 <p:sld xmlns:a="http://schemas.openxmlformats.org/drawingml/2006/main" xmlns:r="http://schemas.openxmlformats.org/officeDocument/2006/relationships" xmlns:p="http://schemas.openxmlformats.org/presentationml/2006/main">
   <p:cSld>
     <p:spTree>
@@ -5421,10 +5783,9 @@
           <a:p>
             <a:pPr algn="ctr"/>
             <a:r>
-              <a:rPr lang="ru-RU" dirty="0" smtClean="0"/>
+              <a:rPr lang="ru-RU" dirty="0"/>
               <a:t>Особенности оценки неопределенности </a:t>
             </a:r>
-            <a:endParaRPr lang="ru-RU" dirty="0"/>
           </a:p>
         </p:txBody>
       </p:sp>
@@ -5456,7 +5817,7 @@
                   <a:buNone/>
                 </a:pPr>
                 <a:r>
-                  <a:rPr lang="ru-RU" sz="2100" b="1" dirty="0" smtClean="0"/>
+                  <a:rPr lang="ru-RU" sz="2100" b="1" dirty="0"/>
                   <a:t>Неопределённость может быть оценена, </a:t>
                 </a:r>
               </a:p>
@@ -5465,16 +5826,12 @@
                   <a:buNone/>
                 </a:pPr>
                 <a:r>
-                  <a:rPr lang="ru-RU" sz="2100" b="1" dirty="0" err="1" smtClean="0"/>
+                  <a:rPr lang="ru-RU" sz="2100" b="1" dirty="0" err="1"/>
                   <a:t>Нативно</a:t>
                 </a:r>
                 <a:r>
-                  <a:rPr lang="ru-RU" sz="2100" dirty="0" smtClean="0"/>
-                  <a:t>: </a:t>
-                </a:r>
-                <a:r>
                   <a:rPr lang="ru-RU" sz="2100" dirty="0"/>
-                  <a:t>Например </a:t>
+                  <a:t>: Например </a:t>
                 </a:r>
                 <a:r>
                   <a:rPr lang="en-US" sz="2100" dirty="0"/>
@@ -5485,32 +5842,23 @@
                   <a:t>или </a:t>
                 </a:r>
                 <a:r>
-                  <a:rPr lang="en-US" sz="2100" dirty="0" smtClean="0"/>
+                  <a:rPr lang="en-US" sz="2100" dirty="0"/>
                   <a:t>ARIMA</a:t>
                 </a:r>
                 <a:r>
-                  <a:rPr lang="ru-RU" sz="2100" dirty="0" smtClean="0"/>
+                  <a:rPr lang="ru-RU" sz="2100" dirty="0"/>
                   <a:t> дают оценки СКО при предсказании</a:t>
                 </a:r>
                 <a:r>
-                  <a:rPr lang="en-US" sz="2100" dirty="0" smtClean="0"/>
+                  <a:rPr lang="en-US" sz="2100" dirty="0"/>
                   <a:t>.</a:t>
                 </a:r>
-                <a:endParaRPr lang="en-US" sz="2100" dirty="0"/>
               </a:p>
               <a:p>
                 <a:pPr lvl="1"/>
                 <a:r>
-                  <a:rPr lang="ru-RU" sz="2500" dirty="0" smtClean="0"/>
-                  <a:t>такие </a:t>
-                </a:r>
-                <a:r>
                   <a:rPr lang="ru-RU" sz="2500" dirty="0"/>
-                  <a:t>оценки предполагают, что остатки имеют заданное распределение, напр. нормальное</a:t>
-                </a:r>
-                <a:r>
-                  <a:rPr lang="ru-RU" sz="2500" dirty="0" smtClean="0"/>
-                  <a:t>.</a:t>
+                  <a:t>такие оценки предполагают, что остатки имеют заданное распределение, напр. нормальное.</a:t>
                 </a:r>
               </a:p>
               <a:p>
@@ -5685,7 +6033,7 @@
                   <a:buNone/>
                 </a:pPr>
                 <a:r>
-                  <a:rPr lang="ru-RU" sz="2100" dirty="0" smtClean="0"/>
+                  <a:rPr lang="ru-RU" sz="2100" dirty="0"/>
                   <a:t>где </a:t>
                 </a:r>
                 <a14:m>
@@ -5705,7 +6053,7 @@
                   </m:oMath>
                 </a14:m>
                 <a:r>
-                  <a:rPr lang="ru-RU" sz="2000" b="0" i="0" dirty="0" smtClean="0">
+                  <a:rPr lang="ru-RU" sz="2000" b="0" i="0" dirty="0">
                     <a:latin typeface="+mj-lt"/>
                   </a:rPr>
                   <a:t>-интервальное предсказание</a:t>
@@ -5758,7 +6106,7 @@
                   </m:oMath>
                 </a14:m>
                 <a:r>
-                  <a:rPr lang="ru-RU" sz="2000" dirty="0" smtClean="0"/>
+                  <a:rPr lang="ru-RU" sz="2000" dirty="0"/>
                   <a:t>- точечный прогноз, </a:t>
                 </a:r>
                 <a14:m>
@@ -5772,7 +6120,7 @@
                   </m:oMath>
                 </a14:m>
                 <a:r>
-                  <a:rPr lang="ru-RU" sz="2000" dirty="0" smtClean="0"/>
+                  <a:rPr lang="ru-RU" sz="2000" dirty="0"/>
                   <a:t> – квантиль нормального распределения, </a:t>
                 </a:r>
                 <a14:m>
@@ -5813,7 +6161,7 @@
                   </m:oMath>
                 </a14:m>
                 <a:r>
-                  <a:rPr lang="ru-RU" sz="2000" dirty="0" smtClean="0"/>
+                  <a:rPr lang="ru-RU" sz="2000" dirty="0"/>
                   <a:t> - предсказанная дисперсия прогноза, </a:t>
                 </a:r>
                 <a14:m>
@@ -5854,29 +6202,29 @@
                   </m:oMath>
                 </a14:m>
                 <a:r>
-                  <a:rPr lang="ru-RU" sz="2000" dirty="0" smtClean="0"/>
+                  <a:rPr lang="ru-RU" sz="2000" dirty="0"/>
                   <a:t> - дисперсия остатков.</a:t>
                 </a:r>
-                <a:endParaRPr lang="en-US" sz="2000" dirty="0" smtClean="0"/>
+                <a:endParaRPr lang="en-US" sz="2000" dirty="0"/>
               </a:p>
               <a:p>
                 <a:pPr marL="0" indent="0">
                   <a:buNone/>
                 </a:pPr>
                 <a:r>
-                  <a:rPr lang="ru-RU" sz="2500" dirty="0" smtClean="0"/>
+                  <a:rPr lang="ru-RU" sz="2500" dirty="0"/>
                   <a:t>Путем ассиметричной регрессии (</a:t>
                 </a:r>
                 <a:r>
-                  <a:rPr lang="ru-RU" sz="2500" b="1" dirty="0" err="1" smtClean="0"/>
+                  <a:rPr lang="ru-RU" sz="2500" b="1" dirty="0" err="1"/>
                   <a:t>квантильные</a:t>
                 </a:r>
                 <a:r>
-                  <a:rPr lang="ru-RU" sz="2500" b="1" dirty="0" smtClean="0"/>
+                  <a:rPr lang="ru-RU" sz="2500" b="1" dirty="0"/>
                   <a:t> оценки</a:t>
                 </a:r>
                 <a:r>
-                  <a:rPr lang="ru-RU" sz="2500" dirty="0" smtClean="0"/>
+                  <a:rPr lang="ru-RU" sz="2500" dirty="0"/>
                   <a:t>), байесовские оценки </a:t>
                 </a:r>
               </a:p>
@@ -5885,22 +6233,22 @@
                   <a:buNone/>
                 </a:pPr>
                 <a:r>
-                  <a:rPr lang="ru-RU" sz="2500" dirty="0" smtClean="0"/>
+                  <a:rPr lang="ru-RU" sz="2500" dirty="0"/>
                   <a:t>При помощи эвристических – устойчивых техник:</a:t>
                 </a:r>
               </a:p>
               <a:p>
                 <a:pPr lvl="1"/>
                 <a:r>
-                  <a:rPr lang="ru-RU" sz="2500" b="1" dirty="0" smtClean="0"/>
+                  <a:rPr lang="ru-RU" sz="2500" b="1" dirty="0"/>
                   <a:t>Бут-</a:t>
                 </a:r>
                 <a:r>
-                  <a:rPr lang="ru-RU" sz="2500" b="1" dirty="0" err="1" smtClean="0"/>
+                  <a:rPr lang="ru-RU" sz="2500" b="1" dirty="0" err="1"/>
                   <a:t>стреп</a:t>
                 </a:r>
                 <a:r>
-                  <a:rPr lang="ru-RU" sz="2500" b="1" dirty="0" smtClean="0"/>
+                  <a:rPr lang="ru-RU" sz="2500" b="1" dirty="0"/>
                   <a:t> и </a:t>
                 </a:r>
                 <a:r>
@@ -5909,24 +6257,16 @@
                 </a:r>
                 <a:r>
                   <a:rPr lang="ru-RU" sz="2500" b="1" dirty="0"/>
-                  <a:t> </a:t>
-                </a:r>
-                <a:r>
-                  <a:rPr lang="ru-RU" sz="2500" b="1" dirty="0" smtClean="0"/>
-                  <a:t>предсказания</a:t>
+                  <a:t> предсказания</a:t>
                 </a:r>
               </a:p>
               <a:p>
                 <a:pPr lvl="2"/>
                 <a:r>
                   <a:rPr lang="ru-RU" sz="2200" dirty="0"/>
-                  <a:t>Когда данные не соответствуют предположениям о </a:t>
+                  <a:t>Когда данные не соответствуют предположениям о нормальности и независимости остатков</a:t>
                 </a:r>
-                <a:r>
-                  <a:rPr lang="ru-RU" sz="2200" dirty="0" smtClean="0"/>
-                  <a:t>нормальности и независимости остатков</a:t>
-                </a:r>
-                <a:endParaRPr lang="ru-RU" sz="1900" b="1" dirty="0" smtClean="0"/>
+                <a:endParaRPr lang="ru-RU" sz="1900" b="1" dirty="0"/>
               </a:p>
             </p:txBody>
           </p:sp>
@@ -6114,63 +6454,45 @@
           <a:lstStyle/>
           <a:p>
             <a:r>
-              <a:rPr lang="ru-RU" sz="2000" i="1" dirty="0" smtClean="0"/>
-              <a:t>Часто </a:t>
-            </a:r>
-            <a:r>
               <a:rPr lang="ru-RU" sz="2000" i="1" dirty="0"/>
-              <a:t>все </a:t>
-            </a:r>
-            <a:r>
-              <a:rPr lang="ru-RU" sz="2000" i="1" dirty="0" smtClean="0"/>
-              <a:t>оценки интервалов на </a:t>
-            </a:r>
-            <a:r>
-              <a:rPr lang="ru-RU" sz="2000" i="1" dirty="0" err="1" smtClean="0"/>
+              <a:t>Часто все оценки интервалов на </a:t>
+            </a:r>
+            <a:r>
+              <a:rPr lang="ru-RU" sz="2000" i="1" dirty="0" err="1"/>
               <a:t>валидации</a:t>
             </a:r>
             <a:r>
-              <a:rPr lang="ru-RU" sz="2000" i="1" dirty="0" smtClean="0"/>
+              <a:rPr lang="ru-RU" sz="2000" i="1" dirty="0"/>
               <a:t> занижены. </a:t>
             </a:r>
           </a:p>
           <a:p>
             <a:r>
-              <a:rPr lang="ru-RU" sz="2000" i="1" dirty="0" smtClean="0"/>
-              <a:t>Например</a:t>
-            </a:r>
-            <a:r>
               <a:rPr lang="ru-RU" sz="2000" i="1" dirty="0"/>
-              <a:t>, номинальные интервалы в 95% могут обеспечить охват только от 71% до 87%. </a:t>
-            </a:r>
-            <a:endParaRPr lang="ru-RU" sz="2000" i="1" dirty="0" smtClean="0"/>
-          </a:p>
-          <a:p>
-            <a:r>
-              <a:rPr lang="ru-RU" sz="2000" i="1" dirty="0" smtClean="0"/>
+              <a:t>Например, номинальные интервалы в 95% могут обеспечить охват только от 71% до 87%. </a:t>
+            </a:r>
+          </a:p>
+          <a:p>
+            <a:r>
+              <a:rPr lang="ru-RU" sz="2000" i="1" dirty="0"/>
               <a:t>В </a:t>
             </a:r>
             <a:r>
-              <a:rPr lang="ru-RU" sz="2000" i="1" dirty="0" err="1" smtClean="0"/>
+              <a:rPr lang="ru-RU" sz="2000" i="1" dirty="0" err="1"/>
               <a:t>валидационной</a:t>
             </a:r>
             <a:r>
-              <a:rPr lang="ru-RU" sz="2000" i="1" dirty="0" smtClean="0"/>
-              <a:t> выборке не </a:t>
-            </a:r>
-            <a:r>
               <a:rPr lang="ru-RU" sz="2000" i="1" dirty="0"/>
-              <a:t>учитывают все источники неопределенности. </a:t>
-            </a:r>
-            <a:endParaRPr lang="ru-RU" sz="2000" i="1" dirty="0" smtClean="0"/>
-          </a:p>
-          <a:p>
-            <a:r>
-              <a:rPr lang="ru-RU" sz="2000" i="1" dirty="0" smtClean="0"/>
+              <a:t> выборке не учитывают все источники неопределенности. </a:t>
+            </a:r>
+          </a:p>
+          <a:p>
+            <a:r>
+              <a:rPr lang="ru-RU" sz="2000" i="1" dirty="0"/>
               <a:t>Правильно оценивать интервалы в мониторинге или на тесте </a:t>
             </a:r>
             <a:r>
-              <a:rPr lang="en-US" sz="1200" i="1" dirty="0" smtClean="0"/>
+              <a:rPr lang="en-US" sz="1200" i="1" dirty="0"/>
               <a:t>https://robjhyndman.com/hyndsight/narrow-pi/</a:t>
             </a:r>
             <a:endParaRPr lang="ru-RU" sz="1200" i="1" dirty="0"/>
@@ -6187,17 +6509,10 @@
   <p:clrMapOvr>
     <a:masterClrMapping/>
   </p:clrMapOvr>
-  <p:timing>
-    <p:tnLst>
-      <p:par>
-        <p:cTn id="1" dur="indefinite" restart="never" nodeType="tmRoot"/>
-      </p:par>
-    </p:tnLst>
-  </p:timing>
 </p:sld>
 </file>
 
-<file path=ppt/slides/slide15.xml><?xml version="1.0" encoding="utf-8"?>
+<file path=ppt/slides/slide16.xml><?xml version="1.0" encoding="utf-8"?>
 <p:sld xmlns:a="http://schemas.openxmlformats.org/drawingml/2006/main" xmlns:r="http://schemas.openxmlformats.org/officeDocument/2006/relationships" xmlns:p="http://schemas.openxmlformats.org/presentationml/2006/main">
   <p:cSld>
     <p:spTree>
@@ -6238,10 +6553,9 @@
           <a:p>
             <a:pPr algn="ctr"/>
             <a:r>
-              <a:rPr lang="ru-RU" dirty="0" smtClean="0"/>
+              <a:rPr lang="ru-RU" dirty="0"/>
               <a:t>Особенности оценки неопределенности </a:t>
             </a:r>
-            <a:endParaRPr lang="ru-RU" dirty="0"/>
           </a:p>
         </p:txBody>
       </p:sp>
@@ -6371,13 +6685,8 @@
             </a:r>
             <a:r>
               <a:rPr lang="ru-RU" sz="2200" dirty="0"/>
-              <a:t> —неопределенность прогноза оценивается путем многократной генерации прогнозов с использованием случайных </a:t>
-            </a:r>
-            <a:r>
-              <a:rPr lang="ru-RU" sz="2200" dirty="0" smtClean="0"/>
-              <a:t>выборок остатков </a:t>
-            </a:r>
-            <a:endParaRPr lang="ru-RU" sz="2200" dirty="0"/>
+              <a:t> —неопределенность прогноза оценивается путем многократной генерации прогнозов с использованием случайных выборок остатков </a:t>
+            </a:r>
           </a:p>
           <a:p>
             <a:endParaRPr lang="ru-RU" sz="2000" dirty="0"/>
@@ -6655,20 +6964,12 @@
               <a:rPr lang="ru-RU" sz="2400" dirty="0"/>
               <a:t> – </a:t>
             </a:r>
-            <a:r>
-              <a:rPr lang="ru-RU" sz="2400" dirty="0" smtClean="0"/>
-              <a:t/>
-            </a:r>
             <a:br>
-              <a:rPr lang="ru-RU" sz="2400" dirty="0" smtClean="0"/>
+              <a:rPr lang="ru-RU" sz="2400" dirty="0"/>
             </a:br>
             <a:r>
-              <a:rPr lang="ru-RU" sz="2400" dirty="0" smtClean="0"/>
-              <a:t>Оценка </a:t>
-            </a:r>
-            <a:r>
               <a:rPr lang="ru-RU" sz="2400" dirty="0"/>
-              <a:t>неопределенности единожды на калибровочной (</a:t>
+              <a:t>Оценка неопределенности единожды на калибровочной (</a:t>
             </a:r>
             <a:r>
               <a:rPr lang="ru-RU" sz="2400" dirty="0" err="1"/>
@@ -6679,7 +6980,7 @@
               <a:t>) </a:t>
             </a:r>
             <a:r>
-              <a:rPr lang="ru-RU" sz="2400" dirty="0" err="1" smtClean="0"/>
+              <a:rPr lang="ru-RU" sz="2400" dirty="0" err="1"/>
               <a:t>подбвыборке</a:t>
             </a:r>
             <a:endParaRPr lang="ru-RU" sz="2400" dirty="0"/>
@@ -6764,17 +7065,10 @@
   <p:clrMapOvr>
     <a:masterClrMapping/>
   </p:clrMapOvr>
-  <p:timing>
-    <p:tnLst>
-      <p:par>
-        <p:cTn id="1" dur="indefinite" restart="never" nodeType="tmRoot"/>
-      </p:par>
-    </p:tnLst>
-  </p:timing>
 </p:sld>
 </file>
 
-<file path=ppt/slides/slide16.xml><?xml version="1.0" encoding="utf-8"?>
+<file path=ppt/slides/slide17.xml><?xml version="1.0" encoding="utf-8"?>
 <p:sld xmlns:a="http://schemas.openxmlformats.org/drawingml/2006/main" xmlns:r="http://schemas.openxmlformats.org/officeDocument/2006/relationships" xmlns:p="http://schemas.openxmlformats.org/presentationml/2006/main">
   <p:cSld>
     <p:spTree>
@@ -6813,10 +7107,9 @@
           <a:p>
             <a:pPr algn="ctr"/>
             <a:r>
-              <a:rPr lang="ru-RU" b="1" dirty="0" smtClean="0"/>
+              <a:rPr lang="ru-RU" b="1" dirty="0"/>
               <a:t>Метрики оценки неопределенности</a:t>
             </a:r>
-            <a:endParaRPr lang="ru-RU" b="1" dirty="0"/>
           </a:p>
         </p:txBody>
       </p:sp>
@@ -6924,15 +7217,15 @@
                         <a:p>
                           <a:pPr algn="ctr" fontAlgn="b"/>
                           <a:r>
-                            <a:rPr lang="ru-RU" sz="2000" dirty="0" smtClean="0"/>
+                            <a:rPr lang="ru-RU" sz="2000" dirty="0"/>
                             <a:t>Универсальные</a:t>
                           </a:r>
                           <a:r>
-                            <a:rPr lang="en-US" sz="2000" dirty="0" smtClean="0"/>
+                            <a:rPr lang="en-US" sz="2000" dirty="0"/>
                             <a:t> </a:t>
                           </a:r>
                           <a:r>
-                            <a:rPr lang="ru-RU" sz="2000" dirty="0" smtClean="0"/>
+                            <a:rPr lang="ru-RU" sz="2000" dirty="0"/>
                             <a:t>метрики оценки</a:t>
                           </a:r>
                           <a:endParaRPr lang="ru-RU" sz="2000" b="0" i="0" u="none" strike="noStrike" dirty="0">
@@ -6990,15 +7283,15 @@
                         <a:p>
                           <a:pPr algn="ctr" fontAlgn="b"/>
                           <a:r>
-                            <a:rPr lang="ru-RU" sz="2000" dirty="0" smtClean="0"/>
+                            <a:rPr lang="ru-RU" sz="2000" dirty="0"/>
                             <a:t>Универсальные</a:t>
                           </a:r>
                           <a:r>
-                            <a:rPr lang="en-US" sz="2000" dirty="0" smtClean="0"/>
+                            <a:rPr lang="en-US" sz="2000" dirty="0"/>
                             <a:t> </a:t>
                           </a:r>
                           <a:r>
-                            <a:rPr lang="ru-RU" sz="2000" dirty="0" smtClean="0"/>
+                            <a:rPr lang="ru-RU" sz="2000" dirty="0"/>
                             <a:t>метрики оценки</a:t>
                           </a:r>
                           <a:endParaRPr lang="ru-RU" sz="2000" b="0" i="0" u="none" strike="noStrike" dirty="0">
@@ -7056,7 +7349,7 @@
                         <a:p>
                           <a:pPr algn="ctr" fontAlgn="b"/>
                           <a:r>
-                            <a:rPr lang="ru-RU" sz="2000" b="0" i="0" u="none" strike="noStrike" dirty="0" smtClean="0">
+                            <a:rPr lang="ru-RU" sz="2000" b="0" i="0" u="none" strike="noStrike" dirty="0">
                               <a:solidFill>
                                 <a:srgbClr val="000000"/>
                               </a:solidFill>
@@ -7065,13 +7358,6 @@
                             </a:rPr>
                             <a:t>интерпретация</a:t>
                           </a:r>
-                          <a:endParaRPr lang="ru-RU" sz="2000" b="0" i="0" u="none" strike="noStrike" dirty="0">
-                            <a:solidFill>
-                              <a:srgbClr val="000000"/>
-                            </a:solidFill>
-                            <a:effectLst/>
-                            <a:latin typeface="Calibri" panose="020F0502020204030204" pitchFamily="34" charset="0"/>
-                          </a:endParaRPr>
                         </a:p>
                       </a:txBody>
                       <a:tcPr marL="9525" marR="9525" marT="9525" marB="0" anchor="b">
@@ -7127,7 +7413,7 @@
                         <a:p>
                           <a:pPr algn="ctr" fontAlgn="b"/>
                           <a:r>
-                            <a:rPr lang="ru-RU" sz="2000" b="0" i="0" u="none" strike="noStrike" dirty="0" smtClean="0">
+                            <a:rPr lang="ru-RU" sz="2000" b="0" i="0" u="none" strike="noStrike" dirty="0">
                               <a:solidFill>
                                 <a:srgbClr val="000000"/>
                               </a:solidFill>
@@ -7137,7 +7423,7 @@
                             <a:t>Покрытие интервала </a:t>
                           </a:r>
                           <a:r>
-                            <a:rPr lang="en-US" sz="2000" b="0" i="0" u="none" strike="noStrike" dirty="0" smtClean="0">
+                            <a:rPr lang="en-US" sz="2000" b="0" i="0" u="none" strike="noStrike" dirty="0">
                               <a:solidFill>
                                 <a:srgbClr val="000000"/>
                               </a:solidFill>
@@ -7147,7 +7433,7 @@
                             <a:t>(coverage,</a:t>
                           </a:r>
                           <a:r>
-                            <a:rPr lang="en-US" sz="2000" b="0" i="0" u="none" strike="noStrike" baseline="0" dirty="0" smtClean="0">
+                            <a:rPr lang="en-US" sz="2000" b="0" i="0" u="none" strike="noStrike" baseline="0" dirty="0">
                               <a:solidFill>
                                 <a:srgbClr val="000000"/>
                               </a:solidFill>
@@ -7157,7 +7443,7 @@
                             <a:t> </a:t>
                           </a:r>
                           <a:br>
-                            <a:rPr lang="en-US" sz="2000" b="0" i="0" u="none" strike="noStrike" baseline="0" dirty="0" smtClean="0">
+                            <a:rPr lang="en-US" sz="2000" b="0" i="0" u="none" strike="noStrike" baseline="0" dirty="0">
                               <a:solidFill>
                                 <a:srgbClr val="000000"/>
                               </a:solidFill>
@@ -7166,7 +7452,7 @@
                             </a:rPr>
                           </a:br>
                           <a:r>
-                            <a:rPr lang="en-US" sz="1800" b="0" i="0" kern="1200" dirty="0" smtClean="0">
+                            <a:rPr lang="en-US" sz="1800" b="0" i="0" kern="1200" dirty="0">
                               <a:solidFill>
                                 <a:schemeClr val="tx1"/>
                               </a:solidFill>
@@ -7515,7 +7801,7 @@
                               </m:oMath>
                             </m:oMathPara>
                           </a14:m>
-                          <a:endParaRPr lang="en-US" sz="2000" b="0" i="0" dirty="0" smtClean="0">
+                          <a:endParaRPr lang="en-US" sz="2000" b="0" i="0" dirty="0">
                             <a:solidFill>
                               <a:srgbClr val="000000"/>
                             </a:solidFill>
@@ -7656,10 +7942,10 @@
                             <a:t> - </a:t>
                           </a:r>
                           <a:r>
-                            <a:rPr lang="ru-RU" sz="2000" dirty="0" smtClean="0"/>
+                            <a:rPr lang="ru-RU" sz="2000" dirty="0"/>
                             <a:t>оценки границ интервала</a:t>
                           </a:r>
-                          <a:endParaRPr lang="ru-RU" sz="2000" b="0" i="0" u="none" strike="noStrike" dirty="0" smtClean="0">
+                          <a:endParaRPr lang="ru-RU" sz="2000" b="0" i="0" u="none" strike="noStrike" dirty="0">
                             <a:solidFill>
                               <a:srgbClr val="000000"/>
                             </a:solidFill>
@@ -7689,21 +7975,13 @@
                             <a:rPr lang="ru-RU" sz="1800" dirty="0"/>
                             <a:t> — индикаторная функция </a:t>
                           </a:r>
-                          <a:endParaRPr lang="en-US" sz="1800" dirty="0" smtClean="0"/>
+                          <a:endParaRPr lang="en-US" sz="1800" dirty="0"/>
                         </a:p>
                         <a:p>
                           <a:pPr algn="ctr"/>
                           <a:r>
-                            <a:rPr lang="ru-RU" sz="1800" dirty="0" smtClean="0"/>
-                            <a:t>(</a:t>
-                          </a:r>
-                          <a:r>
                             <a:rPr lang="ru-RU" sz="1800" dirty="0"/>
-                            <a:t>1, если условие выполняется, иначе 0</a:t>
-                          </a:r>
-                          <a:r>
-                            <a:rPr lang="ru-RU" sz="1800" dirty="0" smtClean="0"/>
-                            <a:t>)</a:t>
+                            <a:t>(1, если условие выполняется, иначе 0)</a:t>
                           </a:r>
                         </a:p>
                       </a:txBody>
@@ -7753,22 +8031,22 @@
                         <a:p>
                           <a:pPr algn="ctr"/>
                           <a:r>
-                            <a:rPr lang="ru-RU" sz="2000" dirty="0" smtClean="0"/>
+                            <a:rPr lang="ru-RU" sz="2000" dirty="0"/>
                             <a:t>Чем</a:t>
                           </a:r>
                           <a:r>
-                            <a:rPr lang="ru-RU" sz="2000" baseline="0" dirty="0" smtClean="0"/>
+                            <a:rPr lang="ru-RU" sz="2000" baseline="0" dirty="0"/>
                             <a:t> больше, тем лучше. </a:t>
                           </a:r>
-                          <a:endParaRPr lang="en-US" sz="2000" baseline="0" dirty="0" smtClean="0"/>
+                          <a:endParaRPr lang="en-US" sz="2000" baseline="0" dirty="0"/>
                         </a:p>
                         <a:p>
                           <a:pPr algn="ctr"/>
                           <a:r>
-                            <a:rPr lang="ru-RU" sz="2000" baseline="0" dirty="0" smtClean="0"/>
+                            <a:rPr lang="ru-RU" sz="2000" baseline="0" dirty="0"/>
                             <a:t>В идеале 95% предсказаний попадает в оценку 95% интервала</a:t>
                           </a:r>
-                          <a:endParaRPr lang="ru-RU" sz="2000" dirty="0" smtClean="0"/>
+                          <a:endParaRPr lang="ru-RU" sz="2000" dirty="0"/>
                         </a:p>
                       </a:txBody>
                       <a:tcPr marL="9525" marR="9525" marT="9525" marB="0" anchor="b">
@@ -7824,7 +8102,7 @@
                         <a:p>
                           <a:pPr algn="ctr" fontAlgn="b"/>
                           <a:r>
-                            <a:rPr lang="ru-RU" sz="2000" b="0" i="0" u="none" strike="noStrike" dirty="0" smtClean="0">
+                            <a:rPr lang="ru-RU" sz="2000" b="0" i="0" u="none" strike="noStrike" dirty="0">
                               <a:solidFill>
                                 <a:srgbClr val="000000"/>
                               </a:solidFill>
@@ -7834,7 +8112,7 @@
                             <a:t>Ширина</a:t>
                           </a:r>
                           <a:r>
-                            <a:rPr lang="ru-RU" sz="2000" b="0" i="0" u="none" strike="noStrike" baseline="0" dirty="0" smtClean="0">
+                            <a:rPr lang="ru-RU" sz="2000" b="0" i="0" u="none" strike="noStrike" baseline="0" dirty="0">
                               <a:solidFill>
                                 <a:srgbClr val="000000"/>
                               </a:solidFill>
@@ -7844,7 +8122,7 @@
                             <a:t> оценки интервала (</a:t>
                           </a:r>
                           <a:r>
-                            <a:rPr lang="en-US" sz="1800" b="0" i="0" kern="1200" dirty="0" smtClean="0">
+                            <a:rPr lang="en-US" sz="1800" b="0" i="0" kern="1200" dirty="0">
                               <a:solidFill>
                                 <a:schemeClr val="tx1"/>
                               </a:solidFill>
@@ -7856,7 +8134,7 @@
                             <a:t>Prediction Interval Normalized Average Width</a:t>
                           </a:r>
                           <a:r>
-                            <a:rPr lang="ru-RU" sz="1800" b="0" i="0" kern="1200" dirty="0" smtClean="0">
+                            <a:rPr lang="ru-RU" sz="1800" b="0" i="0" kern="1200" dirty="0">
                               <a:solidFill>
                                 <a:schemeClr val="tx1"/>
                               </a:solidFill>
@@ -8106,12 +8384,12 @@
                               </m:oMath>
                             </m:oMathPara>
                           </a14:m>
-                          <a:endParaRPr lang="ru-RU" sz="1900" dirty="0" smtClean="0"/>
+                          <a:endParaRPr lang="ru-RU" sz="1900" dirty="0"/>
                         </a:p>
                         <a:p>
                           <a:pPr algn="ctr"/>
                           <a:r>
-                            <a:rPr lang="en-US" sz="1900" dirty="0" smtClean="0"/>
+                            <a:rPr lang="en-US" sz="1900" dirty="0"/>
                             <a:t> </a:t>
                           </a:r>
                           <a14:m>
@@ -8197,11 +8475,11 @@
                         <a:p>
                           <a:pPr algn="ctr"/>
                           <a:r>
-                            <a:rPr lang="ru-RU" sz="1900" dirty="0" smtClean="0"/>
+                            <a:rPr lang="ru-RU" sz="1900" dirty="0"/>
                             <a:t>Чем</a:t>
                           </a:r>
                           <a:r>
-                            <a:rPr lang="ru-RU" sz="1900" baseline="0" dirty="0" smtClean="0"/>
+                            <a:rPr lang="ru-RU" sz="1900" baseline="0" dirty="0"/>
                             <a:t> уже оценка интервала – тем лучше.</a:t>
                           </a:r>
                           <a:endParaRPr lang="ru-RU" sz="1900" dirty="0"/>
@@ -8260,7 +8538,7 @@
                         <a:p>
                           <a:pPr algn="ctr" fontAlgn="b"/>
                           <a:r>
-                            <a:rPr lang="en-US" sz="2000" dirty="0" smtClean="0">
+                            <a:rPr lang="en-US" sz="2000" dirty="0">
                               <a:solidFill>
                                 <a:srgbClr val="000000"/>
                               </a:solidFill>
@@ -8910,7 +9188,7 @@
                               </m:oMath>
                             </m:oMathPara>
                           </a14:m>
-                          <a:endParaRPr lang="ru-RU" sz="2000" b="0" i="0" u="none" strike="noStrike" dirty="0" smtClean="0">
+                          <a:endParaRPr lang="ru-RU" sz="2000" b="0" i="0" u="none" strike="noStrike" dirty="0">
                             <a:solidFill>
                               <a:srgbClr val="000000"/>
                             </a:solidFill>
@@ -8981,7 +9259,7 @@
                             <a:defRPr/>
                           </a:pPr>
                           <a:r>
-                            <a:rPr lang="ru-RU" sz="2000" b="0" i="0" u="none" strike="noStrike" dirty="0" smtClean="0">
+                            <a:rPr lang="ru-RU" sz="2000" b="0" i="0" u="none" strike="noStrike" dirty="0">
                               <a:solidFill>
                                 <a:srgbClr val="000000"/>
                               </a:solidFill>
@@ -8991,7 +9269,7 @@
                             <a:t>Минимаксная</a:t>
                           </a:r>
                           <a:r>
-                            <a:rPr lang="ru-RU" sz="2000" b="0" i="0" u="none" strike="noStrike" baseline="0" dirty="0" smtClean="0">
+                            <a:rPr lang="ru-RU" sz="2000" b="0" i="0" u="none" strike="noStrike" baseline="0" dirty="0">
                               <a:solidFill>
                                 <a:srgbClr val="000000"/>
                               </a:solidFill>
@@ -9001,7 +9279,7 @@
                             <a:t> задача </a:t>
                           </a:r>
                           <a:r>
-                            <a:rPr lang="ru-RU" sz="2000" b="0" i="0" u="none" strike="noStrike" dirty="0" smtClean="0">
+                            <a:rPr lang="ru-RU" sz="2000" b="0" i="0" u="none" strike="noStrike" dirty="0">
                               <a:solidFill>
                                 <a:srgbClr val="000000"/>
                               </a:solidFill>
@@ -9011,7 +9289,7 @@
                             <a:t>ширина</a:t>
                           </a:r>
                           <a:r>
-                            <a:rPr lang="ru-RU" sz="2000" b="0" i="0" u="none" strike="noStrike" baseline="0" dirty="0" smtClean="0">
+                            <a:rPr lang="ru-RU" sz="2000" b="0" i="0" u="none" strike="noStrike" baseline="0" dirty="0">
                               <a:solidFill>
                                 <a:srgbClr val="000000"/>
                               </a:solidFill>
@@ -9020,7 +9298,7 @@
                             </a:rPr>
                             <a:t> интервала и непопадание в интервал</a:t>
                           </a:r>
-                          <a:endParaRPr lang="en-US" sz="2000" b="0" i="0" u="none" strike="noStrike" dirty="0" smtClean="0">
+                          <a:endParaRPr lang="en-US" sz="2000" b="0" i="0" u="none" strike="noStrike" dirty="0">
                             <a:solidFill>
                               <a:srgbClr val="000000"/>
                             </a:solidFill>
@@ -10068,17 +10346,10 @@
   <p:clrMapOvr>
     <a:masterClrMapping/>
   </p:clrMapOvr>
-  <p:timing>
-    <p:tnLst>
-      <p:par>
-        <p:cTn id="1" dur="indefinite" restart="never" nodeType="tmRoot"/>
-      </p:par>
-    </p:tnLst>
-  </p:timing>
 </p:sld>
 </file>
 
-<file path=ppt/slides/slide17.xml><?xml version="1.0" encoding="utf-8"?>
+<file path=ppt/slides/slide18.xml><?xml version="1.0" encoding="utf-8"?>
 <p:sld xmlns:a="http://schemas.openxmlformats.org/drawingml/2006/main" xmlns:r="http://schemas.openxmlformats.org/officeDocument/2006/relationships" xmlns:p="http://schemas.openxmlformats.org/presentationml/2006/main">
   <p:cSld>
     <p:spTree>
@@ -10117,10 +10388,9 @@
           <a:p>
             <a:pPr algn="ctr"/>
             <a:r>
-              <a:rPr lang="ru-RU" b="1" dirty="0" smtClean="0"/>
+              <a:rPr lang="ru-RU" b="1" dirty="0"/>
               <a:t>Метрики оценки неопределенности</a:t>
             </a:r>
-            <a:endParaRPr lang="ru-RU" b="1" dirty="0"/>
           </a:p>
         </p:txBody>
       </p:sp>
@@ -10237,7 +10507,7 @@
                         <a:p>
                           <a:pPr algn="ctr" fontAlgn="b"/>
                           <a:r>
-                            <a:rPr lang="en-US" sz="2000" b="0" i="0" u="none" strike="noStrike" dirty="0" smtClean="0">
+                            <a:rPr lang="en-US" sz="2000" b="0" i="0" u="none" strike="noStrike" dirty="0">
                               <a:solidFill>
                                 <a:srgbClr val="000000"/>
                               </a:solidFill>
@@ -10247,7 +10517,7 @@
                             <a:t>C</a:t>
                           </a:r>
                           <a:r>
-                            <a:rPr lang="ru-RU" sz="2000" b="0" i="0" u="none" strike="noStrike" dirty="0" smtClean="0">
+                            <a:rPr lang="ru-RU" sz="2000" b="0" i="0" u="none" strike="noStrike" dirty="0">
                               <a:solidFill>
                                 <a:srgbClr val="000000"/>
                               </a:solidFill>
@@ -10256,13 +10526,6 @@
                             </a:rPr>
                             <a:t>специальные метрики</a:t>
                           </a:r>
-                          <a:endParaRPr lang="ru-RU" sz="2000" b="0" i="0" u="none" strike="noStrike" dirty="0">
-                            <a:solidFill>
-                              <a:srgbClr val="000000"/>
-                            </a:solidFill>
-                            <a:effectLst/>
-                            <a:latin typeface="Calibri" panose="020F0502020204030204" pitchFamily="34" charset="0"/>
-                          </a:endParaRPr>
                         </a:p>
                       </a:txBody>
                       <a:tcPr marL="9525" marR="9525" marT="9525" marB="0" anchor="b">
@@ -10311,7 +10574,7 @@
                         <a:p>
                           <a:pPr algn="ctr" fontAlgn="b"/>
                           <a:r>
-                            <a:rPr lang="ru-RU" sz="2000" b="0" i="0" u="none" strike="noStrike" dirty="0" err="1" smtClean="0">
+                            <a:rPr lang="ru-RU" sz="2000" b="0" i="0" u="none" strike="noStrike" dirty="0" err="1">
                               <a:solidFill>
                                 <a:srgbClr val="000000"/>
                               </a:solidFill>
@@ -10382,7 +10645,7 @@
                         <a:p>
                           <a:pPr algn="ctr" fontAlgn="b"/>
                           <a:r>
-                            <a:rPr lang="ru-RU" sz="2000" b="0" i="0" u="none" strike="noStrike" dirty="0" smtClean="0">
+                            <a:rPr lang="ru-RU" sz="2000" b="0" i="0" u="none" strike="noStrike" dirty="0">
                               <a:solidFill>
                                 <a:srgbClr val="000000"/>
                               </a:solidFill>
@@ -10391,7 +10654,7 @@
                             </a:rPr>
                             <a:t>Конформное предсказание</a:t>
                           </a:r>
-                          <a:endParaRPr lang="en-US" sz="2000" b="0" i="0" u="none" strike="noStrike" dirty="0" smtClean="0">
+                          <a:endParaRPr lang="en-US" sz="2000" b="0" i="0" u="none" strike="noStrike" dirty="0">
                             <a:solidFill>
                               <a:srgbClr val="000000"/>
                             </a:solidFill>
@@ -10402,7 +10665,7 @@
                         <a:p>
                           <a:pPr algn="ctr" fontAlgn="b"/>
                           <a:r>
-                            <a:rPr lang="en-US" sz="2000" b="0" i="0" u="none" strike="noStrike" dirty="0" smtClean="0">
+                            <a:rPr lang="en-US" sz="2000" b="0" i="0" u="none" strike="noStrike" dirty="0">
                               <a:solidFill>
                                 <a:srgbClr val="000000"/>
                               </a:solidFill>
@@ -10412,7 +10675,7 @@
                             <a:t>Calibration Error</a:t>
                           </a:r>
                           <a:r>
-                            <a:rPr lang="ru-RU" sz="2000" b="0" i="0" u="none" strike="noStrike" dirty="0" smtClean="0">
+                            <a:rPr lang="ru-RU" sz="2000" b="0" i="0" u="none" strike="noStrike" dirty="0">
                               <a:solidFill>
                                 <a:srgbClr val="000000"/>
                               </a:solidFill>
@@ -10476,7 +10739,7 @@
                         <a:p>
                           <a:pPr algn="ctr" fontAlgn="b"/>
                           <a:r>
-                            <a:rPr lang="en-US" sz="2000" b="0" i="0" u="none" strike="noStrike" dirty="0" smtClean="0">
+                            <a:rPr lang="en-US" sz="2000" b="0" i="0" u="none" strike="noStrike" dirty="0">
                               <a:solidFill>
                                 <a:srgbClr val="000000"/>
                               </a:solidFill>
@@ -10552,7 +10815,7 @@
                             </m:oMath>
                           </a14:m>
                           <a:r>
-                            <a:rPr lang="ru-RU" sz="2000" b="0" i="0" u="none" strike="noStrike" dirty="0" smtClean="0">
+                            <a:rPr lang="ru-RU" sz="2000" b="0" i="0" u="none" strike="noStrike" dirty="0">
                               <a:solidFill>
                                 <a:srgbClr val="000000"/>
                               </a:solidFill>
@@ -10561,7 +10824,7 @@
                             </a:rPr>
                             <a:t> </a:t>
                           </a:r>
-                          <a:endParaRPr lang="ru-RU" sz="2000" b="1" i="1" dirty="0" smtClean="0">
+                          <a:endParaRPr lang="ru-RU" sz="2000" b="1" i="1" dirty="0">
                             <a:latin typeface="Cambria Math" panose="02040503050406030204" pitchFamily="18" charset="0"/>
                           </a:endParaRPr>
                         </a:p>
@@ -10578,7 +10841,7 @@
                             </m:oMath>
                           </a14:m>
                           <a:r>
-                            <a:rPr lang="en-US" sz="2000" dirty="0" smtClean="0">
+                            <a:rPr lang="en-US" sz="2000" dirty="0">
                               <a:solidFill>
                                 <a:srgbClr val="2C2C36"/>
                               </a:solidFill>
@@ -10593,22 +10856,13 @@
                               </a:solidFill>
                               <a:latin typeface="system-ui"/>
                             </a:rPr>
-                            <a:t>— заявленный уровень </a:t>
-                          </a:r>
-                          <a:r>
-                            <a:rPr lang="ru-RU" sz="2000" dirty="0" smtClean="0">
-                              <a:solidFill>
-                                <a:srgbClr val="2C2C36"/>
-                              </a:solidFill>
-                              <a:latin typeface="system-ui"/>
-                            </a:rPr>
-                            <a:t>доверия,</a:t>
+                            <a:t>— заявленный уровень доверия,</a:t>
                           </a:r>
                         </a:p>
                         <a:p>
                           <a:pPr algn="ctr" fontAlgn="b"/>
                           <a:r>
-                            <a:rPr lang="ru-RU" sz="2000" baseline="0" dirty="0" smtClean="0">
+                            <a:rPr lang="ru-RU" sz="2000" baseline="0" dirty="0">
                               <a:solidFill>
                                 <a:srgbClr val="2C2C36"/>
                               </a:solidFill>
@@ -10671,7 +10925,7 @@
                         <a:p>
                           <a:pPr algn="ctr" fontAlgn="b"/>
                           <a:r>
-                            <a:rPr lang="ru-RU" sz="2000" b="0" i="0" u="none" strike="noStrike" dirty="0" smtClean="0">
+                            <a:rPr lang="ru-RU" sz="2000" b="0" i="0" u="none" strike="noStrike" dirty="0">
                               <a:solidFill>
                                 <a:srgbClr val="000000"/>
                               </a:solidFill>
@@ -10684,7 +10938,7 @@
                         <a:p>
                           <a:pPr algn="ctr" fontAlgn="b"/>
                           <a:r>
-                            <a:rPr lang="ru-RU" sz="2000" b="0" i="0" u="none" strike="noStrike" dirty="0" smtClean="0">
+                            <a:rPr lang="ru-RU" sz="2000" b="0" i="0" u="none" strike="noStrike" dirty="0">
                               <a:solidFill>
                                 <a:srgbClr val="000000"/>
                               </a:solidFill>
@@ -10694,7 +10948,7 @@
                             <a:t>Если</a:t>
                           </a:r>
                           <a:r>
-                            <a:rPr lang="ru-RU" sz="2000" b="0" i="0" u="none" strike="noStrike" baseline="0" dirty="0" smtClean="0">
+                            <a:rPr lang="ru-RU" sz="2000" b="0" i="0" u="none" strike="noStrike" baseline="0" dirty="0">
                               <a:solidFill>
                                 <a:srgbClr val="000000"/>
                               </a:solidFill>
@@ -10704,7 +10958,7 @@
                             <a:t> в 95% интервал попало 95% </a:t>
                           </a:r>
                           <a:r>
-                            <a:rPr lang="en-US" sz="2000" b="0" i="0" u="none" strike="noStrike" baseline="0" dirty="0" smtClean="0">
+                            <a:rPr lang="en-US" sz="2000" b="0" i="0" u="none" strike="noStrike" baseline="0" dirty="0">
                               <a:solidFill>
                                 <a:srgbClr val="000000"/>
                               </a:solidFill>
@@ -10717,7 +10971,7 @@
                         <a:p>
                           <a:pPr algn="ctr" fontAlgn="b"/>
                           <a:r>
-                            <a:rPr lang="ru-RU" sz="1800" b="0" i="0" u="none" strike="noStrike" dirty="0" smtClean="0">
+                            <a:rPr lang="ru-RU" sz="1800" b="0" i="0" u="none" strike="noStrike" dirty="0">
                               <a:solidFill>
                                 <a:srgbClr val="000000"/>
                               </a:solidFill>
@@ -10727,7 +10981,7 @@
                             <a:t>Если</a:t>
                           </a:r>
                           <a:r>
-                            <a:rPr lang="ru-RU" sz="1800" b="0" i="0" u="none" strike="noStrike" baseline="0" dirty="0" smtClean="0">
+                            <a:rPr lang="ru-RU" sz="1800" b="0" i="0" u="none" strike="noStrike" baseline="0" dirty="0">
                               <a:solidFill>
                                 <a:srgbClr val="000000"/>
                               </a:solidFill>
@@ -10737,7 +10991,7 @@
                             <a:t> в 95% интервал попало 100% или 90% </a:t>
                           </a:r>
                           <a:r>
-                            <a:rPr lang="en-US" sz="1800" b="0" i="0" u="none" strike="noStrike" baseline="0" dirty="0" smtClean="0">
+                            <a:rPr lang="en-US" sz="1800" b="0" i="0" u="none" strike="noStrike" baseline="0" dirty="0">
                               <a:solidFill>
                                 <a:srgbClr val="000000"/>
                               </a:solidFill>
@@ -10747,7 +11001,7 @@
                             <a:t>CE=</a:t>
                           </a:r>
                           <a:r>
-                            <a:rPr lang="ru-RU" sz="1800" b="0" i="0" u="none" strike="noStrike" baseline="0" dirty="0" smtClean="0">
+                            <a:rPr lang="ru-RU" sz="1800" b="0" i="0" u="none" strike="noStrike" baseline="0" dirty="0">
                               <a:solidFill>
                                 <a:srgbClr val="000000"/>
                               </a:solidFill>
@@ -10756,7 +11010,7 @@
                             </a:rPr>
                             <a:t>5%</a:t>
                           </a:r>
-                          <a:endParaRPr lang="en-US" sz="1800" b="0" i="0" u="none" strike="noStrike" baseline="0" dirty="0" smtClean="0">
+                          <a:endParaRPr lang="en-US" sz="1800" b="0" i="0" u="none" strike="noStrike" baseline="0" dirty="0">
                             <a:solidFill>
                               <a:srgbClr val="000000"/>
                             </a:solidFill>
@@ -10835,17 +11089,7 @@
                               <a:effectLst/>
                               <a:latin typeface="Calibri" panose="020F0502020204030204" pitchFamily="34" charset="0"/>
                             </a:rPr>
-                            <a:t> </a:t>
-                          </a:r>
-                          <a:r>
-                            <a:rPr lang="ru-RU" sz="2000" b="0" i="0" u="none" strike="noStrike" dirty="0" smtClean="0">
-                              <a:solidFill>
-                                <a:srgbClr val="000000"/>
-                              </a:solidFill>
-                              <a:effectLst/>
-                              <a:latin typeface="Calibri" panose="020F0502020204030204" pitchFamily="34" charset="0"/>
-                            </a:rPr>
-                            <a:t>регрессия (</a:t>
+                            <a:t> регрессия (</a:t>
                           </a:r>
                           <a14:m>
                             <m:oMath xmlns:m="http://schemas.openxmlformats.org/officeDocument/2006/math">
@@ -10882,7 +11126,7 @@
                             </m:oMath>
                           </a14:m>
                           <a:r>
-                            <a:rPr lang="ru-RU" sz="2000" b="0" i="0" u="none" strike="noStrike" dirty="0" smtClean="0">
+                            <a:rPr lang="ru-RU" sz="2000" b="0" i="0" u="none" strike="noStrike" dirty="0">
                               <a:solidFill>
                                 <a:srgbClr val="000000"/>
                               </a:solidFill>
@@ -10891,13 +11135,6 @@
                             </a:rPr>
                             <a:t>)</a:t>
                           </a:r>
-                          <a:endParaRPr lang="ru-RU" sz="2000" b="0" i="0" u="none" strike="noStrike" dirty="0">
-                            <a:solidFill>
-                              <a:srgbClr val="000000"/>
-                            </a:solidFill>
-                            <a:effectLst/>
-                            <a:latin typeface="Calibri" panose="020F0502020204030204" pitchFamily="34" charset="0"/>
-                          </a:endParaRPr>
                         </a:p>
                       </a:txBody>
                       <a:tcPr marL="9525" marR="9525" marT="9525" marB="0" anchor="b">
@@ -11323,7 +11560,7 @@
                               </m:oMath>
                             </m:oMathPara>
                           </a14:m>
-                          <a:endParaRPr lang="ru-RU" sz="2000" b="0" i="0" u="none" strike="noStrike" dirty="0" smtClean="0">
+                          <a:endParaRPr lang="ru-RU" sz="2000" b="0" i="0" u="none" strike="noStrike" dirty="0">
                             <a:solidFill>
                               <a:srgbClr val="000000"/>
                             </a:solidFill>
@@ -11350,7 +11587,7 @@
                             <a:defRPr/>
                           </a:pPr>
                           <a:r>
-                            <a:rPr lang="ru-RU" sz="2000" dirty="0" smtClean="0"/>
+                            <a:rPr lang="ru-RU" sz="2000" dirty="0"/>
                             <a:t>где τ – квантиль, </a:t>
                           </a:r>
                           <a14:m>
@@ -11410,13 +11647,8 @@
                           </a14:m>
                           <a:r>
                             <a:rPr lang="ru-RU" sz="2000" dirty="0"/>
-                            <a:t> – истинное </a:t>
+                            <a:t> – истинное значение</a:t>
                           </a:r>
-                          <a:r>
-                            <a:rPr lang="ru-RU" sz="2000" dirty="0" smtClean="0"/>
-                            <a:t>значение</a:t>
-                          </a:r>
-                          <a:endParaRPr lang="ru-RU" sz="2000" dirty="0"/>
                         </a:p>
                       </a:txBody>
                       <a:tcPr marL="9525" marR="9525" marT="9525" marB="0" anchor="b">
@@ -11481,11 +11713,11 @@
                             <a:defRPr/>
                           </a:pPr>
                           <a:r>
-                            <a:rPr lang="ru-RU" sz="2000" dirty="0" smtClean="0"/>
+                            <a:rPr lang="ru-RU" sz="2000" dirty="0"/>
                             <a:t>Чем меньше, тем</a:t>
                           </a:r>
                           <a:r>
-                            <a:rPr lang="ru-RU" sz="2000" baseline="0" dirty="0" smtClean="0"/>
+                            <a:rPr lang="ru-RU" sz="2000" baseline="0" dirty="0"/>
                             <a:t> лучше. </a:t>
                           </a:r>
                         </a:p>
@@ -11508,11 +11740,11 @@
                             <a:defRPr/>
                           </a:pPr>
                           <a:r>
-                            <a:rPr lang="ru-RU" sz="2000" dirty="0" smtClean="0"/>
+                            <a:rPr lang="ru-RU" sz="2000" dirty="0"/>
                             <a:t>Регрессия смещенного</a:t>
                           </a:r>
                           <a:r>
-                            <a:rPr lang="ru-RU" sz="2000" baseline="0" dirty="0" smtClean="0"/>
+                            <a:rPr lang="ru-RU" sz="2000" baseline="0" dirty="0"/>
                             <a:t> значения квантиля, сильно штрафует если значение выходит за заданный квантиль.</a:t>
                           </a:r>
                           <a:endParaRPr lang="ru-RU" sz="2000" dirty="0"/>
@@ -11983,7 +12215,7 @@
                         </a:p>
                         <a:p>
                           <a:pPr algn="ctr" fontAlgn="b"/>
-                          <a:endParaRPr lang="ru-RU" sz="2000" b="0" i="0" u="none" strike="noStrike" dirty="0" smtClean="0">
+                          <a:endParaRPr lang="ru-RU" sz="2000" b="0" i="0" u="none" strike="noStrike" dirty="0">
                             <a:solidFill>
                               <a:srgbClr val="000000"/>
                             </a:solidFill>
@@ -12010,13 +12242,13 @@
                             <a:defRPr/>
                           </a:pPr>
                           <a:r>
-                            <a:rPr lang="ru-RU" sz="2000" i="0" dirty="0" smtClean="0">
+                            <a:rPr lang="ru-RU" sz="2000" i="0" dirty="0">
                               <a:latin typeface="Calibri" panose="020F0502020204030204" pitchFamily="34" charset="0"/>
                             </a:rPr>
                             <a:t>Одна из приближенных формул</a:t>
                           </a:r>
                           <a:r>
-                            <a:rPr lang="en-US" sz="2000" b="0" i="0" u="none" strike="noStrike" dirty="0" smtClean="0">
+                            <a:rPr lang="en-US" sz="2000" b="0" i="0" u="none" strike="noStrike" dirty="0">
                               <a:solidFill>
                                 <a:srgbClr val="000000"/>
                               </a:solidFill>
@@ -12310,7 +12542,7 @@
                               </m:f>
                             </m:oMath>
                           </a14:m>
-                          <a:endParaRPr lang="ru-RU" sz="2000" i="0" dirty="0" smtClean="0">
+                          <a:endParaRPr lang="ru-RU" sz="2000" i="0" dirty="0">
                             <a:latin typeface="Calibri" panose="020F0502020204030204" pitchFamily="34" charset="0"/>
                           </a:endParaRPr>
                         </a:p>
@@ -12361,7 +12593,7 @@
                         <a:p>
                           <a:pPr algn="ctr" fontAlgn="b"/>
                           <a:r>
-                            <a:rPr lang="ru-RU" sz="2000" i="0" dirty="0" smtClean="0">
+                            <a:rPr lang="ru-RU" sz="2000" i="0" dirty="0">
                               <a:latin typeface="Calibri" panose="020F0502020204030204" pitchFamily="34" charset="0"/>
                             </a:rPr>
                             <a:t>Оценка всего распределения. </a:t>
@@ -12370,13 +12602,13 @@
                         <a:p>
                           <a:pPr algn="ctr" fontAlgn="b"/>
                           <a:r>
-                            <a:rPr lang="ru-RU" sz="2000" i="0" dirty="0" smtClean="0">
+                            <a:rPr lang="ru-RU" sz="2000" i="0" dirty="0">
                               <a:latin typeface="Calibri" panose="020F0502020204030204" pitchFamily="34" charset="0"/>
                             </a:rPr>
                             <a:t>Чем</a:t>
                           </a:r>
                           <a:r>
-                            <a:rPr lang="ru-RU" sz="2000" i="0" baseline="0" dirty="0" smtClean="0">
+                            <a:rPr lang="ru-RU" sz="2000" i="0" baseline="0" dirty="0">
                               <a:latin typeface="Calibri" panose="020F0502020204030204" pitchFamily="34" charset="0"/>
                             </a:rPr>
                             <a:t> меньше – тем лучше.</a:t>
@@ -13569,17 +13801,10 @@
   <p:clrMapOvr>
     <a:masterClrMapping/>
   </p:clrMapOvr>
-  <p:timing>
-    <p:tnLst>
-      <p:par>
-        <p:cTn id="1" dur="indefinite" restart="never" nodeType="tmRoot"/>
-      </p:par>
-    </p:tnLst>
-  </p:timing>
 </p:sld>
 </file>
 
-<file path=ppt/slides/slide18.xml><?xml version="1.0" encoding="utf-8"?>
+<file path=ppt/slides/slide19.xml><?xml version="1.0" encoding="utf-8"?>
 <p:sld xmlns:a="http://schemas.openxmlformats.org/drawingml/2006/main" xmlns:r="http://schemas.openxmlformats.org/officeDocument/2006/relationships" xmlns:p="http://schemas.openxmlformats.org/presentationml/2006/main">
   <p:cSld>
     <p:spTree>
@@ -13618,10 +13843,9 @@
           <a:p>
             <a:pPr algn="ctr"/>
             <a:r>
-              <a:rPr lang="ru-RU" dirty="0" smtClean="0"/>
+              <a:rPr lang="ru-RU" dirty="0"/>
               <a:t>Методы оценки неопределенности</a:t>
             </a:r>
-            <a:endParaRPr lang="ru-RU" dirty="0"/>
           </a:p>
         </p:txBody>
       </p:sp>
@@ -13786,13 +14010,7 @@
                         <a:rPr lang="ru-RU" sz="2000" u="none" strike="noStrike" dirty="0">
                           <a:effectLst/>
                         </a:rPr>
-                        <a:t>Гарантированное </a:t>
-                      </a:r>
-                      <a:r>
-                        <a:rPr lang="ru-RU" sz="2000" u="none" strike="noStrike" dirty="0" smtClean="0">
-                          <a:effectLst/>
-                        </a:rPr>
-                        <a:t>покрытие (надежность), </a:t>
+                        <a:t>Гарантированное покрытие (надежность), </a:t>
                       </a:r>
                     </a:p>
                     <a:p>
@@ -13801,18 +14019,18 @@
                         <a:buChar char="•"/>
                       </a:pPr>
                       <a:r>
-                        <a:rPr lang="ru-RU" sz="2000" u="none" strike="noStrike" dirty="0" smtClean="0">
+                        <a:rPr lang="ru-RU" sz="2000" u="none" strike="noStrike" dirty="0">
                           <a:effectLst/>
                         </a:rPr>
                         <a:t>Калибрует</a:t>
                       </a:r>
                       <a:r>
-                        <a:rPr lang="ru-RU" sz="2000" u="none" strike="noStrike" baseline="0" dirty="0" smtClean="0">
+                        <a:rPr lang="ru-RU" sz="2000" u="none" strike="noStrike" baseline="0" dirty="0">
                           <a:effectLst/>
                         </a:rPr>
                         <a:t> другие методы оценки</a:t>
                       </a:r>
-                      <a:endParaRPr lang="ru-RU" sz="2000" u="none" strike="noStrike" dirty="0" smtClean="0">
+                      <a:endParaRPr lang="ru-RU" sz="2000" u="none" strike="noStrike" dirty="0">
                         <a:effectLst/>
                       </a:endParaRPr>
                     </a:p>
@@ -13822,7 +14040,7 @@
                         <a:buChar char="•"/>
                       </a:pPr>
                       <a:r>
-                        <a:rPr lang="ru-RU" sz="2000" u="none" strike="noStrike" dirty="0" smtClean="0">
+                        <a:rPr lang="ru-RU" sz="2000" u="none" strike="noStrike" dirty="0">
                           <a:effectLst/>
                         </a:rPr>
                         <a:t>Не требует предположений о распределении, </a:t>
@@ -13834,13 +14052,13 @@
                         <a:buChar char="•"/>
                       </a:pPr>
                       <a:r>
-                        <a:rPr lang="ru-RU" sz="2000" u="none" strike="noStrike" dirty="0" smtClean="0">
+                        <a:rPr lang="ru-RU" sz="2000" u="none" strike="noStrike" dirty="0">
                           <a:effectLst/>
                         </a:rPr>
                         <a:t>скорость</a:t>
                       </a:r>
                       <a:r>
-                        <a:rPr lang="ru-RU" sz="2000" u="none" strike="noStrike" baseline="0" dirty="0" smtClean="0">
+                        <a:rPr lang="ru-RU" sz="2000" u="none" strike="noStrike" baseline="0" dirty="0">
                           <a:effectLst/>
                         </a:rPr>
                         <a:t> оценки</a:t>
@@ -13869,13 +14087,7 @@
                         <a:rPr lang="ru-RU" sz="2000" u="none" strike="noStrike" dirty="0">
                           <a:effectLst/>
                         </a:rPr>
-                        <a:t>Требует </a:t>
-                      </a:r>
-                      <a:r>
-                        <a:rPr lang="ru-RU" sz="2000" u="none" strike="noStrike" dirty="0" smtClean="0">
-                          <a:effectLst/>
-                        </a:rPr>
-                        <a:t>калибровочную выборку, </a:t>
+                        <a:t>Требует калибровочную выборку, </a:t>
                       </a:r>
                     </a:p>
                     <a:p>
@@ -13884,16 +14096,10 @@
                         <a:buChar char="•"/>
                       </a:pPr>
                       <a:r>
-                        <a:rPr lang="ru-RU" sz="2000" u="none" strike="noStrike" dirty="0" smtClean="0">
-                          <a:effectLst/>
-                        </a:rPr>
-                        <a:t>может </a:t>
-                      </a:r>
-                      <a:r>
                         <a:rPr lang="ru-RU" sz="2000" u="none" strike="noStrike" dirty="0">
                           <a:effectLst/>
                         </a:rPr>
-                        <a:t>давать широкие интервалы</a:t>
+                        <a:t>может давать широкие интервалы</a:t>
                       </a:r>
                       <a:endParaRPr lang="ru-RU" sz="2000" b="0" i="0" u="none" strike="noStrike" dirty="0">
                         <a:solidFill>
@@ -13949,13 +14155,7 @@
                         <a:rPr lang="ru-RU" sz="2000" u="none" strike="noStrike" dirty="0">
                           <a:effectLst/>
                         </a:rPr>
-                        <a:t>Не требует </a:t>
-                      </a:r>
-                      <a:r>
-                        <a:rPr lang="ru-RU" sz="2000" u="none" strike="noStrike" dirty="0" smtClean="0">
-                          <a:effectLst/>
-                        </a:rPr>
-                        <a:t>предположений о распределении, </a:t>
+                        <a:t>Не требует предположений о распределении, </a:t>
                       </a:r>
                     </a:p>
                     <a:p>
@@ -13964,7 +14164,7 @@
                         <a:buChar char="•"/>
                       </a:pPr>
                       <a:r>
-                        <a:rPr lang="ru-RU" sz="2000" u="none" strike="noStrike" dirty="0" smtClean="0">
+                        <a:rPr lang="ru-RU" sz="2000" u="none" strike="noStrike" dirty="0">
                           <a:effectLst/>
                         </a:rPr>
                         <a:t>Работа на небольших выборках</a:t>
@@ -13988,9 +14188,6 @@
                         </a:rPr>
                         <a:t>Высокие вычислительные затраты, </a:t>
                       </a:r>
-                      <a:endParaRPr lang="ru-RU" sz="2000" u="none" strike="noStrike" dirty="0" smtClean="0">
-                        <a:effectLst/>
-                      </a:endParaRPr>
                     </a:p>
                     <a:p>
                       <a:pPr marL="342900" indent="-161925" algn="l" fontAlgn="b">
@@ -13998,22 +14195,10 @@
                         <a:buChar char="•"/>
                       </a:pPr>
                       <a:r>
-                        <a:rPr lang="ru-RU" sz="2000" u="none" strike="noStrike" dirty="0" smtClean="0">
-                          <a:effectLst/>
-                        </a:rPr>
-                        <a:t>нет </a:t>
-                      </a:r>
-                      <a:r>
                         <a:rPr lang="ru-RU" sz="2000" u="none" strike="noStrike" dirty="0">
                           <a:effectLst/>
                         </a:rPr>
-                        <a:t>гарантии </a:t>
-                      </a:r>
-                      <a:r>
-                        <a:rPr lang="ru-RU" sz="2000" u="none" strike="noStrike" dirty="0" smtClean="0">
-                          <a:effectLst/>
-                        </a:rPr>
-                        <a:t>покрытия, </a:t>
+                        <a:t>нет гарантии покрытия, </a:t>
                       </a:r>
                     </a:p>
                     <a:p>
@@ -14022,7 +14207,7 @@
                         <a:buChar char="•"/>
                       </a:pPr>
                       <a:r>
-                        <a:rPr lang="ru-RU" sz="2000" b="0" i="0" u="none" strike="noStrike" dirty="0" smtClean="0">
+                        <a:rPr lang="ru-RU" sz="2000" b="0" i="0" u="none" strike="noStrike" dirty="0">
                           <a:solidFill>
                             <a:srgbClr val="000000"/>
                           </a:solidFill>
@@ -14031,13 +14216,6 @@
                         </a:rPr>
                         <a:t>Низка интерпретируемость</a:t>
                       </a:r>
-                      <a:endParaRPr lang="ru-RU" sz="2000" b="0" i="0" u="none" strike="noStrike" dirty="0">
-                        <a:solidFill>
-                          <a:srgbClr val="000000"/>
-                        </a:solidFill>
-                        <a:effectLst/>
-                        <a:latin typeface="Calibri" panose="020F0502020204030204" pitchFamily="34" charset="0"/>
-                      </a:endParaRPr>
                     </a:p>
                   </a:txBody>
                   <a:tcPr marL="9525" marR="9525" marT="9525" marB="0" anchor="b"/>
@@ -14056,7 +14234,7 @@
                     <a:p>
                       <a:pPr algn="l" fontAlgn="b"/>
                       <a:r>
-                        <a:rPr lang="ru-RU" sz="1800" b="0" i="0" kern="1200" dirty="0" err="1" smtClean="0">
+                        <a:rPr lang="ru-RU" sz="1800" b="0" i="0" kern="1200" dirty="0" err="1">
                           <a:solidFill>
                             <a:schemeClr val="tx1"/>
                           </a:solidFill>
@@ -14068,7 +14246,7 @@
                         <a:t>Квантильная</a:t>
                       </a:r>
                       <a:r>
-                        <a:rPr lang="ru-RU" sz="1800" b="0" i="0" kern="1200" dirty="0" smtClean="0">
+                        <a:rPr lang="ru-RU" sz="1800" b="0" i="0" kern="1200" dirty="0">
                           <a:solidFill>
                             <a:schemeClr val="tx1"/>
                           </a:solidFill>
@@ -14100,7 +14278,7 @@
                         <a:buChar char="•"/>
                       </a:pPr>
                       <a:r>
-                        <a:rPr lang="ru-RU" sz="2000" b="0" i="0" kern="1200" dirty="0" smtClean="0">
+                        <a:rPr lang="ru-RU" sz="2000" b="0" i="0" kern="1200" dirty="0">
                           <a:solidFill>
                             <a:schemeClr val="tx1"/>
                           </a:solidFill>
@@ -14131,7 +14309,7 @@
                         <a:defRPr/>
                       </a:pPr>
                       <a:r>
-                        <a:rPr lang="ru-RU" sz="2000" u="none" strike="noStrike" dirty="0" smtClean="0">
+                        <a:rPr lang="ru-RU" sz="2000" u="none" strike="noStrike" dirty="0">
                           <a:effectLst/>
                         </a:rPr>
                         <a:t>Не требует предположений о распределении, </a:t>
@@ -14150,7 +14328,7 @@
                         <a:buChar char="•"/>
                       </a:pPr>
                       <a:r>
-                        <a:rPr lang="ru-RU" sz="2000" b="0" i="0" u="none" strike="noStrike" dirty="0" smtClean="0">
+                        <a:rPr lang="ru-RU" sz="2000" b="0" i="0" u="none" strike="noStrike" dirty="0">
                           <a:solidFill>
                             <a:srgbClr val="000000"/>
                           </a:solidFill>
@@ -14166,7 +14344,7 @@
                         <a:buChar char="•"/>
                       </a:pPr>
                       <a:r>
-                        <a:rPr lang="ru-RU" sz="2000" b="0" i="0" u="none" strike="noStrike" dirty="0" smtClean="0">
+                        <a:rPr lang="ru-RU" sz="2000" b="0" i="0" u="none" strike="noStrike" dirty="0">
                           <a:solidFill>
                             <a:srgbClr val="000000"/>
                           </a:solidFill>
@@ -14175,13 +14353,6 @@
                         </a:rPr>
                         <a:t>Зависит от метрики</a:t>
                       </a:r>
-                      <a:endParaRPr lang="ru-RU" sz="2000" b="0" i="0" u="none" strike="noStrike" dirty="0">
-                        <a:solidFill>
-                          <a:srgbClr val="000000"/>
-                        </a:solidFill>
-                        <a:effectLst/>
-                        <a:latin typeface="Calibri" panose="020F0502020204030204" pitchFamily="34" charset="0"/>
-                      </a:endParaRPr>
                     </a:p>
                   </a:txBody>
                   <a:tcPr marL="9525" marR="9525" marT="9525" marB="0" anchor="b"/>
@@ -14231,9 +14402,6 @@
                         </a:rPr>
                         <a:t>Быстрый, </a:t>
                       </a:r>
-                      <a:endParaRPr lang="ru-RU" sz="2000" u="none" strike="noStrike" dirty="0" smtClean="0">
-                        <a:effectLst/>
-                      </a:endParaRPr>
                     </a:p>
                     <a:p>
                       <a:pPr marL="342900" indent="-161925" algn="l" fontAlgn="b">
@@ -14241,7 +14409,7 @@
                         <a:buChar char="•"/>
                       </a:pPr>
                       <a:r>
-                        <a:rPr lang="ru-RU" sz="2000" u="none" strike="noStrike" dirty="0" smtClean="0">
+                        <a:rPr lang="ru-RU" sz="2000" u="none" strike="noStrike" dirty="0">
                           <a:effectLst/>
                         </a:rPr>
                         <a:t>Интерпретируемый, </a:t>
@@ -14253,13 +14421,13 @@
                         <a:buChar char="•"/>
                       </a:pPr>
                       <a:r>
-                        <a:rPr lang="ru-RU" sz="2000" u="none" strike="noStrike" dirty="0" err="1" smtClean="0">
+                        <a:rPr lang="ru-RU" sz="2000" u="none" strike="noStrike" dirty="0" err="1">
                           <a:effectLst/>
                         </a:rPr>
                         <a:t>бенчмарк</a:t>
                       </a:r>
                       <a:r>
-                        <a:rPr lang="ru-RU" sz="2000" u="none" strike="noStrike" baseline="0" dirty="0" smtClean="0">
+                        <a:rPr lang="ru-RU" sz="2000" u="none" strike="noStrike" baseline="0" dirty="0">
                           <a:effectLst/>
                         </a:rPr>
                         <a:t> оценки неопределённости</a:t>
@@ -14285,13 +14453,13 @@
                         <a:buChar char="•"/>
                       </a:pPr>
                       <a:r>
-                        <a:rPr lang="ru-RU" sz="2000" u="none" strike="noStrike" dirty="0" smtClean="0">
+                        <a:rPr lang="ru-RU" sz="2000" u="none" strike="noStrike" dirty="0">
                           <a:effectLst/>
                         </a:rPr>
                         <a:t>Работает</a:t>
                       </a:r>
                       <a:r>
-                        <a:rPr lang="ru-RU" sz="2000" u="none" strike="noStrike" baseline="0" dirty="0" smtClean="0">
+                        <a:rPr lang="ru-RU" sz="2000" u="none" strike="noStrike" baseline="0" dirty="0">
                           <a:effectLst/>
                         </a:rPr>
                         <a:t> только для некоторых моделей</a:t>
@@ -14303,7 +14471,7 @@
                         <a:buChar char="•"/>
                       </a:pPr>
                       <a:r>
-                        <a:rPr lang="ru-RU" sz="2000" b="0" i="0" u="none" strike="noStrike" baseline="0" dirty="0" smtClean="0">
+                        <a:rPr lang="ru-RU" sz="2000" b="0" i="0" u="none" strike="noStrike" baseline="0" dirty="0">
                           <a:solidFill>
                             <a:srgbClr val="000000"/>
                           </a:solidFill>
@@ -14371,475 +14539,6 @@
   <p:clrMapOvr>
     <a:masterClrMapping/>
   </p:clrMapOvr>
-  <p:timing>
-    <p:tnLst>
-      <p:par>
-        <p:cTn id="1" dur="indefinite" restart="never" nodeType="tmRoot"/>
-      </p:par>
-    </p:tnLst>
-  </p:timing>
-</p:sld>
-</file>
-
-<file path=ppt/slides/slide19.xml><?xml version="1.0" encoding="utf-8"?>
-<p:sld xmlns:a="http://schemas.openxmlformats.org/drawingml/2006/main" xmlns:r="http://schemas.openxmlformats.org/officeDocument/2006/relationships" xmlns:p="http://schemas.openxmlformats.org/presentationml/2006/main">
-  <p:cSld>
-    <p:spTree>
-      <p:nvGrpSpPr>
-        <p:cNvPr id="1" name=""/>
-        <p:cNvGrpSpPr/>
-        <p:nvPr/>
-      </p:nvGrpSpPr>
-      <p:grpSpPr>
-        <a:xfrm>
-          <a:off x="0" y="0"/>
-          <a:ext cx="0" cy="0"/>
-          <a:chOff x="0" y="0"/>
-          <a:chExt cx="0" cy="0"/>
-        </a:xfrm>
-      </p:grpSpPr>
-      <p:sp>
-        <p:nvSpPr>
-          <p:cNvPr id="2" name="Заголовок 1"/>
-          <p:cNvSpPr>
-            <a:spLocks noGrp="1"/>
-          </p:cNvSpPr>
-          <p:nvPr>
-            <p:ph type="title"/>
-          </p:nvPr>
-        </p:nvSpPr>
-        <p:spPr>
-          <a:xfrm>
-            <a:off x="290557" y="137488"/>
-            <a:ext cx="10991850" cy="635000"/>
-          </a:xfrm>
-        </p:spPr>
-        <p:txBody>
-          <a:bodyPr>
-            <a:normAutofit fontScale="90000"/>
-          </a:bodyPr>
-          <a:lstStyle/>
-          <a:p>
-            <a:pPr algn="ctr"/>
-            <a:r>
-              <a:rPr lang="ru-RU" b="1" dirty="0" smtClean="0"/>
-              <a:t>Мониторинг </a:t>
-            </a:r>
-            <a:endParaRPr lang="ru-RU" b="1" dirty="0"/>
-          </a:p>
-        </p:txBody>
-      </p:sp>
-      <p:sp>
-        <p:nvSpPr>
-          <p:cNvPr id="3" name="Объект 2"/>
-          <p:cNvSpPr>
-            <a:spLocks noGrp="1"/>
-          </p:cNvSpPr>
-          <p:nvPr>
-            <p:ph idx="1"/>
-          </p:nvPr>
-        </p:nvSpPr>
-        <p:spPr>
-          <a:xfrm>
-            <a:off x="155576" y="704851"/>
-            <a:ext cx="11920582" cy="5972174"/>
-          </a:xfrm>
-        </p:spPr>
-        <p:txBody>
-          <a:bodyPr>
-            <a:normAutofit fontScale="92500" lnSpcReduction="20000"/>
-          </a:bodyPr>
-          <a:lstStyle/>
-          <a:p>
-            <a:pPr marL="447675" lvl="1" indent="-352425">
-              <a:lnSpc>
-                <a:spcPct val="110000"/>
-              </a:lnSpc>
-              <a:spcBef>
-                <a:spcPts val="600"/>
-              </a:spcBef>
-            </a:pPr>
-            <a:r>
-              <a:rPr lang="ru-RU" b="1" dirty="0" smtClean="0"/>
-              <a:t>Дрейф данных </a:t>
-            </a:r>
-            <a:r>
-              <a:rPr lang="en-US" b="1" dirty="0" smtClean="0"/>
-              <a:t>(P(x))</a:t>
-            </a:r>
-            <a:r>
-              <a:rPr lang="ru-RU" dirty="0" smtClean="0"/>
-              <a:t>– </a:t>
-            </a:r>
-            <a:r>
-              <a:rPr lang="ru-RU" dirty="0"/>
-              <a:t>изменение в распределение значений ВР на тесте</a:t>
-            </a:r>
-            <a:endParaRPr lang="ru-RU" dirty="0" smtClean="0"/>
-          </a:p>
-          <a:p>
-            <a:pPr lvl="2">
-              <a:lnSpc>
-                <a:spcPct val="110000"/>
-              </a:lnSpc>
-              <a:spcBef>
-                <a:spcPts val="600"/>
-              </a:spcBef>
-            </a:pPr>
-            <a:r>
-              <a:rPr lang="ru-RU" sz="2400" dirty="0" smtClean="0"/>
-              <a:t>из за ограниченности выборки не все паттерны учтены в </a:t>
-            </a:r>
-            <a:r>
-              <a:rPr lang="ru-RU" sz="2400" dirty="0" err="1" smtClean="0"/>
-              <a:t>трейне</a:t>
-            </a:r>
-            <a:endParaRPr lang="ru-RU" sz="2400" dirty="0" smtClean="0"/>
-          </a:p>
-          <a:p>
-            <a:pPr lvl="3">
-              <a:lnSpc>
-                <a:spcPct val="110000"/>
-              </a:lnSpc>
-              <a:spcBef>
-                <a:spcPts val="600"/>
-              </a:spcBef>
-            </a:pPr>
-            <a:r>
-              <a:rPr lang="ru-RU" sz="2400" dirty="0" smtClean="0"/>
-              <a:t>Напр., на выборке в 3 года не учтены факторы високосного года.</a:t>
-            </a:r>
-          </a:p>
-          <a:p>
-            <a:pPr lvl="4">
-              <a:lnSpc>
-                <a:spcPct val="110000"/>
-              </a:lnSpc>
-              <a:spcBef>
-                <a:spcPts val="600"/>
-              </a:spcBef>
-            </a:pPr>
-            <a:r>
-              <a:rPr lang="ru-RU" sz="2400" dirty="0" smtClean="0"/>
-              <a:t> Нужно учесть в </a:t>
-            </a:r>
-            <a:r>
-              <a:rPr lang="ru-RU" sz="2400" dirty="0" err="1" smtClean="0"/>
-              <a:t>трейне</a:t>
-            </a:r>
-            <a:r>
-              <a:rPr lang="ru-RU" sz="2400" dirty="0" smtClean="0"/>
-              <a:t> и </a:t>
-            </a:r>
-            <a:r>
-              <a:rPr lang="ru-RU" sz="2400" dirty="0" err="1" smtClean="0"/>
-              <a:t>дообуёчить</a:t>
-            </a:r>
-            <a:r>
-              <a:rPr lang="ru-RU" sz="2400" dirty="0" smtClean="0"/>
-              <a:t> модель</a:t>
-            </a:r>
-            <a:endParaRPr lang="en-US" sz="2400" dirty="0" smtClean="0"/>
-          </a:p>
-          <a:p>
-            <a:pPr marL="447675" lvl="1" indent="-361950">
-              <a:lnSpc>
-                <a:spcPct val="110000"/>
-              </a:lnSpc>
-              <a:spcBef>
-                <a:spcPts val="600"/>
-              </a:spcBef>
-            </a:pPr>
-            <a:r>
-              <a:rPr lang="ru-RU" b="1" dirty="0" smtClean="0"/>
-              <a:t>Дрейф концепции</a:t>
-            </a:r>
-            <a:r>
-              <a:rPr lang="en-US" b="1" dirty="0" smtClean="0"/>
-              <a:t> (P(y))</a:t>
-            </a:r>
-            <a:r>
-              <a:rPr lang="ru-RU" b="1" dirty="0" smtClean="0"/>
-              <a:t> </a:t>
-            </a:r>
-            <a:r>
-              <a:rPr lang="ru-RU" dirty="0"/>
-              <a:t>– Появление </a:t>
-            </a:r>
-            <a:r>
-              <a:rPr lang="ru-RU" dirty="0" smtClean="0"/>
-              <a:t>истинно новых паттернов в тесте</a:t>
-            </a:r>
-          </a:p>
-          <a:p>
-            <a:pPr lvl="3">
-              <a:lnSpc>
-                <a:spcPct val="110000"/>
-              </a:lnSpc>
-              <a:spcBef>
-                <a:spcPts val="600"/>
-              </a:spcBef>
-            </a:pPr>
-            <a:r>
-              <a:rPr lang="ru-RU" sz="2400" dirty="0" smtClean="0"/>
-              <a:t>Напр., объявлена 4 дневная рабочая </a:t>
-            </a:r>
-            <a:r>
-              <a:rPr lang="ru-RU" sz="2400" dirty="0"/>
-              <a:t>неделя. – Нужно учесть </a:t>
-            </a:r>
-            <a:r>
-              <a:rPr lang="ru-RU" sz="2400" dirty="0" smtClean="0"/>
-              <a:t>пересмотреть модель</a:t>
-            </a:r>
-          </a:p>
-          <a:p>
-            <a:pPr marL="0" indent="0">
-              <a:lnSpc>
-                <a:spcPct val="110000"/>
-              </a:lnSpc>
-              <a:spcBef>
-                <a:spcPts val="600"/>
-              </a:spcBef>
-              <a:buNone/>
-            </a:pPr>
-            <a:r>
-              <a:rPr lang="ru-RU" sz="2400" b="1" dirty="0" smtClean="0"/>
-              <a:t>Ковариационный дрейф</a:t>
-            </a:r>
-            <a:r>
-              <a:rPr lang="en-US" sz="2400" b="1" dirty="0" smtClean="0"/>
-              <a:t> (P(</a:t>
-            </a:r>
-            <a:r>
-              <a:rPr lang="en-US" sz="2400" b="1" dirty="0" err="1" smtClean="0"/>
-              <a:t>y|x</a:t>
-            </a:r>
-            <a:r>
-              <a:rPr lang="en-US" sz="2400" b="1" dirty="0" smtClean="0"/>
-              <a:t>))</a:t>
-            </a:r>
-            <a:r>
-              <a:rPr lang="ru-RU" sz="2400" b="1" dirty="0" smtClean="0"/>
-              <a:t> </a:t>
-            </a:r>
-            <a:r>
-              <a:rPr lang="ru-RU" sz="2400" dirty="0" smtClean="0"/>
-              <a:t>– поведение объясняющих переменных поменялось.</a:t>
-            </a:r>
-          </a:p>
-          <a:p>
-            <a:pPr marL="0" indent="0">
-              <a:lnSpc>
-                <a:spcPct val="110000"/>
-              </a:lnSpc>
-              <a:spcBef>
-                <a:spcPts val="600"/>
-              </a:spcBef>
-              <a:buNone/>
-            </a:pPr>
-            <a:r>
-              <a:rPr lang="ru-RU" sz="2400" dirty="0"/>
-              <a:t>	</a:t>
-            </a:r>
-            <a:r>
-              <a:rPr lang="ru-RU" sz="2400" dirty="0" smtClean="0"/>
-              <a:t>напр. продажи мороженного основывались на том, что в </a:t>
-            </a:r>
-            <a:r>
-              <a:rPr lang="ru-RU" sz="2400" dirty="0" err="1" smtClean="0"/>
-              <a:t>трейне</a:t>
-            </a:r>
-            <a:r>
-              <a:rPr lang="ru-RU" sz="2400" dirty="0" smtClean="0"/>
-              <a:t> были солнечные дни.</a:t>
-            </a:r>
-          </a:p>
-          <a:p>
-            <a:pPr marL="0" indent="0">
-              <a:lnSpc>
-                <a:spcPct val="110000"/>
-              </a:lnSpc>
-              <a:spcBef>
-                <a:spcPts val="600"/>
-              </a:spcBef>
-              <a:buNone/>
-            </a:pPr>
-            <a:r>
-              <a:rPr lang="ru-RU" sz="2400" dirty="0"/>
-              <a:t>	</a:t>
-            </a:r>
-            <a:r>
-              <a:rPr lang="ru-RU" sz="2400" dirty="0" smtClean="0"/>
-              <a:t>	погода стала чаще пасмурной –продаже падают.</a:t>
-            </a:r>
-            <a:endParaRPr lang="en-US" sz="2400" dirty="0" smtClean="0"/>
-          </a:p>
-          <a:p>
-            <a:pPr marL="0" indent="0">
-              <a:buNone/>
-            </a:pPr>
-            <a:endParaRPr lang="en-US" sz="2100" dirty="0"/>
-          </a:p>
-          <a:p>
-            <a:pPr marL="0" indent="0">
-              <a:buNone/>
-            </a:pPr>
-            <a:r>
-              <a:rPr lang="ru-RU" sz="2100" dirty="0" smtClean="0"/>
-              <a:t>Дрейф </a:t>
-            </a:r>
-            <a:r>
-              <a:rPr lang="ru-RU" sz="2100" dirty="0"/>
-              <a:t>можно охарактеризовать как </a:t>
-            </a:r>
-            <a:r>
-              <a:rPr lang="en-US" sz="2100" dirty="0"/>
-              <a:t>out-of-distribution</a:t>
-            </a:r>
-            <a:r>
-              <a:rPr lang="ru-RU" sz="2100" dirty="0"/>
-              <a:t> </a:t>
-            </a:r>
-            <a:r>
-              <a:rPr lang="en-US" sz="2100" dirty="0" smtClean="0"/>
-              <a:t>forecasting</a:t>
-            </a:r>
-            <a:r>
-              <a:rPr lang="ru-RU" sz="2100" dirty="0" smtClean="0"/>
-              <a:t> </a:t>
-            </a:r>
-            <a:r>
-              <a:rPr lang="en-US" sz="2100" dirty="0" smtClean="0"/>
-              <a:t>(OOD).</a:t>
-            </a:r>
-          </a:p>
-          <a:p>
-            <a:pPr marL="0" indent="0">
-              <a:buNone/>
-            </a:pPr>
-            <a:r>
-              <a:rPr lang="ru-RU" sz="2100" dirty="0" smtClean="0"/>
-              <a:t>Часто </a:t>
-            </a:r>
-            <a:r>
-              <a:rPr lang="en-US" sz="2100" dirty="0" smtClean="0"/>
-              <a:t>OOD – </a:t>
-            </a:r>
-            <a:r>
-              <a:rPr lang="ru-RU" sz="2100" dirty="0" smtClean="0"/>
-              <a:t>новизна в данных.</a:t>
-            </a:r>
-            <a:endParaRPr lang="en-US" sz="2100" dirty="0" smtClean="0"/>
-          </a:p>
-          <a:p>
-            <a:r>
-              <a:rPr lang="ru-RU" sz="2300" dirty="0" smtClean="0"/>
-              <a:t>Стресс-тесты моделей (искусственные испытания моделей)</a:t>
-            </a:r>
-            <a:endParaRPr lang="ru-RU" sz="2300" dirty="0"/>
-          </a:p>
-          <a:p>
-            <a:r>
-              <a:rPr lang="ru-RU" sz="2300" dirty="0"/>
-              <a:t>Использование более устойчивых моделей (ансамбли, </a:t>
-            </a:r>
-            <a:r>
-              <a:rPr lang="ru-RU" sz="2300" dirty="0" err="1" smtClean="0"/>
-              <a:t>бустинг</a:t>
-            </a:r>
-            <a:r>
-              <a:rPr lang="ru-RU" sz="2300" dirty="0" smtClean="0"/>
-              <a:t> моделей)</a:t>
-            </a:r>
-            <a:endParaRPr lang="ru-RU" sz="2300" dirty="0"/>
-          </a:p>
-          <a:p>
-            <a:r>
-              <a:rPr lang="ru-RU" sz="2300" dirty="0"/>
-              <a:t>Мониторинг </a:t>
-            </a:r>
-            <a:r>
-              <a:rPr lang="ru-RU" sz="2300" dirty="0" smtClean="0"/>
-              <a:t>входных  данных и результатов </a:t>
-            </a:r>
-            <a:r>
-              <a:rPr lang="ru-RU" sz="2300" dirty="0" err="1" smtClean="0"/>
-              <a:t>предсаказания</a:t>
-            </a:r>
-            <a:endParaRPr lang="ru-RU" sz="2300" dirty="0"/>
-          </a:p>
-          <a:p>
-            <a:r>
-              <a:rPr lang="ru-RU" sz="2300" dirty="0" smtClean="0"/>
-              <a:t>Обучение новых моделей по расписанию</a:t>
-            </a:r>
-            <a:endParaRPr lang="ru-RU" sz="2300" dirty="0"/>
-          </a:p>
-          <a:p>
-            <a:pPr marL="0" indent="0">
-              <a:buNone/>
-            </a:pPr>
-            <a:endParaRPr lang="ru-RU" sz="2100" dirty="0"/>
-          </a:p>
-        </p:txBody>
-      </p:sp>
-      <p:sp>
-        <p:nvSpPr>
-          <p:cNvPr id="4" name="AutoShape 2" descr="Demonstration of iterative, autoregressive forecasting | Download  Scientific Diagram"/>
-          <p:cNvSpPr>
-            <a:spLocks noChangeAspect="1" noChangeArrowheads="1"/>
-          </p:cNvSpPr>
-          <p:nvPr/>
-        </p:nvSpPr>
-        <p:spPr bwMode="auto">
-          <a:xfrm>
-            <a:off x="155575" y="-144463"/>
-            <a:ext cx="304800" cy="304801"/>
-          </a:xfrm>
-          <a:prstGeom prst="rect">
-            <a:avLst/>
-          </a:prstGeom>
-          <a:noFill/>
-          <a:extLst>
-            <a:ext uri="{909E8E84-426E-40DD-AFC4-6F175D3DCCD1}">
-              <a14:hiddenFill xmlns:a14="http://schemas.microsoft.com/office/drawing/2010/main">
-                <a:solidFill>
-                  <a:srgbClr val="FFFFFF"/>
-                </a:solidFill>
-              </a14:hiddenFill>
-            </a:ext>
-          </a:extLst>
-        </p:spPr>
-        <p:txBody>
-          <a:bodyPr vert="horz" wrap="square" lIns="91440" tIns="45720" rIns="91440" bIns="45720" numCol="1" anchor="t" anchorCtr="0" compatLnSpc="1">
-            <a:prstTxWarp prst="textNoShape">
-              <a:avLst/>
-            </a:prstTxWarp>
-          </a:bodyPr>
-          <a:lstStyle/>
-          <a:p>
-            <a:endParaRPr lang="ru-RU"/>
-          </a:p>
-        </p:txBody>
-      </p:sp>
-    </p:spTree>
-    <p:extLst>
-      <p:ext uri="{BB962C8B-B14F-4D97-AF65-F5344CB8AC3E}">
-        <p14:creationId xmlns:p14="http://schemas.microsoft.com/office/powerpoint/2010/main" val="933119628"/>
-      </p:ext>
-    </p:extLst>
-  </p:cSld>
-  <p:clrMapOvr>
-    <a:masterClrMapping/>
-  </p:clrMapOvr>
-  <p:timing>
-    <p:tnLst>
-      <p:par>
-        <p:cTn id="1" dur="indefinite" restart="never" nodeType="tmRoot"/>
-      </p:par>
-    </p:tnLst>
-  </p:timing>
 </p:sld>
 </file>
 
@@ -14917,16 +14616,12 @@
                   <a:buNone/>
                 </a:pPr>
                 <a:r>
-                  <a:rPr lang="ru-RU" sz="2400" b="1" dirty="0" smtClean="0"/>
+                  <a:rPr lang="ru-RU" sz="2400" b="1" dirty="0"/>
                   <a:t>Надёжность предсказания временных рядов </a:t>
                 </a:r>
                 <a:r>
                   <a:rPr lang="ru-RU" sz="2400" dirty="0"/>
-                  <a:t>— это мера, характеризующая степень уверенности в том, что реальное будущее значение временного ряда окажется в </a:t>
-                </a:r>
-                <a:r>
-                  <a:rPr lang="ru-RU" sz="2400" dirty="0" smtClean="0"/>
-                  <a:t>достаточно близко к предсезонному значению.</a:t>
+                  <a:t>— это мера, характеризующая степень уверенности в том, что реальное будущее значение временного ряда окажется в достаточно близко к предсезонному значению.</a:t>
                 </a:r>
               </a:p>
               <a:p>
@@ -14935,18 +14630,14 @@
                 </a:pPr>
                 <a:r>
                   <a:rPr lang="ru-RU" sz="2400" dirty="0"/>
-                  <a:t>	</a:t>
+                  <a:t>	То есть в интервале </a:t>
                 </a:r>
                 <a:r>
-                  <a:rPr lang="ru-RU" sz="2400" dirty="0" smtClean="0"/>
-                  <a:t>То есть в интервале </a:t>
-                </a:r>
-                <a:r>
-                  <a:rPr lang="ru-RU" sz="2400" dirty="0" err="1" smtClean="0"/>
+                  <a:rPr lang="ru-RU" sz="2400" dirty="0" err="1"/>
                   <a:t>отн</a:t>
                 </a:r>
                 <a:r>
-                  <a:rPr lang="ru-RU" sz="2400" dirty="0" smtClean="0"/>
+                  <a:rPr lang="ru-RU" sz="2400" dirty="0"/>
                   <a:t>. Средней оценке </a:t>
                 </a:r>
                 <a14:m>
@@ -15108,7 +14799,7 @@
                     </m:r>
                   </m:oMath>
                 </a14:m>
-                <a:endParaRPr lang="ru-RU" sz="2400" dirty="0" smtClean="0"/>
+                <a:endParaRPr lang="ru-RU" sz="2400" dirty="0"/>
               </a:p>
               <a:p>
                 <a:pPr marL="0" indent="0">
@@ -15116,11 +14807,7 @@
                 </a:pPr>
                 <a:r>
                   <a:rPr lang="ru-RU" sz="2400" dirty="0"/>
-                  <a:t>	</a:t>
-                </a:r>
-                <a:r>
-                  <a:rPr lang="ru-RU" sz="2400" dirty="0" smtClean="0"/>
-                  <a:t>	где </a:t>
+                  <a:t>		где </a:t>
                 </a:r>
                 <a14:m>
                   <m:oMath xmlns:m="http://schemas.openxmlformats.org/officeDocument/2006/math">
@@ -15245,7 +14932,7 @@
                   </m:oMath>
                 </a14:m>
                 <a:r>
-                  <a:rPr lang="ru-RU" sz="2400" dirty="0" smtClean="0"/>
+                  <a:rPr lang="ru-RU" sz="2400" dirty="0"/>
                   <a:t> - оценки нижней и верхней границ интервала.</a:t>
                 </a:r>
               </a:p>
@@ -15254,35 +14941,19 @@
                   <a:buNone/>
                 </a:pPr>
                 <a:r>
-                  <a:rPr lang="ru-RU" sz="2400" b="1" dirty="0" smtClean="0"/>
-                  <a:t>Прогнозы </a:t>
-                </a:r>
-                <a:r>
                   <a:rPr lang="ru-RU" sz="2400" b="1" dirty="0"/>
-                  <a:t>всегда содержат </a:t>
-                </a:r>
-                <a:r>
-                  <a:rPr lang="ru-RU" sz="2400" b="1" dirty="0" smtClean="0"/>
-                  <a:t>неопределенность. </a:t>
-                </a:r>
-                <a:r>
-                  <a:rPr lang="ru-RU" sz="2400" dirty="0" smtClean="0"/>
-                  <a:t>Надежный </a:t>
+                  <a:t>Прогнозы всегда содержат неопределенность. </a:t>
                 </a:r>
                 <a:r>
                   <a:rPr lang="ru-RU" sz="2400" dirty="0"/>
-                  <a:t>прогноз позволяет:</a:t>
+                  <a:t>Надежный прогноз позволяет:</a:t>
                 </a:r>
               </a:p>
               <a:p>
                 <a:pPr lvl="1"/>
                 <a:r>
                   <a:rPr lang="ru-RU" dirty="0"/>
-                  <a:t>Управлять </a:t>
-                </a:r>
-                <a:r>
-                  <a:rPr lang="ru-RU" dirty="0" smtClean="0"/>
-                  <a:t>рисками</a:t>
+                  <a:t>Управлять рисками</a:t>
                 </a:r>
               </a:p>
               <a:p>
@@ -15295,16 +14966,8 @@
               <a:p>
                 <a:pPr lvl="1"/>
                 <a:r>
-                  <a:rPr lang="ru-RU" dirty="0" smtClean="0"/>
-                  <a:t>Планировать </a:t>
-                </a:r>
-                <a:r>
                   <a:rPr lang="ru-RU" dirty="0"/>
-                  <a:t>сценарии </a:t>
-                </a:r>
-                <a:r>
-                  <a:rPr lang="ru-RU" dirty="0" smtClean="0"/>
-                  <a:t>развития</a:t>
+                  <a:t>Планировать сценарии развития</a:t>
                 </a:r>
               </a:p>
               <a:p>
@@ -15317,39 +14980,23 @@
               <a:p>
                 <a:pPr lvl="1"/>
                 <a:r>
-                  <a:rPr lang="ru-RU" dirty="0" smtClean="0"/>
-                  <a:t>Повышать </a:t>
-                </a:r>
-                <a:r>
                   <a:rPr lang="ru-RU" dirty="0"/>
-                  <a:t>доверие к </a:t>
-                </a:r>
-                <a:r>
-                  <a:rPr lang="ru-RU" dirty="0" smtClean="0"/>
-                  <a:t>модели</a:t>
+                  <a:t>Повышать доверие к модели</a:t>
                 </a:r>
               </a:p>
               <a:p>
                 <a:pPr lvl="2"/>
                 <a:r>
                   <a:rPr lang="ru-RU" dirty="0"/>
-                  <a:t>Пример: выбор между моделью с высокой </a:t>
+                  <a:t>Пример: выбор между моделью с высокой точностью (низкое </a:t>
                 </a:r>
                 <a:r>
-                  <a:rPr lang="ru-RU" dirty="0" smtClean="0"/>
-                  <a:t>точностью (низкое </a:t>
-                </a:r>
-                <a:r>
-                  <a:rPr lang="ru-RU" dirty="0" err="1" smtClean="0"/>
+                  <a:rPr lang="ru-RU" dirty="0" err="1"/>
                   <a:t>смещние</a:t>
                 </a:r>
                 <a:r>
-                  <a:rPr lang="ru-RU" dirty="0" smtClean="0"/>
-                  <a:t>) и высоким разбросом </a:t>
-                </a:r>
-                <a:r>
                   <a:rPr lang="ru-RU" dirty="0"/>
-                  <a:t>и наоборот</a:t>
+                  <a:t>) и высоким разбросом и наоборот</a:t>
                 </a:r>
               </a:p>
               <a:p>
@@ -15410,17 +15057,428 @@
   <p:clrMapOvr>
     <a:masterClrMapping/>
   </p:clrMapOvr>
-  <p:timing>
-    <p:tnLst>
-      <p:par>
-        <p:cTn id="1" dur="indefinite" restart="never" nodeType="tmRoot"/>
-      </p:par>
-    </p:tnLst>
-  </p:timing>
 </p:sld>
 </file>
 
 <file path=ppt/slides/slide20.xml><?xml version="1.0" encoding="utf-8"?>
+<p:sld xmlns:a="http://schemas.openxmlformats.org/drawingml/2006/main" xmlns:r="http://schemas.openxmlformats.org/officeDocument/2006/relationships" xmlns:p="http://schemas.openxmlformats.org/presentationml/2006/main">
+  <p:cSld>
+    <p:spTree>
+      <p:nvGrpSpPr>
+        <p:cNvPr id="1" name=""/>
+        <p:cNvGrpSpPr/>
+        <p:nvPr/>
+      </p:nvGrpSpPr>
+      <p:grpSpPr>
+        <a:xfrm>
+          <a:off x="0" y="0"/>
+          <a:ext cx="0" cy="0"/>
+          <a:chOff x="0" y="0"/>
+          <a:chExt cx="0" cy="0"/>
+        </a:xfrm>
+      </p:grpSpPr>
+      <p:sp>
+        <p:nvSpPr>
+          <p:cNvPr id="2" name="Заголовок 1"/>
+          <p:cNvSpPr>
+            <a:spLocks noGrp="1"/>
+          </p:cNvSpPr>
+          <p:nvPr>
+            <p:ph type="title"/>
+          </p:nvPr>
+        </p:nvSpPr>
+        <p:spPr>
+          <a:xfrm>
+            <a:off x="290557" y="137488"/>
+            <a:ext cx="10991850" cy="635000"/>
+          </a:xfrm>
+        </p:spPr>
+        <p:txBody>
+          <a:bodyPr>
+            <a:normAutofit fontScale="90000"/>
+          </a:bodyPr>
+          <a:lstStyle/>
+          <a:p>
+            <a:pPr algn="ctr"/>
+            <a:r>
+              <a:rPr lang="ru-RU" b="1" dirty="0"/>
+              <a:t>Мониторинг </a:t>
+            </a:r>
+          </a:p>
+        </p:txBody>
+      </p:sp>
+      <p:sp>
+        <p:nvSpPr>
+          <p:cNvPr id="3" name="Объект 2"/>
+          <p:cNvSpPr>
+            <a:spLocks noGrp="1"/>
+          </p:cNvSpPr>
+          <p:nvPr>
+            <p:ph idx="1"/>
+          </p:nvPr>
+        </p:nvSpPr>
+        <p:spPr>
+          <a:xfrm>
+            <a:off x="155576" y="704851"/>
+            <a:ext cx="11920582" cy="5972174"/>
+          </a:xfrm>
+        </p:spPr>
+        <p:txBody>
+          <a:bodyPr>
+            <a:normAutofit fontScale="92500" lnSpcReduction="20000"/>
+          </a:bodyPr>
+          <a:lstStyle/>
+          <a:p>
+            <a:pPr marL="447675" lvl="1" indent="-352425">
+              <a:lnSpc>
+                <a:spcPct val="110000"/>
+              </a:lnSpc>
+              <a:spcBef>
+                <a:spcPts val="600"/>
+              </a:spcBef>
+            </a:pPr>
+            <a:r>
+              <a:rPr lang="ru-RU" b="1" dirty="0"/>
+              <a:t>Дрейф данных </a:t>
+            </a:r>
+            <a:r>
+              <a:rPr lang="en-US" b="1" dirty="0"/>
+              <a:t>(P(x))</a:t>
+            </a:r>
+            <a:r>
+              <a:rPr lang="ru-RU" dirty="0"/>
+              <a:t>– изменение в распределение значений ВР на тесте</a:t>
+            </a:r>
+          </a:p>
+          <a:p>
+            <a:pPr lvl="2">
+              <a:lnSpc>
+                <a:spcPct val="110000"/>
+              </a:lnSpc>
+              <a:spcBef>
+                <a:spcPts val="600"/>
+              </a:spcBef>
+            </a:pPr>
+            <a:r>
+              <a:rPr lang="ru-RU" sz="2400" dirty="0"/>
+              <a:t>из за ограниченности выборки не все паттерны учтены в </a:t>
+            </a:r>
+            <a:r>
+              <a:rPr lang="ru-RU" sz="2400" dirty="0" err="1"/>
+              <a:t>трейне</a:t>
+            </a:r>
+            <a:endParaRPr lang="ru-RU" sz="2400" dirty="0"/>
+          </a:p>
+          <a:p>
+            <a:pPr lvl="3">
+              <a:lnSpc>
+                <a:spcPct val="110000"/>
+              </a:lnSpc>
+              <a:spcBef>
+                <a:spcPts val="600"/>
+              </a:spcBef>
+            </a:pPr>
+            <a:r>
+              <a:rPr lang="ru-RU" sz="2400" dirty="0"/>
+              <a:t>Напр., на выборке в 3 года не учтены факторы високосного года.</a:t>
+            </a:r>
+          </a:p>
+          <a:p>
+            <a:pPr lvl="4">
+              <a:lnSpc>
+                <a:spcPct val="110000"/>
+              </a:lnSpc>
+              <a:spcBef>
+                <a:spcPts val="600"/>
+              </a:spcBef>
+            </a:pPr>
+            <a:r>
+              <a:rPr lang="ru-RU" sz="2400" dirty="0"/>
+              <a:t> Нужно учесть в </a:t>
+            </a:r>
+            <a:r>
+              <a:rPr lang="ru-RU" sz="2400" dirty="0" err="1"/>
+              <a:t>трейне</a:t>
+            </a:r>
+            <a:r>
+              <a:rPr lang="ru-RU" sz="2400" dirty="0"/>
+              <a:t> и </a:t>
+            </a:r>
+            <a:r>
+              <a:rPr lang="ru-RU" sz="2400" dirty="0" err="1"/>
+              <a:t>дообуёчить</a:t>
+            </a:r>
+            <a:r>
+              <a:rPr lang="ru-RU" sz="2400" dirty="0"/>
+              <a:t> модель</a:t>
+            </a:r>
+            <a:endParaRPr lang="en-US" sz="2400" dirty="0"/>
+          </a:p>
+          <a:p>
+            <a:pPr marL="447675" lvl="1" indent="-361950">
+              <a:lnSpc>
+                <a:spcPct val="110000"/>
+              </a:lnSpc>
+              <a:spcBef>
+                <a:spcPts val="600"/>
+              </a:spcBef>
+            </a:pPr>
+            <a:r>
+              <a:rPr lang="ru-RU" b="1" dirty="0"/>
+              <a:t>Дрейф концепции</a:t>
+            </a:r>
+            <a:r>
+              <a:rPr lang="en-US" b="1" dirty="0"/>
+              <a:t> (P(y))</a:t>
+            </a:r>
+            <a:r>
+              <a:rPr lang="ru-RU" b="1" dirty="0"/>
+              <a:t> </a:t>
+            </a:r>
+            <a:r>
+              <a:rPr lang="ru-RU" dirty="0"/>
+              <a:t>– Появление истинно новых паттернов в тесте</a:t>
+            </a:r>
+          </a:p>
+          <a:p>
+            <a:pPr lvl="3">
+              <a:lnSpc>
+                <a:spcPct val="110000"/>
+              </a:lnSpc>
+              <a:spcBef>
+                <a:spcPts val="600"/>
+              </a:spcBef>
+            </a:pPr>
+            <a:r>
+              <a:rPr lang="ru-RU" sz="2400" dirty="0"/>
+              <a:t>Напр., объявлена 4 дневная рабочая неделя. – Нужно учесть пересмотреть модель</a:t>
+            </a:r>
+          </a:p>
+          <a:p>
+            <a:pPr marL="0" indent="0">
+              <a:lnSpc>
+                <a:spcPct val="110000"/>
+              </a:lnSpc>
+              <a:spcBef>
+                <a:spcPts val="600"/>
+              </a:spcBef>
+              <a:buNone/>
+            </a:pPr>
+            <a:r>
+              <a:rPr lang="ru-RU" sz="2400" b="1" dirty="0"/>
+              <a:t>Ковариационный дрейф</a:t>
+            </a:r>
+            <a:r>
+              <a:rPr lang="en-US" sz="2400" b="1" dirty="0"/>
+              <a:t> (P(</a:t>
+            </a:r>
+            <a:r>
+              <a:rPr lang="en-US" sz="2400" b="1" dirty="0" err="1"/>
+              <a:t>y|x</a:t>
+            </a:r>
+            <a:r>
+              <a:rPr lang="en-US" sz="2400" b="1" dirty="0"/>
+              <a:t>))</a:t>
+            </a:r>
+            <a:r>
+              <a:rPr lang="ru-RU" sz="2400" b="1" dirty="0"/>
+              <a:t> </a:t>
+            </a:r>
+            <a:r>
+              <a:rPr lang="ru-RU" sz="2400" dirty="0"/>
+              <a:t>– поведение объясняющих переменных поменялось.</a:t>
+            </a:r>
+          </a:p>
+          <a:p>
+            <a:pPr marL="0" indent="0">
+              <a:lnSpc>
+                <a:spcPct val="110000"/>
+              </a:lnSpc>
+              <a:spcBef>
+                <a:spcPts val="600"/>
+              </a:spcBef>
+              <a:buNone/>
+            </a:pPr>
+            <a:r>
+              <a:rPr lang="ru-RU" sz="2400" dirty="0"/>
+              <a:t>	напр. продажи мороженного основывались на том, что в </a:t>
+            </a:r>
+            <a:r>
+              <a:rPr lang="ru-RU" sz="2400" dirty="0" err="1"/>
+              <a:t>трейне</a:t>
+            </a:r>
+            <a:r>
+              <a:rPr lang="ru-RU" sz="2400" dirty="0"/>
+              <a:t> были солнечные дни.</a:t>
+            </a:r>
+          </a:p>
+          <a:p>
+            <a:pPr marL="0" indent="0">
+              <a:lnSpc>
+                <a:spcPct val="110000"/>
+              </a:lnSpc>
+              <a:spcBef>
+                <a:spcPts val="600"/>
+              </a:spcBef>
+              <a:buNone/>
+            </a:pPr>
+            <a:r>
+              <a:rPr lang="ru-RU" sz="2400" dirty="0"/>
+              <a:t>		погода стала чаще пасмурной –продаже падают.</a:t>
+            </a:r>
+            <a:endParaRPr lang="en-US" sz="2400" dirty="0"/>
+          </a:p>
+          <a:p>
+            <a:pPr marL="0" indent="0">
+              <a:buNone/>
+            </a:pPr>
+            <a:endParaRPr lang="en-US" sz="2100" dirty="0"/>
+          </a:p>
+          <a:p>
+            <a:pPr marL="0" indent="0">
+              <a:buNone/>
+            </a:pPr>
+            <a:r>
+              <a:rPr lang="ru-RU" sz="2100" dirty="0"/>
+              <a:t>Дрейф можно охарактеризовать как </a:t>
+            </a:r>
+            <a:r>
+              <a:rPr lang="en-US" sz="2100" dirty="0"/>
+              <a:t>out-of-distribution</a:t>
+            </a:r>
+            <a:r>
+              <a:rPr lang="ru-RU" sz="2100" dirty="0"/>
+              <a:t> </a:t>
+            </a:r>
+            <a:r>
+              <a:rPr lang="en-US" sz="2100" dirty="0"/>
+              <a:t>forecasting</a:t>
+            </a:r>
+            <a:r>
+              <a:rPr lang="ru-RU" sz="2100" dirty="0"/>
+              <a:t> </a:t>
+            </a:r>
+            <a:r>
+              <a:rPr lang="en-US" sz="2100" dirty="0"/>
+              <a:t>(OOD).</a:t>
+            </a:r>
+          </a:p>
+          <a:p>
+            <a:pPr marL="0" indent="0">
+              <a:buNone/>
+            </a:pPr>
+            <a:r>
+              <a:rPr lang="ru-RU" sz="2100" dirty="0"/>
+              <a:t>Часто </a:t>
+            </a:r>
+            <a:r>
+              <a:rPr lang="en-US" sz="2100" dirty="0"/>
+              <a:t>OOD – </a:t>
+            </a:r>
+            <a:r>
+              <a:rPr lang="ru-RU" sz="2100" dirty="0"/>
+              <a:t>новизна в данных.</a:t>
+            </a:r>
+            <a:endParaRPr lang="en-US" sz="2100" dirty="0"/>
+          </a:p>
+          <a:p>
+            <a:r>
+              <a:rPr lang="ru-RU" sz="2300" dirty="0"/>
+              <a:t>Стресс-тесты моделей (искусственные испытания моделей)</a:t>
+            </a:r>
+          </a:p>
+          <a:p>
+            <a:r>
+              <a:rPr lang="ru-RU" sz="2300" dirty="0"/>
+              <a:t>Использование более устойчивых моделей (ансамбли, </a:t>
+            </a:r>
+            <a:r>
+              <a:rPr lang="ru-RU" sz="2300" dirty="0" err="1"/>
+              <a:t>бустинг</a:t>
+            </a:r>
+            <a:r>
+              <a:rPr lang="ru-RU" sz="2300" dirty="0"/>
+              <a:t> моделей)</a:t>
+            </a:r>
+          </a:p>
+          <a:p>
+            <a:r>
+              <a:rPr lang="ru-RU" sz="2300" dirty="0"/>
+              <a:t>Мониторинг входных  данных и результатов </a:t>
+            </a:r>
+            <a:r>
+              <a:rPr lang="ru-RU" sz="2300" dirty="0" err="1"/>
+              <a:t>предсаказания</a:t>
+            </a:r>
+            <a:endParaRPr lang="ru-RU" sz="2300" dirty="0"/>
+          </a:p>
+          <a:p>
+            <a:r>
+              <a:rPr lang="ru-RU" sz="2300" dirty="0"/>
+              <a:t>Обучение новых моделей по расписанию</a:t>
+            </a:r>
+          </a:p>
+          <a:p>
+            <a:pPr marL="0" indent="0">
+              <a:buNone/>
+            </a:pPr>
+            <a:endParaRPr lang="ru-RU" sz="2100" dirty="0"/>
+          </a:p>
+        </p:txBody>
+      </p:sp>
+      <p:sp>
+        <p:nvSpPr>
+          <p:cNvPr id="4" name="AutoShape 2" descr="Demonstration of iterative, autoregressive forecasting | Download  Scientific Diagram"/>
+          <p:cNvSpPr>
+            <a:spLocks noChangeAspect="1" noChangeArrowheads="1"/>
+          </p:cNvSpPr>
+          <p:nvPr/>
+        </p:nvSpPr>
+        <p:spPr bwMode="auto">
+          <a:xfrm>
+            <a:off x="155575" y="-144463"/>
+            <a:ext cx="304800" cy="304801"/>
+          </a:xfrm>
+          <a:prstGeom prst="rect">
+            <a:avLst/>
+          </a:prstGeom>
+          <a:noFill/>
+          <a:extLst>
+            <a:ext uri="{909E8E84-426E-40DD-AFC4-6F175D3DCCD1}">
+              <a14:hiddenFill xmlns:a14="http://schemas.microsoft.com/office/drawing/2010/main">
+                <a:solidFill>
+                  <a:srgbClr val="FFFFFF"/>
+                </a:solidFill>
+              </a14:hiddenFill>
+            </a:ext>
+          </a:extLst>
+        </p:spPr>
+        <p:txBody>
+          <a:bodyPr vert="horz" wrap="square" lIns="91440" tIns="45720" rIns="91440" bIns="45720" numCol="1" anchor="t" anchorCtr="0" compatLnSpc="1">
+            <a:prstTxWarp prst="textNoShape">
+              <a:avLst/>
+            </a:prstTxWarp>
+          </a:bodyPr>
+          <a:lstStyle/>
+          <a:p>
+            <a:endParaRPr lang="ru-RU"/>
+          </a:p>
+        </p:txBody>
+      </p:sp>
+    </p:spTree>
+    <p:extLst>
+      <p:ext uri="{BB962C8B-B14F-4D97-AF65-F5344CB8AC3E}">
+        <p14:creationId xmlns:p14="http://schemas.microsoft.com/office/powerpoint/2010/main" val="933119628"/>
+      </p:ext>
+    </p:extLst>
+  </p:cSld>
+  <p:clrMapOvr>
+    <a:masterClrMapping/>
+  </p:clrMapOvr>
+</p:sld>
+</file>
+
+<file path=ppt/slides/slide21.xml><?xml version="1.0" encoding="utf-8"?>
 <p:sld xmlns:a="http://schemas.openxmlformats.org/drawingml/2006/main" xmlns:r="http://schemas.openxmlformats.org/officeDocument/2006/relationships" xmlns:p="http://schemas.openxmlformats.org/presentationml/2006/main">
   <p:cSld>
     <p:spTree>
@@ -15458,11 +15516,11 @@
           <a:lstStyle/>
           <a:p>
             <a:r>
-              <a:rPr lang="ru-RU" dirty="0" smtClean="0"/>
+              <a:rPr lang="ru-RU" dirty="0"/>
               <a:t>Мониторинг </a:t>
             </a:r>
             <a:r>
-              <a:rPr lang="en-US" dirty="0" smtClean="0"/>
+              <a:rPr lang="en-US" dirty="0"/>
               <a:t>OOD</a:t>
             </a:r>
             <a:endParaRPr lang="ru-RU" dirty="0"/>
@@ -15490,22 +15548,22 @@
           <a:lstStyle/>
           <a:p>
             <a:r>
-              <a:rPr lang="ru-RU" dirty="0" smtClean="0"/>
+              <a:rPr lang="ru-RU" dirty="0"/>
               <a:t>Мониторинг основывается на сравнении распределений и отдельных характеристик обучающей и рабочей выборок.</a:t>
             </a:r>
           </a:p>
           <a:p>
             <a:pPr lvl="1"/>
             <a:r>
-              <a:rPr lang="ru-RU" dirty="0" smtClean="0"/>
+              <a:rPr lang="ru-RU" dirty="0"/>
               <a:t>Напр. тест </a:t>
             </a:r>
             <a:r>
-              <a:rPr lang="ru-RU" dirty="0" err="1" smtClean="0"/>
+              <a:rPr lang="ru-RU" dirty="0" err="1"/>
               <a:t>Калмогорова</a:t>
             </a:r>
             <a:r>
-              <a:rPr lang="ru-RU" dirty="0" smtClean="0"/>
+              <a:rPr lang="ru-RU" dirty="0"/>
               <a:t>-Смирнова или </a:t>
             </a:r>
             <a:r>
@@ -15522,28 +15580,23 @@
             </a:r>
             <a:r>
               <a:rPr lang="en-US" dirty="0"/>
-              <a:t> </a:t>
-            </a:r>
-            <a:r>
-              <a:rPr lang="en-US" dirty="0" smtClean="0"/>
-              <a:t>divergence</a:t>
-            </a:r>
-            <a:endParaRPr lang="ru-RU" dirty="0" smtClean="0"/>
+              <a:t> divergence</a:t>
+            </a:r>
+            <a:endParaRPr lang="ru-RU" dirty="0"/>
           </a:p>
           <a:p>
             <a:pPr lvl="1"/>
             <a:r>
-              <a:rPr lang="ru-RU" dirty="0" smtClean="0"/>
+              <a:rPr lang="ru-RU" dirty="0"/>
               <a:t>Мониторинг средних значений остатков предсказаний</a:t>
             </a:r>
           </a:p>
           <a:p>
             <a:pPr lvl="1"/>
             <a:r>
-              <a:rPr lang="ru-RU" dirty="0" smtClean="0"/>
+              <a:rPr lang="ru-RU" dirty="0"/>
               <a:t>Мониторинг суммарной накопленной ошибки предсказаний</a:t>
             </a:r>
-            <a:endParaRPr lang="ru-RU" dirty="0"/>
           </a:p>
         </p:txBody>
       </p:sp>
@@ -15557,17 +15610,10 @@
   <p:clrMapOvr>
     <a:masterClrMapping/>
   </p:clrMapOvr>
-  <p:timing>
-    <p:tnLst>
-      <p:par>
-        <p:cTn id="1" dur="indefinite" restart="never" nodeType="tmRoot"/>
-      </p:par>
-    </p:tnLst>
-  </p:timing>
 </p:sld>
 </file>
 
-<file path=ppt/slides/slide21.xml><?xml version="1.0" encoding="utf-8"?>
+<file path=ppt/slides/slide22.xml><?xml version="1.0" encoding="utf-8"?>
 <p:sld xmlns:a="http://schemas.openxmlformats.org/drawingml/2006/main" xmlns:r="http://schemas.openxmlformats.org/officeDocument/2006/relationships" xmlns:p="http://schemas.openxmlformats.org/presentationml/2006/main" show="0">
   <p:cSld>
     <p:spTree>
@@ -15608,10 +15654,9 @@
           <a:p>
             <a:pPr algn="ctr"/>
             <a:r>
-              <a:rPr lang="ru-RU" dirty="0" smtClean="0"/>
+              <a:rPr lang="ru-RU" dirty="0"/>
               <a:t>Особенности оценки неопределенности </a:t>
             </a:r>
-            <a:endParaRPr lang="ru-RU" dirty="0"/>
           </a:p>
         </p:txBody>
       </p:sp>
@@ -15648,12 +15693,8 @@
           </a:p>
           <a:p>
             <a:r>
-              <a:rPr lang="ru-RU" dirty="0" smtClean="0"/>
-              <a:t>Преимущества</a:t>
-            </a:r>
-            <a:r>
               <a:rPr lang="ru-RU" dirty="0"/>
-              <a:t>:</a:t>
+              <a:t>Преимущества:</a:t>
             </a:r>
             <a:endParaRPr lang="ru-RU" b="1" dirty="0"/>
           </a:p>
@@ -15675,24 +15716,19 @@
             <a:pPr lvl="1"/>
             <a:r>
               <a:rPr lang="ru-RU" dirty="0"/>
-              <a:t>Хорошо работает с нестационарными и шумными </a:t>
-            </a:r>
-            <a:r>
-              <a:rPr lang="ru-RU" dirty="0" smtClean="0"/>
-              <a:t>данными</a:t>
+              <a:t>Хорошо работает с нестационарными и шумными данными</a:t>
             </a:r>
           </a:p>
           <a:p>
             <a:pPr lvl="1"/>
             <a:r>
-              <a:rPr lang="ru-RU" dirty="0" err="1" smtClean="0"/>
+              <a:rPr lang="ru-RU" dirty="0" err="1"/>
               <a:t>Хоршо</a:t>
             </a:r>
             <a:r>
-              <a:rPr lang="ru-RU" dirty="0" smtClean="0"/>
+              <a:rPr lang="ru-RU" dirty="0"/>
               <a:t> работает на коротких ВР</a:t>
             </a:r>
-            <a:endParaRPr lang="ru-RU" dirty="0"/>
           </a:p>
           <a:p>
             <a:r>
@@ -15719,7 +15755,7 @@
             <a:pPr marL="0" indent="0">
               <a:buNone/>
             </a:pPr>
-            <a:endParaRPr lang="ru-RU" sz="2100" b="1" dirty="0" smtClean="0"/>
+            <a:endParaRPr lang="ru-RU" sz="2100" b="1" dirty="0"/>
           </a:p>
         </p:txBody>
       </p:sp>
@@ -16006,12 +16042,8 @@
           </a:lstStyle>
           <a:p>
             <a:r>
-              <a:rPr lang="ru-RU" dirty="0" smtClean="0"/>
-              <a:t>Конформное </a:t>
-            </a:r>
-            <a:r>
               <a:rPr lang="ru-RU" dirty="0"/>
-              <a:t>предсказание (</a:t>
+              <a:t>Конформное предсказание (</a:t>
             </a:r>
             <a:r>
               <a:rPr lang="ru-RU" dirty="0" err="1"/>
@@ -16033,12 +16065,8 @@
           </a:p>
           <a:p>
             <a:r>
-              <a:rPr lang="ru-RU" dirty="0" smtClean="0"/>
-              <a:t>Преимущества</a:t>
-            </a:r>
-            <a:r>
               <a:rPr lang="ru-RU" dirty="0"/>
-              <a:t>:</a:t>
+              <a:t>Преимущества:</a:t>
             </a:r>
             <a:endParaRPr lang="ru-RU" b="1" dirty="0"/>
           </a:p>
@@ -16053,40 +16081,27 @@
             <a:pPr lvl="1"/>
             <a:r>
               <a:rPr lang="ru-RU" dirty="0"/>
-              <a:t>Не требует предположений о </a:t>
-            </a:r>
-            <a:r>
-              <a:rPr lang="ru-RU" dirty="0" smtClean="0"/>
-              <a:t>распределении</a:t>
+              <a:t>Не требует предположений о распределении</a:t>
             </a:r>
           </a:p>
           <a:p>
             <a:pPr lvl="1"/>
             <a:r>
-              <a:rPr lang="ru-RU" dirty="0" smtClean="0"/>
+              <a:rPr lang="ru-RU" dirty="0"/>
               <a:t>Одноразовое оценивание</a:t>
             </a:r>
           </a:p>
           <a:p>
             <a:pPr lvl="1"/>
             <a:r>
-              <a:rPr lang="ru-RU" dirty="0" smtClean="0"/>
-              <a:t>могут </a:t>
-            </a:r>
-            <a:r>
               <a:rPr lang="ru-RU" dirty="0"/>
-              <a:t>калибровать интервалы прогнозирования, сгенерированные с помощью других методов, </a:t>
-            </a:r>
-            <a:endParaRPr lang="ru-RU" dirty="0" smtClean="0"/>
-          </a:p>
-          <a:p>
-            <a:r>
-              <a:rPr lang="ru-RU" dirty="0" smtClean="0"/>
-              <a:t>Недостатки</a:t>
-            </a:r>
+              <a:t>могут калибровать интервалы прогнозирования, сгенерированные с помощью других методов, </a:t>
+            </a:r>
+          </a:p>
+          <a:p>
             <a:r>
               <a:rPr lang="ru-RU" dirty="0"/>
-              <a:t>:</a:t>
+              <a:t>Недостатки:</a:t>
             </a:r>
             <a:endParaRPr lang="ru-RU" b="1" dirty="0"/>
           </a:p>
@@ -16101,13 +16116,8 @@
             <a:pPr lvl="1"/>
             <a:r>
               <a:rPr lang="ru-RU" dirty="0"/>
-              <a:t>Интервалы могут быть слишком широкими , если ошибка модели </a:t>
-            </a:r>
-            <a:r>
-              <a:rPr lang="ru-RU" dirty="0" smtClean="0"/>
-              <a:t>высока</a:t>
-            </a:r>
-            <a:endParaRPr lang="ru-RU" dirty="0"/>
+              <a:t>Интервалы могут быть слишком широкими , если ошибка модели высока</a:t>
+            </a:r>
           </a:p>
         </p:txBody>
       </p:sp>
@@ -16121,25 +16131,10 @@
   <p:clrMapOvr>
     <a:masterClrMapping/>
   </p:clrMapOvr>
-  <mc:AlternateContent xmlns:mc="http://schemas.openxmlformats.org/markup-compatibility/2006" xmlns:p14="http://schemas.microsoft.com/office/powerpoint/2010/main">
-    <mc:Choice Requires="p14">
-      <p:transition spd="slow" p14:dur="2000"/>
-    </mc:Choice>
-    <mc:Fallback xmlns="">
-      <p:transition spd="slow"/>
-    </mc:Fallback>
-  </mc:AlternateContent>
-  <p:timing>
-    <p:tnLst>
-      <p:par>
-        <p:cTn id="1" dur="indefinite" restart="never" nodeType="tmRoot"/>
-      </p:par>
-    </p:tnLst>
-  </p:timing>
 </p:sld>
 </file>
 
-<file path=ppt/slides/slide22.xml><?xml version="1.0" encoding="utf-8"?>
+<file path=ppt/slides/slide23.xml><?xml version="1.0" encoding="utf-8"?>
 <p:sld xmlns:a="http://schemas.openxmlformats.org/drawingml/2006/main" xmlns:r="http://schemas.openxmlformats.org/officeDocument/2006/relationships" xmlns:p="http://schemas.openxmlformats.org/presentationml/2006/main" show="0">
   <p:cSld>
     <p:spTree>
@@ -16327,25 +16322,10 @@
   <p:clrMapOvr>
     <a:masterClrMapping/>
   </p:clrMapOvr>
-  <mc:AlternateContent xmlns:mc="http://schemas.openxmlformats.org/markup-compatibility/2006" xmlns:p14="http://schemas.microsoft.com/office/powerpoint/2010/main">
-    <mc:Choice Requires="p14">
-      <p:transition spd="slow" p14:dur="2000"/>
-    </mc:Choice>
-    <mc:Fallback xmlns="">
-      <p:transition spd="slow"/>
-    </mc:Fallback>
-  </mc:AlternateContent>
-  <p:timing>
-    <p:tnLst>
-      <p:par>
-        <p:cTn id="1" dur="indefinite" restart="never" nodeType="tmRoot"/>
-      </p:par>
-    </p:tnLst>
-  </p:timing>
 </p:sld>
 </file>
 
-<file path=ppt/slides/slide23.xml><?xml version="1.0" encoding="utf-8"?>
+<file path=ppt/slides/slide24.xml><?xml version="1.0" encoding="utf-8"?>
 <p:sld xmlns:a="http://schemas.openxmlformats.org/drawingml/2006/main" xmlns:r="http://schemas.openxmlformats.org/officeDocument/2006/relationships" xmlns:p="http://schemas.openxmlformats.org/presentationml/2006/main" show="0">
   <p:cSld>
     <p:spTree>
@@ -16421,19 +16401,13 @@
           </a:bodyPr>
           <a:lstStyle/>
           <a:p>
-            <a:r>
-              <a:rPr lang="en-US" b="1" dirty="0" smtClean="0">
-                <a:latin typeface="Inter"/>
-              </a:rPr>
-              <a:t/>
-            </a:r>
             <a:br>
-              <a:rPr lang="en-US" b="1" dirty="0" smtClean="0">
+              <a:rPr lang="en-US" b="1" dirty="0">
                 <a:latin typeface="Inter"/>
               </a:rPr>
             </a:br>
             <a:r>
-              <a:rPr lang="en-US" b="1" dirty="0" smtClean="0">
+              <a:rPr lang="en-US" b="1" dirty="0">
                 <a:latin typeface="Inter"/>
               </a:rPr>
               <a:t>Importance of Confidence Interval Prediction in Time Series:</a:t>
@@ -16445,7 +16419,7 @@
               <a:buAutoNum type="arabicPeriod"/>
             </a:pPr>
             <a:r>
-              <a:rPr lang="en-US" dirty="0" smtClean="0">
+              <a:rPr lang="en-US" dirty="0">
                 <a:latin typeface="Inter"/>
               </a:rPr>
               <a:t>Uncertainty Estimation: The confidence interval provides a measure of the uncertainty associated with time series predictions. It enables variability and the range of possible future values to be quantified, which is essential for making informed decisions.</a:t>
@@ -16457,7 +16431,7 @@
               <a:buAutoNum type="arabicPeriod"/>
             </a:pPr>
             <a:r>
-              <a:rPr lang="en-US" dirty="0" smtClean="0">
+              <a:rPr lang="en-US" dirty="0">
                 <a:latin typeface="Inter"/>
               </a:rPr>
               <a:t>Precision evaluation: By having a confidence interval, the precision of the predictions can be evaluated. If the interval is narrow, it indicates that the forecast is more accurate and reliable. On the other hand, if the interval is wide, it indicates greater uncertainty and less precision in the predictions.</a:t>
@@ -16469,7 +16443,7 @@
               <a:buAutoNum type="arabicPeriod"/>
             </a:pPr>
             <a:r>
-              <a:rPr lang="en-US" dirty="0" smtClean="0">
+              <a:rPr lang="en-US" dirty="0">
                 <a:latin typeface="Inter"/>
               </a:rPr>
               <a:t>Risk management: The confidence interval helps in risk management by providing information about possible future scenarios. It allows identifying the ranges in which the real values could be located and making decisions based on those possible scenarios.</a:t>
@@ -16481,7 +16455,7 @@
               <a:buAutoNum type="arabicPeriod"/>
             </a:pPr>
             <a:r>
-              <a:rPr lang="en-US" dirty="0" smtClean="0">
+              <a:rPr lang="en-US" dirty="0">
                 <a:latin typeface="Inter"/>
               </a:rPr>
               <a:t>Effective communication: The confidence interval is a useful tool for communicating predictions clearly and accurately. It allows the variability and uncertainty associated with the predictions to be conveyed to the stakeholders, avoiding a wrong or overly optimistic interpretation of the results.</a:t>
@@ -16489,7 +16463,7 @@
           </a:p>
           <a:p>
             <a:r>
-              <a:rPr lang="en-US" dirty="0" smtClean="0">
+              <a:rPr lang="en-US" dirty="0">
                 <a:latin typeface="Inter"/>
               </a:rPr>
               <a:t>Therefore, confidence interval prediction in time series is essential to understand and manage uncertainty, assess the accuracy of predictions, and make informed decisions based on possible future scenarios.</a:t>
@@ -16539,25 +16513,10 @@
   <p:clrMapOvr>
     <a:masterClrMapping/>
   </p:clrMapOvr>
-  <mc:AlternateContent xmlns:mc="http://schemas.openxmlformats.org/markup-compatibility/2006" xmlns:p14="http://schemas.microsoft.com/office/powerpoint/2010/main">
-    <mc:Choice Requires="p14">
-      <p:transition spd="slow" p14:dur="2000"/>
-    </mc:Choice>
-    <mc:Fallback xmlns="">
-      <p:transition spd="slow"/>
-    </mc:Fallback>
-  </mc:AlternateContent>
-  <p:timing>
-    <p:tnLst>
-      <p:par>
-        <p:cTn id="1" dur="indefinite" restart="never" nodeType="tmRoot"/>
-      </p:par>
-    </p:tnLst>
-  </p:timing>
 </p:sld>
 </file>
 
-<file path=ppt/slides/slide24.xml><?xml version="1.0" encoding="utf-8"?>
+<file path=ppt/slides/slide25.xml><?xml version="1.0" encoding="utf-8"?>
 <p:sld xmlns:a="http://schemas.openxmlformats.org/drawingml/2006/main" xmlns:r="http://schemas.openxmlformats.org/officeDocument/2006/relationships" xmlns:p="http://schemas.openxmlformats.org/presentationml/2006/main" show="0">
   <p:cSld>
     <p:spTree>
@@ -16834,21 +16793,6 @@
   <p:clrMapOvr>
     <a:masterClrMapping/>
   </p:clrMapOvr>
-  <mc:AlternateContent xmlns:mc="http://schemas.openxmlformats.org/markup-compatibility/2006" xmlns:p14="http://schemas.microsoft.com/office/powerpoint/2010/main">
-    <mc:Choice Requires="p14">
-      <p:transition spd="slow" p14:dur="2000"/>
-    </mc:Choice>
-    <mc:Fallback xmlns="">
-      <p:transition spd="slow"/>
-    </mc:Fallback>
-  </mc:AlternateContent>
-  <p:timing>
-    <p:tnLst>
-      <p:par>
-        <p:cTn id="1" dur="indefinite" restart="never" nodeType="tmRoot"/>
-      </p:par>
-    </p:tnLst>
-  </p:timing>
 </p:sld>
 </file>
 
@@ -16894,13 +16838,8 @@
             <a:pPr algn="ctr"/>
             <a:r>
               <a:rPr lang="ru-RU" b="1" dirty="0"/>
-              <a:t>Источники ошибки </a:t>
-            </a:r>
-            <a:r>
-              <a:rPr lang="ru-RU" b="1" dirty="0" smtClean="0"/>
-              <a:t>предсказаний во ВР</a:t>
-            </a:r>
-            <a:endParaRPr lang="ru-RU" b="1" dirty="0"/>
+              <a:t>Источники ошибки предсказаний во ВР</a:t>
+            </a:r>
           </a:p>
         </p:txBody>
       </p:sp>
@@ -16935,15 +16874,11 @@
               </a:spcBef>
             </a:pPr>
             <a:r>
-              <a:rPr lang="ru-RU" sz="2000" b="1" dirty="0" smtClean="0"/>
-              <a:t>Случайная </a:t>
-            </a:r>
-            <a:r>
               <a:rPr lang="ru-RU" sz="2000" b="1" dirty="0"/>
-              <a:t>ошибка </a:t>
-            </a:r>
-            <a:r>
-              <a:rPr lang="ru-RU" sz="2000" dirty="0" smtClean="0"/>
+              <a:t>Случайная ошибка </a:t>
+            </a:r>
+            <a:r>
+              <a:rPr lang="ru-RU" sz="2000" dirty="0"/>
               <a:t>(флуктуации, шум)</a:t>
             </a:r>
           </a:p>
@@ -16957,16 +16892,12 @@
               </a:spcBef>
             </a:pPr>
             <a:r>
-              <a:rPr lang="ru-RU" sz="2000" b="1" dirty="0" smtClean="0"/>
+              <a:rPr lang="ru-RU" sz="2000" b="1" dirty="0"/>
               <a:t>Смещенные оценки </a:t>
             </a:r>
             <a:r>
               <a:rPr lang="ru-RU" sz="2000" dirty="0"/>
-              <a:t>параметров </a:t>
-            </a:r>
-            <a:r>
-              <a:rPr lang="ru-RU" sz="2000" dirty="0" smtClean="0"/>
-              <a:t>(инструментальная ошибка)</a:t>
+              <a:t>параметров (инструментальная ошибка)</a:t>
             </a:r>
           </a:p>
           <a:p>
@@ -16979,14 +16910,13 @@
               </a:spcBef>
             </a:pPr>
             <a:r>
-              <a:rPr lang="ru-RU" sz="2000" b="1" dirty="0" smtClean="0"/>
+              <a:rPr lang="ru-RU" sz="2000" b="1" dirty="0"/>
               <a:t>Дрейф данных </a:t>
             </a:r>
             <a:r>
               <a:rPr lang="ru-RU" sz="2000" dirty="0"/>
               <a:t>– изменение в распределение значений ВР на тесте</a:t>
             </a:r>
-            <a:endParaRPr lang="ru-RU" sz="2000" dirty="0" smtClean="0"/>
           </a:p>
           <a:p>
             <a:pPr lvl="2">
@@ -16998,14 +16928,14 @@
               </a:spcBef>
             </a:pPr>
             <a:r>
-              <a:rPr lang="ru-RU" dirty="0" smtClean="0"/>
+              <a:rPr lang="ru-RU" dirty="0"/>
               <a:t>из за ограниченности выборки не все паттерны учтены в </a:t>
             </a:r>
             <a:r>
-              <a:rPr lang="ru-RU" dirty="0" err="1" smtClean="0"/>
+              <a:rPr lang="ru-RU" dirty="0" err="1"/>
               <a:t>трейне</a:t>
             </a:r>
-            <a:endParaRPr lang="ru-RU" dirty="0" smtClean="0"/>
+            <a:endParaRPr lang="ru-RU" dirty="0"/>
           </a:p>
           <a:p>
             <a:pPr lvl="3">
@@ -17017,7 +16947,7 @@
               </a:spcBef>
             </a:pPr>
             <a:r>
-              <a:rPr lang="ru-RU" sz="2000" dirty="0" smtClean="0"/>
+              <a:rPr lang="ru-RU" sz="2000" dirty="0"/>
               <a:t>Напр., на выборке в 3 года не учтены факторы високосного года.</a:t>
             </a:r>
           </a:p>
@@ -17031,26 +16961,26 @@
               </a:spcBef>
             </a:pPr>
             <a:r>
-              <a:rPr lang="ru-RU" sz="2000" dirty="0" smtClean="0"/>
+              <a:rPr lang="ru-RU" sz="2000" dirty="0"/>
               <a:t> Нужно учесть в </a:t>
             </a:r>
             <a:r>
-              <a:rPr lang="ru-RU" sz="2000" dirty="0" err="1" smtClean="0"/>
+              <a:rPr lang="ru-RU" sz="2000" dirty="0" err="1"/>
               <a:t>трейне</a:t>
             </a:r>
             <a:r>
-              <a:rPr lang="ru-RU" sz="2000" dirty="0" smtClean="0"/>
+              <a:rPr lang="ru-RU" sz="2000" dirty="0"/>
               <a:t> и </a:t>
             </a:r>
             <a:r>
-              <a:rPr lang="ru-RU" sz="2000" dirty="0" err="1" smtClean="0"/>
+              <a:rPr lang="ru-RU" sz="2000" dirty="0" err="1"/>
               <a:t>дообуёчить</a:t>
             </a:r>
             <a:r>
-              <a:rPr lang="ru-RU" sz="2000" dirty="0" smtClean="0"/>
+              <a:rPr lang="ru-RU" sz="2000" dirty="0"/>
               <a:t> модель</a:t>
             </a:r>
-            <a:endParaRPr lang="en-US" sz="2000" dirty="0" smtClean="0"/>
+            <a:endParaRPr lang="en-US" sz="2000" dirty="0"/>
           </a:p>
           <a:p>
             <a:pPr marL="447675" lvl="1" indent="-361950">
@@ -17062,20 +16992,12 @@
               </a:spcBef>
             </a:pPr>
             <a:r>
-              <a:rPr lang="ru-RU" sz="2000" b="1" dirty="0" smtClean="0"/>
-              <a:t>Дрейф </a:t>
-            </a:r>
-            <a:r>
               <a:rPr lang="ru-RU" sz="2000" b="1" dirty="0"/>
-              <a:t>концепции </a:t>
+              <a:t>Дрейф концепции </a:t>
             </a:r>
             <a:r>
               <a:rPr lang="ru-RU" sz="2000" dirty="0"/>
-              <a:t>– Появление </a:t>
-            </a:r>
-            <a:r>
-              <a:rPr lang="ru-RU" sz="2000" dirty="0" smtClean="0"/>
-              <a:t>истинно новых паттернов в тесте</a:t>
+              <a:t>– Появление истинно новых паттернов в тесте</a:t>
             </a:r>
           </a:p>
           <a:p>
@@ -17088,16 +17010,8 @@
               </a:spcBef>
             </a:pPr>
             <a:r>
-              <a:rPr lang="ru-RU" sz="2000" dirty="0" smtClean="0"/>
-              <a:t>Напр., объявлена 4 дневная рабочая </a:t>
-            </a:r>
-            <a:r>
               <a:rPr lang="ru-RU" sz="2000" dirty="0"/>
-              <a:t>неделя. – Нужно учесть </a:t>
-            </a:r>
-            <a:r>
-              <a:rPr lang="ru-RU" sz="2000" dirty="0" smtClean="0"/>
-              <a:t>пересмотреть модель</a:t>
+              <a:t>Напр., объявлена 4 дневная рабочая неделя. – Нужно учесть пересмотреть модель</a:t>
             </a:r>
           </a:p>
           <a:p>
@@ -17105,7 +17019,7 @@
               <a:buNone/>
             </a:pPr>
             <a:r>
-              <a:rPr lang="ru-RU" sz="2100" b="1" dirty="0" smtClean="0"/>
+              <a:rPr lang="ru-RU" sz="2100" b="1" dirty="0"/>
               <a:t>Ошибки предсказаний приводят к неопределённости предсказаний и деградации моделей</a:t>
             </a:r>
           </a:p>
@@ -17359,10 +17273,9 @@
           <a:lstStyle/>
           <a:p>
             <a:r>
-              <a:rPr lang="ru-RU" dirty="0" smtClean="0"/>
+              <a:rPr lang="ru-RU" dirty="0"/>
               <a:t>Неучтенная информация?</a:t>
             </a:r>
-            <a:endParaRPr lang="ru-RU" dirty="0"/>
           </a:p>
         </p:txBody>
       </p:sp>
@@ -17487,10 +17400,9 @@
           <a:lstStyle/>
           <a:p>
             <a:r>
-              <a:rPr lang="ru-RU" sz="1600" dirty="0" smtClean="0"/>
+              <a:rPr lang="ru-RU" sz="1600" dirty="0"/>
               <a:t>Появилась новая форма продаж</a:t>
             </a:r>
-            <a:endParaRPr lang="ru-RU" sz="1600" dirty="0"/>
           </a:p>
         </p:txBody>
       </p:sp>
@@ -17517,10 +17429,9 @@
           <a:lstStyle/>
           <a:p>
             <a:r>
-              <a:rPr lang="ru-RU" sz="1600" dirty="0" smtClean="0"/>
+              <a:rPr lang="ru-RU" sz="1600" dirty="0"/>
               <a:t>Изменение доли онлайн продаж</a:t>
             </a:r>
-            <a:endParaRPr lang="ru-RU" sz="1600" dirty="0"/>
           </a:p>
         </p:txBody>
       </p:sp>
@@ -17534,13 +17445,6 @@
   <p:clrMapOvr>
     <a:masterClrMapping/>
   </p:clrMapOvr>
-  <p:timing>
-    <p:tnLst>
-      <p:par>
-        <p:cTn id="1" dur="indefinite" restart="never" nodeType="tmRoot"/>
-      </p:par>
-    </p:tnLst>
-  </p:timing>
 </p:sld>
 </file>
 
@@ -17585,10 +17489,9 @@
           <a:p>
             <a:pPr algn="ctr"/>
             <a:r>
-              <a:rPr lang="ru-RU" dirty="0" smtClean="0"/>
+              <a:rPr lang="ru-RU" dirty="0"/>
               <a:t>Пути оценки точности предсказаний модели</a:t>
             </a:r>
-            <a:endParaRPr lang="ru-RU" dirty="0"/>
           </a:p>
         </p:txBody>
       </p:sp>
@@ -17620,11 +17523,11 @@
                   <a:buNone/>
                 </a:pPr>
                 <a:r>
-                  <a:rPr lang="ru-RU" sz="2200" b="1" dirty="0" smtClean="0"/>
+                  <a:rPr lang="ru-RU" sz="2200" b="1" dirty="0"/>
                   <a:t>На тренировочной </a:t>
                 </a:r>
                 <a:r>
-                  <a:rPr lang="en-US" sz="2200" b="1" dirty="0" smtClean="0"/>
+                  <a:rPr lang="en-US" sz="2200" b="1" dirty="0"/>
                   <a:t>vs</a:t>
                 </a:r>
                 <a:r>
@@ -17632,27 +17535,19 @@
                   <a:t> </a:t>
                 </a:r>
                 <a:r>
-                  <a:rPr lang="ru-RU" sz="2200" b="1" dirty="0" err="1" smtClean="0"/>
+                  <a:rPr lang="ru-RU" sz="2200" b="1" dirty="0" err="1"/>
                   <a:t>валидационной</a:t>
                 </a:r>
                 <a:r>
-                  <a:rPr lang="ru-RU" sz="2200" b="1" dirty="0" smtClean="0"/>
-                  <a:t> </a:t>
-                </a:r>
-                <a:r>
                   <a:rPr lang="ru-RU" sz="2200" b="1" dirty="0"/>
-                  <a:t>выборке</a:t>
+                  <a:t> выборке</a:t>
                 </a:r>
               </a:p>
               <a:p>
                 <a:pPr lvl="1"/>
                 <a:r>
-                  <a:rPr lang="ru-RU" sz="2000" b="1" dirty="0" smtClean="0"/>
-                  <a:t>Оценка сложности модели</a:t>
-                </a:r>
-                <a:r>
                   <a:rPr lang="ru-RU" sz="2000" b="1" dirty="0"/>
-                  <a:t> </a:t>
+                  <a:t>Оценка сложности модели </a:t>
                 </a:r>
                 <a14:m>
                   <m:oMath xmlns:m="http://schemas.openxmlformats.org/officeDocument/2006/math">
@@ -17665,69 +17560,65 @@
                   </m:oMath>
                 </a14:m>
                 <a:r>
-                  <a:rPr lang="ru-RU" sz="2000" dirty="0" smtClean="0"/>
-                  <a:t> </a:t>
+                  <a:rPr lang="ru-RU" sz="2000" dirty="0"/>
+                  <a:t> сравнение с </a:t>
+                </a:r>
+                <a:r>
+                  <a:rPr lang="ru-RU" sz="2000" dirty="0" err="1"/>
+                  <a:t>бейзлайн</a:t>
                 </a:r>
                 <a:r>
                   <a:rPr lang="ru-RU" sz="2000" dirty="0"/>
-                  <a:t>сравнение с </a:t>
-                </a:r>
-                <a:r>
-                  <a:rPr lang="ru-RU" sz="2000" dirty="0" err="1" smtClean="0"/>
-                  <a:t>бейзлайн</a:t>
-                </a:r>
-                <a:r>
-                  <a:rPr lang="ru-RU" sz="2000" dirty="0" smtClean="0"/>
                   <a:t> и моделей </a:t>
                 </a:r>
               </a:p>
               <a:p>
                 <a:pPr lvl="2"/>
                 <a:r>
-                  <a:rPr lang="ru-RU" dirty="0" smtClean="0"/>
+                  <a:rPr lang="ru-RU" dirty="0"/>
                   <a:t>информационные критерии </a:t>
                 </a:r>
                 <a:r>
-                  <a:rPr lang="ru-RU" dirty="0" err="1" smtClean="0"/>
+                  <a:rPr lang="ru-RU" dirty="0" err="1"/>
                   <a:t>Акайке</a:t>
                 </a:r>
                 <a:r>
-                  <a:rPr lang="en-US" dirty="0" smtClean="0"/>
+                  <a:rPr lang="en-US" dirty="0"/>
                   <a:t> (AIC, </a:t>
                 </a:r>
                 <a:r>
-                  <a:rPr lang="en-US" dirty="0" err="1" smtClean="0"/>
+                  <a:rPr lang="en-US" dirty="0" err="1"/>
                   <a:t>AICc</a:t>
                 </a:r>
                 <a:r>
-                  <a:rPr lang="en-US" dirty="0" smtClean="0"/>
+                  <a:rPr lang="en-US" dirty="0"/>
                   <a:t>)</a:t>
                 </a:r>
                 <a:r>
-                  <a:rPr lang="ru-RU" dirty="0" smtClean="0"/>
+                  <a:rPr lang="ru-RU" dirty="0"/>
                   <a:t>, Шварца </a:t>
                 </a:r>
                 <a:r>
-                  <a:rPr lang="en-US" dirty="0" smtClean="0"/>
+                  <a:rPr lang="en-US" dirty="0"/>
                   <a:t>(BIC) </a:t>
                 </a:r>
                 <a:r>
-                  <a:rPr lang="ru-RU" dirty="0" smtClean="0"/>
+                  <a:rPr lang="ru-RU" dirty="0"/>
                   <a:t>и </a:t>
                 </a:r>
                 <a:r>
-                  <a:rPr lang="ru-RU" dirty="0" err="1" smtClean="0"/>
+                  <a:rPr lang="ru-RU" dirty="0" err="1"/>
                   <a:t>тд</a:t>
                 </a:r>
                 <a:r>
-                  <a:rPr lang="ru-RU" dirty="0" smtClean="0"/>
+                  <a:rPr lang="ru-RU" dirty="0"/>
                   <a:t> </a:t>
                 </a:r>
               </a:p>
               <a:p>
                 <a:pPr lvl="2"/>
                 <a:r>
-                  <a:rPr lang="ru-RU" dirty="0" smtClean="0"/>
+                  <a:rPr lang="ru-RU" dirty="0"/>
                   <a:t>Чем ниже сложность </a:t>
                 </a:r>
                 <a14:m>
@@ -17741,116 +17632,103 @@
                   </m:oMath>
                 </a14:m>
                 <a:r>
-                  <a:rPr lang="ru-RU" sz="2100" dirty="0" smtClean="0"/>
-                  <a:t> </a:t>
+                  <a:rPr lang="ru-RU" sz="2100" dirty="0"/>
+                  <a:t> тем ниже вероятность переобучения (тем модель стабильней)</a:t>
                 </a:r>
-                <a:r>
-                  <a:rPr lang="ru-RU" sz="2100" dirty="0"/>
-                  <a:t>тем </a:t>
-                </a:r>
-                <a:r>
-                  <a:rPr lang="ru-RU" sz="2100" dirty="0" smtClean="0"/>
-                  <a:t>ниже вероятность переобучения (тем модель стабильней)</a:t>
-                </a:r>
-                <a:endParaRPr lang="ru-RU" sz="2100" dirty="0"/>
               </a:p>
               <a:p>
                 <a:pPr lvl="1"/>
                 <a:r>
-                  <a:rPr lang="ru-RU" sz="2200" b="1" dirty="0" smtClean="0"/>
+                  <a:rPr lang="ru-RU" sz="2200" b="1" dirty="0"/>
                   <a:t>Интерпретируемость модели</a:t>
                 </a:r>
               </a:p>
               <a:p>
                 <a:pPr lvl="2"/>
                 <a:r>
-                  <a:rPr lang="ru-RU" sz="1800" dirty="0" smtClean="0"/>
+                  <a:rPr lang="ru-RU" sz="1800" dirty="0"/>
                   <a:t>Разложение модели </a:t>
                 </a:r>
                 <a:r>
-                  <a:rPr lang="en-US" sz="1800" dirty="0" smtClean="0"/>
+                  <a:rPr lang="en-US" sz="1800" dirty="0"/>
                   <a:t>STL, </a:t>
                 </a:r>
                 <a:r>
-                  <a:rPr lang="ru-RU" sz="1800" dirty="0" smtClean="0"/>
+                  <a:rPr lang="ru-RU" sz="1800" dirty="0"/>
                   <a:t>интерпретируемость </a:t>
                 </a:r>
                 <a:r>
-                  <a:rPr lang="en-US" sz="1800" dirty="0" smtClean="0"/>
+                  <a:rPr lang="en-US" sz="1800" dirty="0"/>
                   <a:t>ML </a:t>
                 </a:r>
                 <a:r>
-                  <a:rPr lang="ru-RU" sz="1800" dirty="0" smtClean="0"/>
+                  <a:rPr lang="ru-RU" sz="1800" dirty="0"/>
                   <a:t>моделей и </a:t>
                 </a:r>
                 <a:r>
-                  <a:rPr lang="ru-RU" sz="1800" dirty="0" err="1" smtClean="0"/>
+                  <a:rPr lang="ru-RU" sz="1800" dirty="0" err="1"/>
                   <a:t>тд</a:t>
                 </a:r>
-                <a:endParaRPr lang="en-US" sz="1800" dirty="0" smtClean="0"/>
+                <a:endParaRPr lang="en-US" sz="1800" dirty="0"/>
               </a:p>
               <a:p>
                 <a:pPr lvl="1"/>
                 <a:r>
-                  <a:rPr lang="ru-RU" sz="2200" b="1" dirty="0" smtClean="0"/>
+                  <a:rPr lang="ru-RU" sz="2200" b="1" dirty="0"/>
                   <a:t>Анализ невязок </a:t>
                 </a:r>
                 <a:r>
-                  <a:rPr lang="ru-RU" sz="2200" dirty="0" smtClean="0"/>
+                  <a:rPr lang="ru-RU" sz="2200" dirty="0"/>
                   <a:t>(остатков, на тренировочной выборке!)</a:t>
                 </a:r>
               </a:p>
               <a:p>
                 <a:pPr lvl="2"/>
                 <a:r>
-                  <a:rPr lang="ru-RU" dirty="0" smtClean="0"/>
+                  <a:rPr lang="ru-RU" dirty="0"/>
                   <a:t>Наличие информации в остатках, выбросы</a:t>
                 </a:r>
                 <a:r>
-                  <a:rPr lang="en-US" dirty="0" smtClean="0"/>
+                  <a:rPr lang="en-US" dirty="0"/>
                   <a:t>/</a:t>
                 </a:r>
                 <a:r>
-                  <a:rPr lang="ru-RU" dirty="0" err="1" smtClean="0"/>
+                  <a:rPr lang="ru-RU" dirty="0" err="1"/>
                   <a:t>новиза</a:t>
                 </a:r>
                 <a:r>
-                  <a:rPr lang="en-US" dirty="0" smtClean="0"/>
+                  <a:rPr lang="en-US" dirty="0"/>
                   <a:t>, </a:t>
                 </a:r>
                 <a:r>
                   <a:rPr lang="ru-RU" dirty="0"/>
-                  <a:t>, </a:t>
+                  <a:t>, распределение</a:t>
                 </a:r>
                 <a:r>
-                  <a:rPr lang="ru-RU" dirty="0" smtClean="0"/>
-                  <a:t>распределение</a:t>
-                </a:r>
-                <a:r>
-                  <a:rPr lang="en-US" dirty="0" smtClean="0"/>
+                  <a:rPr lang="en-US" dirty="0"/>
                   <a:t>,</a:t>
                 </a:r>
                 <a:r>
-                  <a:rPr lang="ru-RU" dirty="0" smtClean="0"/>
+                  <a:rPr lang="ru-RU" dirty="0"/>
                   <a:t> </a:t>
                 </a:r>
                 <a:r>
-                  <a:rPr lang="ru-RU" dirty="0" err="1" smtClean="0"/>
+                  <a:rPr lang="ru-RU" dirty="0" err="1"/>
                   <a:t>гомосекдостичность</a:t>
                 </a:r>
                 <a:r>
-                  <a:rPr lang="ru-RU" dirty="0" smtClean="0"/>
+                  <a:rPr lang="ru-RU" dirty="0"/>
                   <a:t> и т.д.</a:t>
                 </a:r>
               </a:p>
               <a:p>
                 <a:pPr lvl="1"/>
                 <a:r>
-                  <a:rPr lang="ru-RU" sz="2000" b="1" dirty="0" smtClean="0"/>
+                  <a:rPr lang="ru-RU" sz="2000" b="1" dirty="0"/>
                   <a:t>Оценка средней точности </a:t>
                 </a:r>
                 <a:r>
-                  <a:rPr lang="ru-RU" sz="2000" dirty="0" smtClean="0"/>
+                  <a:rPr lang="ru-RU" sz="2000" dirty="0"/>
                   <a:t>(точечные метрики</a:t>
                 </a:r>
                 <a14:m>
@@ -17864,23 +17742,23 @@
                   </m:oMath>
                 </a14:m>
                 <a:r>
-                  <a:rPr lang="ru-RU" sz="2000" dirty="0" smtClean="0"/>
+                  <a:rPr lang="ru-RU" sz="2000" dirty="0"/>
                   <a:t>сравнение с </a:t>
                 </a:r>
                 <a:r>
-                  <a:rPr lang="ru-RU" sz="2000" dirty="0" err="1" smtClean="0"/>
+                  <a:rPr lang="ru-RU" sz="2000" dirty="0" err="1"/>
                   <a:t>бейзлайн</a:t>
                 </a:r>
                 <a:r>
-                  <a:rPr lang="ru-RU" sz="2000" dirty="0" smtClean="0"/>
+                  <a:rPr lang="ru-RU" sz="2000" dirty="0"/>
                   <a:t>, </a:t>
                 </a:r>
                 <a:r>
-                  <a:rPr lang="ru-RU" sz="2000" dirty="0" err="1" smtClean="0"/>
+                  <a:rPr lang="ru-RU" sz="2000" dirty="0" err="1"/>
                   <a:t>переобученность</a:t>
                 </a:r>
                 <a:r>
-                  <a:rPr lang="ru-RU" sz="2000" dirty="0" smtClean="0"/>
+                  <a:rPr lang="ru-RU" sz="2000" dirty="0"/>
                   <a:t>)</a:t>
                 </a:r>
               </a:p>
@@ -17888,22 +17766,18 @@
                 <a:pPr lvl="2"/>
                 <a:r>
                   <a:rPr lang="en-US" dirty="0"/>
-                  <a:t>RMSE</a:t>
+                  <a:t>RMSE, MAE, MASE</a:t>
                 </a:r>
                 <a:r>
-                  <a:rPr lang="en-US" dirty="0" smtClean="0"/>
-                  <a:t>, MAE, MASE</a:t>
-                </a:r>
-                <a:r>
-                  <a:rPr lang="ru-RU" dirty="0" smtClean="0"/>
+                  <a:rPr lang="ru-RU" dirty="0"/>
                   <a:t>, </a:t>
                 </a:r>
                 <a:r>
-                  <a:rPr lang="en-US" dirty="0" err="1" smtClean="0"/>
+                  <a:rPr lang="en-US" dirty="0" err="1"/>
                   <a:t>sMAPE</a:t>
                 </a:r>
                 <a:r>
-                  <a:rPr lang="ru-RU" dirty="0" smtClean="0"/>
+                  <a:rPr lang="ru-RU" dirty="0"/>
                   <a:t> </a:t>
                 </a:r>
                 <a14:m>
@@ -17916,27 +17790,27 @@
                     </m:r>
                   </m:oMath>
                 </a14:m>
-                <a:endParaRPr lang="ru-RU" dirty="0" smtClean="0"/>
+                <a:endParaRPr lang="ru-RU" dirty="0"/>
               </a:p>
               <a:p>
                 <a:pPr lvl="2"/>
                 <a:r>
-                  <a:rPr lang="ru-RU" sz="1600" dirty="0" smtClean="0"/>
+                  <a:rPr lang="ru-RU" sz="1600" dirty="0"/>
                   <a:t>Стабильность точности при изменении параметров модели</a:t>
                 </a:r>
-                <a:endParaRPr lang="en-US" sz="1600" dirty="0" smtClean="0"/>
+                <a:endParaRPr lang="en-US" sz="1600" dirty="0"/>
               </a:p>
               <a:p>
                 <a:pPr lvl="1"/>
                 <a:r>
-                  <a:rPr lang="ru-RU" sz="2000" b="1" dirty="0" smtClean="0"/>
+                  <a:rPr lang="ru-RU" sz="2000" b="1" dirty="0"/>
                   <a:t>Оценка вероятностных метрик</a:t>
                 </a:r>
               </a:p>
               <a:p>
                 <a:pPr lvl="2"/>
                 <a:r>
-                  <a:rPr lang="ru-RU" dirty="0" smtClean="0"/>
+                  <a:rPr lang="ru-RU" dirty="0"/>
                   <a:t>интервалов/квантилей/дисперсии/распределений</a:t>
                 </a:r>
               </a:p>
@@ -17945,74 +17819,66 @@
                   <a:buNone/>
                 </a:pPr>
                 <a:r>
-                  <a:rPr lang="ru-RU" sz="2200" b="1" dirty="0" smtClean="0"/>
+                  <a:rPr lang="ru-RU" sz="2200" b="1" dirty="0"/>
                   <a:t>На </a:t>
                 </a:r>
                 <a:r>
-                  <a:rPr lang="ru-RU" sz="2200" b="1" dirty="0" err="1" smtClean="0"/>
+                  <a:rPr lang="ru-RU" sz="2200" b="1" dirty="0" err="1"/>
                   <a:t>тестовой+валидационной</a:t>
                 </a:r>
                 <a:r>
-                  <a:rPr lang="ru-RU" sz="2200" b="1" dirty="0" smtClean="0"/>
+                  <a:rPr lang="ru-RU" sz="2200" b="1" dirty="0"/>
                   <a:t> выборке </a:t>
                 </a:r>
               </a:p>
               <a:p>
                 <a:pPr lvl="1"/>
                 <a:r>
-                  <a:rPr lang="en-US" dirty="0" smtClean="0"/>
-                  <a:t>walk </a:t>
+                  <a:rPr lang="en-US" dirty="0"/>
+                  <a:t>walk forward  </a:t>
+                </a:r>
+                <a:r>
+                  <a:rPr lang="ru-RU" dirty="0"/>
+                  <a:t>кросс-</a:t>
+                </a:r>
+                <a:r>
+                  <a:rPr lang="ru-RU" dirty="0" err="1"/>
+                  <a:t>валидация</a:t>
+                </a:r>
+                <a:r>
+                  <a:rPr lang="ru-RU" dirty="0"/>
+                  <a:t> – оценка вариативности точности</a:t>
                 </a:r>
                 <a:r>
                   <a:rPr lang="en-US" dirty="0"/>
-                  <a:t>forward </a:t>
-                </a:r>
-                <a:r>
-                  <a:rPr lang="en-US" dirty="0" smtClean="0"/>
-                  <a:t> </a:t>
-                </a:r>
-                <a:r>
-                  <a:rPr lang="ru-RU" dirty="0" smtClean="0"/>
-                  <a:t>кросс-</a:t>
-                </a:r>
-                <a:r>
-                  <a:rPr lang="ru-RU" dirty="0" err="1" smtClean="0"/>
-                  <a:t>валидация</a:t>
-                </a:r>
-                <a:r>
-                  <a:rPr lang="ru-RU" dirty="0" smtClean="0"/>
-                  <a:t> – оценка вариативности точности</a:t>
-                </a:r>
-                <a:r>
-                  <a:rPr lang="en-US" dirty="0" smtClean="0"/>
                   <a:t>  </a:t>
                 </a:r>
-                <a:endParaRPr lang="ru-RU" dirty="0" smtClean="0"/>
+                <a:endParaRPr lang="ru-RU" dirty="0"/>
               </a:p>
               <a:p>
                 <a:pPr lvl="1"/>
                 <a:r>
-                  <a:rPr lang="en-US" dirty="0" err="1" smtClean="0"/>
+                  <a:rPr lang="en-US" dirty="0" err="1"/>
                   <a:t>backtesting</a:t>
                 </a:r>
                 <a:r>
-                  <a:rPr lang="en-US" dirty="0" smtClean="0"/>
+                  <a:rPr lang="en-US" dirty="0"/>
                   <a:t> </a:t>
                 </a:r>
                 <a:r>
-                  <a:rPr lang="ru-RU" dirty="0" err="1" smtClean="0"/>
+                  <a:rPr lang="ru-RU" dirty="0" err="1"/>
                   <a:t>валидация</a:t>
                 </a:r>
                 <a:r>
-                  <a:rPr lang="ru-RU" dirty="0" smtClean="0"/>
+                  <a:rPr lang="ru-RU" dirty="0"/>
                   <a:t> – симуляция предсказаний модели</a:t>
                 </a:r>
-                <a:endParaRPr lang="en-US" dirty="0" smtClean="0"/>
+                <a:endParaRPr lang="en-US" dirty="0"/>
               </a:p>
               <a:p>
                 <a:pPr lvl="1"/>
                 <a:r>
-                  <a:rPr lang="ru-RU" dirty="0" smtClean="0"/>
+                  <a:rPr lang="ru-RU" dirty="0"/>
                   <a:t>стресс-тесты (сценарный анализ) – оценка рисков предсказаний </a:t>
                 </a:r>
               </a:p>
@@ -18021,44 +17887,44 @@
                   <a:buNone/>
                 </a:pPr>
                 <a:r>
-                  <a:rPr lang="ru-RU" sz="2200" b="1" i="1" dirty="0" smtClean="0"/>
+                  <a:rPr lang="ru-RU" sz="2200" b="1" i="1" dirty="0"/>
                   <a:t>Мониторинг</a:t>
                 </a:r>
               </a:p>
               <a:p>
                 <a:pPr lvl="1"/>
                 <a:r>
-                  <a:rPr lang="ru-RU" sz="1800" i="1" dirty="0" smtClean="0"/>
+                  <a:rPr lang="ru-RU" sz="1800" i="1" dirty="0"/>
                   <a:t>Анализ невязок, </a:t>
                 </a:r>
               </a:p>
               <a:p>
                 <a:pPr lvl="1"/>
                 <a:r>
-                  <a:rPr lang="ru-RU" sz="1800" i="1" dirty="0" smtClean="0"/>
+                  <a:rPr lang="ru-RU" sz="1800" i="1" dirty="0"/>
                   <a:t>Тесты на </a:t>
                 </a:r>
                 <a:r>
-                  <a:rPr lang="ru-RU" sz="1800" i="1" dirty="0" err="1" smtClean="0"/>
+                  <a:rPr lang="ru-RU" sz="1800" i="1" dirty="0" err="1"/>
                   <a:t>дреф</a:t>
                 </a:r>
                 <a:r>
-                  <a:rPr lang="ru-RU" sz="1800" i="1" dirty="0" smtClean="0"/>
+                  <a:rPr lang="ru-RU" sz="1800" i="1" dirty="0"/>
                   <a:t> данных</a:t>
                 </a:r>
                 <a:r>
-                  <a:rPr lang="en-US" sz="1800" i="1" dirty="0" smtClean="0"/>
+                  <a:rPr lang="en-US" sz="1800" i="1" dirty="0"/>
                   <a:t>/</a:t>
                 </a:r>
                 <a:r>
-                  <a:rPr lang="ru-RU" sz="1800" i="1" dirty="0" smtClean="0"/>
+                  <a:rPr lang="ru-RU" sz="1800" i="1" dirty="0"/>
                   <a:t>концепта (уход среднего, изменение распределения ошибок, декомпозиция ВР)</a:t>
                 </a:r>
               </a:p>
               <a:p>
                 <a:pPr lvl="1"/>
                 <a:r>
-                  <a:rPr lang="ru-RU" sz="1800" i="1" dirty="0" smtClean="0"/>
+                  <a:rPr lang="ru-RU" sz="1800" i="1" dirty="0"/>
                   <a:t>Контроль аномалий</a:t>
                 </a:r>
                 <a:endParaRPr lang="ru-RU" i="1" dirty="0"/>
@@ -18144,13 +18010,6 @@
   <p:clrMapOvr>
     <a:masterClrMapping/>
   </p:clrMapOvr>
-  <p:timing>
-    <p:tnLst>
-      <p:par>
-        <p:cTn id="1" dur="indefinite" restart="never" nodeType="tmRoot"/>
-      </p:par>
-    </p:tnLst>
-  </p:timing>
 </p:sld>
 </file>
 
@@ -18195,7 +18054,7 @@
           <a:p>
             <a:pPr algn="ctr"/>
             <a:r>
-              <a:rPr lang="en-US" b="1" dirty="0" smtClean="0"/>
+              <a:rPr lang="en-US" b="1" dirty="0"/>
               <a:t>Temporal split</a:t>
             </a:r>
             <a:endParaRPr lang="ru-RU" b="1" dirty="0"/>
@@ -18228,18 +18087,18 @@
               <a:buNone/>
             </a:pPr>
             <a:r>
-              <a:rPr lang="ru-RU" sz="2400" dirty="0" smtClean="0"/>
+              <a:rPr lang="ru-RU" sz="2400" dirty="0"/>
               <a:t>Очень важно понимать, что во временных рядах невозможна  классическая кросс-</a:t>
             </a:r>
             <a:r>
-              <a:rPr lang="ru-RU" sz="2400" dirty="0" err="1" smtClean="0"/>
+              <a:rPr lang="ru-RU" sz="2400" dirty="0" err="1"/>
               <a:t>валидация</a:t>
             </a:r>
             <a:r>
-              <a:rPr lang="ru-RU" sz="2400" dirty="0" smtClean="0"/>
+              <a:rPr lang="ru-RU" sz="2400" dirty="0"/>
               <a:t>. </a:t>
             </a:r>
-            <a:endParaRPr lang="en-US" sz="2400" dirty="0" smtClean="0"/>
+            <a:endParaRPr lang="en-US" sz="2400" dirty="0"/>
           </a:p>
           <a:p>
             <a:pPr marL="0" indent="0">
@@ -18250,15 +18109,15 @@
               <a:t>	</a:t>
             </a:r>
             <a:r>
-              <a:rPr lang="ru-RU" sz="2000" dirty="0" smtClean="0"/>
+              <a:rPr lang="ru-RU" sz="2000" dirty="0"/>
               <a:t>это приведет к потери паттернов и утечке данных</a:t>
             </a:r>
             <a:r>
-              <a:rPr lang="en-US" sz="2000" dirty="0" smtClean="0"/>
+              <a:rPr lang="en-US" sz="2000" dirty="0"/>
               <a:t> </a:t>
             </a:r>
             <a:r>
-              <a:rPr lang="ru-RU" sz="2000" dirty="0" smtClean="0"/>
+              <a:rPr lang="ru-RU" sz="2000" dirty="0"/>
               <a:t>их будущего (нарушение казуальности)</a:t>
             </a:r>
           </a:p>
@@ -18268,13 +18127,8 @@
             </a:pPr>
             <a:r>
               <a:rPr lang="ru-RU" sz="2000" dirty="0"/>
-              <a:t>	</a:t>
-            </a:r>
-            <a:r>
-              <a:rPr lang="ru-RU" sz="2000" dirty="0" smtClean="0"/>
-              <a:t>другими словами такая оценка метрик будет завышена (вероятность переобучения)</a:t>
-            </a:r>
-            <a:endParaRPr lang="ru-RU" sz="2000" dirty="0"/>
+              <a:t>	другими словами такая оценка метрик будет завышена (вероятность переобучения)</a:t>
+            </a:r>
           </a:p>
           <a:p>
             <a:pPr marL="0" indent="0">
@@ -18282,39 +18136,35 @@
             </a:pPr>
             <a:r>
               <a:rPr lang="en-US" sz="2000" dirty="0"/>
-              <a:t>Temporal </a:t>
-            </a:r>
-            <a:r>
-              <a:rPr lang="en-US" sz="2000" dirty="0" smtClean="0"/>
-              <a:t>Cross-Validation </a:t>
-            </a:r>
-            <a:r>
-              <a:rPr lang="ru-RU" sz="2000" dirty="0" smtClean="0"/>
+              <a:t>Temporal Cross-Validation </a:t>
+            </a:r>
+            <a:r>
+              <a:rPr lang="ru-RU" sz="2000" dirty="0"/>
               <a:t>предполагает:</a:t>
             </a:r>
           </a:p>
           <a:p>
             <a:r>
-              <a:rPr lang="ru-RU" sz="2000" dirty="0" err="1" smtClean="0"/>
+              <a:rPr lang="ru-RU" sz="2000" dirty="0" err="1"/>
               <a:t>Валидационная</a:t>
             </a:r>
             <a:r>
-              <a:rPr lang="ru-RU" sz="2000" dirty="0" smtClean="0"/>
+              <a:rPr lang="ru-RU" sz="2000" dirty="0"/>
               <a:t> выборка идет после тренировочной.</a:t>
             </a:r>
           </a:p>
           <a:p>
             <a:pPr lvl="1"/>
             <a:r>
-              <a:rPr lang="ru-RU" sz="1800" dirty="0" smtClean="0"/>
+              <a:rPr lang="ru-RU" sz="1800" dirty="0"/>
               <a:t>Тестовая выборка идет после </a:t>
             </a:r>
             <a:r>
-              <a:rPr lang="ru-RU" sz="1800" dirty="0" err="1" smtClean="0"/>
+              <a:rPr lang="ru-RU" sz="1800" dirty="0" err="1"/>
               <a:t>валидационной</a:t>
             </a:r>
             <a:r>
-              <a:rPr lang="ru-RU" sz="1800" dirty="0" smtClean="0"/>
+              <a:rPr lang="ru-RU" sz="1800" dirty="0"/>
               <a:t>.</a:t>
             </a:r>
           </a:p>
@@ -18342,10 +18192,9 @@
           <a:lstStyle/>
           <a:p>
             <a:r>
-              <a:rPr lang="ru-RU" sz="1400" dirty="0" smtClean="0"/>
+              <a:rPr lang="ru-RU" sz="1400" dirty="0"/>
               <a:t>https://otexts.com/fpp3/tscv.html</a:t>
             </a:r>
-            <a:endParaRPr lang="ru-RU" sz="1400" dirty="0"/>
           </a:p>
         </p:txBody>
       </p:sp>
@@ -18525,13 +18374,6 @@
   <p:clrMapOvr>
     <a:masterClrMapping/>
   </p:clrMapOvr>
-  <p:timing>
-    <p:tnLst>
-      <p:par>
-        <p:cTn id="1" dur="indefinite" restart="never" nodeType="tmRoot"/>
-      </p:par>
-    </p:tnLst>
-  </p:timing>
 </p:sld>
 </file>
 
@@ -18576,19 +18418,19 @@
           <a:p>
             <a:pPr algn="ctr"/>
             <a:r>
-              <a:rPr lang="en-US" dirty="0" smtClean="0"/>
+              <a:rPr lang="en-US" dirty="0"/>
               <a:t>Walk-forward </a:t>
             </a:r>
             <a:r>
-              <a:rPr lang="ru-RU" dirty="0" smtClean="0"/>
+              <a:rPr lang="ru-RU" dirty="0"/>
               <a:t>кросс-</a:t>
             </a:r>
             <a:r>
-              <a:rPr lang="ru-RU" dirty="0" err="1" smtClean="0"/>
+              <a:rPr lang="ru-RU" dirty="0" err="1"/>
               <a:t>валидация</a:t>
             </a:r>
             <a:r>
-              <a:rPr lang="ru-RU" dirty="0" smtClean="0"/>
+              <a:rPr lang="ru-RU" dirty="0"/>
               <a:t> </a:t>
             </a:r>
             <a:endParaRPr lang="ru-RU" b="1" dirty="0"/>
@@ -18621,105 +18463,104 @@
               <a:buNone/>
             </a:pPr>
             <a:r>
-              <a:rPr lang="ru-RU" sz="2400" dirty="0" smtClean="0"/>
+              <a:rPr lang="ru-RU" sz="2400" dirty="0"/>
               <a:t>Особенность </a:t>
             </a:r>
             <a:r>
-              <a:rPr lang="en-US" sz="2400" b="1" dirty="0" smtClean="0"/>
+              <a:rPr lang="en-US" sz="2400" b="1" dirty="0"/>
               <a:t>Temporal</a:t>
             </a:r>
             <a:r>
-              <a:rPr lang="ru-RU" sz="2400" b="1" dirty="0" smtClean="0"/>
+              <a:rPr lang="ru-RU" sz="2400" b="1" dirty="0"/>
               <a:t> </a:t>
             </a:r>
             <a:r>
-              <a:rPr lang="en-US" sz="2400" b="1" dirty="0" smtClean="0"/>
+              <a:rPr lang="en-US" sz="2400" b="1" dirty="0"/>
               <a:t>split – </a:t>
             </a:r>
             <a:r>
-              <a:rPr lang="ru-RU" sz="2400" b="1" dirty="0" smtClean="0"/>
+              <a:rPr lang="ru-RU" sz="2400" b="1" dirty="0"/>
               <a:t>для нестационарных данных тест и </a:t>
             </a:r>
             <a:r>
-              <a:rPr lang="ru-RU" sz="2400" b="1" dirty="0" err="1" smtClean="0"/>
+              <a:rPr lang="ru-RU" sz="2400" b="1" dirty="0" err="1"/>
               <a:t>трейн</a:t>
             </a:r>
             <a:r>
-              <a:rPr lang="ru-RU" sz="2400" b="1" dirty="0" smtClean="0"/>
+              <a:rPr lang="ru-RU" sz="2400" b="1" dirty="0"/>
               <a:t> будут различаться.</a:t>
             </a:r>
           </a:p>
           <a:p>
             <a:pPr lvl="1"/>
             <a:r>
-              <a:rPr lang="ru-RU" sz="2000" dirty="0" smtClean="0"/>
+              <a:rPr lang="ru-RU" sz="2000" dirty="0"/>
               <a:t>Вопросы: все ли паттерны </a:t>
             </a:r>
             <a:r>
-              <a:rPr lang="ru-RU" sz="2000" dirty="0" err="1" smtClean="0"/>
+              <a:rPr lang="ru-RU" sz="2000" dirty="0" err="1"/>
               <a:t>трейн</a:t>
             </a:r>
             <a:r>
-              <a:rPr lang="ru-RU" sz="2000" dirty="0" smtClean="0"/>
+              <a:rPr lang="ru-RU" sz="2000" dirty="0"/>
               <a:t> есть в тесте? </a:t>
             </a:r>
           </a:p>
           <a:p>
             <a:pPr lvl="1"/>
             <a:r>
-              <a:rPr lang="ru-RU" sz="2000" dirty="0" smtClean="0"/>
+              <a:rPr lang="ru-RU" sz="2000" dirty="0"/>
               <a:t>Справедливы ли преобразования </a:t>
             </a:r>
             <a:r>
-              <a:rPr lang="ru-RU" sz="2000" dirty="0" err="1" smtClean="0"/>
+              <a:rPr lang="ru-RU" sz="2000" dirty="0" err="1"/>
               <a:t>трейн</a:t>
             </a:r>
             <a:r>
-              <a:rPr lang="ru-RU" sz="2000" dirty="0" smtClean="0"/>
+              <a:rPr lang="ru-RU" sz="2000" dirty="0"/>
               <a:t> к тесту.</a:t>
             </a:r>
           </a:p>
           <a:p>
             <a:pPr lvl="1"/>
             <a:r>
-              <a:rPr lang="ru-RU" sz="2000" dirty="0" smtClean="0"/>
+              <a:rPr lang="ru-RU" sz="2000" dirty="0"/>
               <a:t>Весь ли тест соответствует </a:t>
             </a:r>
             <a:r>
-              <a:rPr lang="ru-RU" sz="2000" dirty="0" err="1" smtClean="0"/>
+              <a:rPr lang="ru-RU" sz="2000" dirty="0" err="1"/>
               <a:t>трейну</a:t>
             </a:r>
             <a:r>
-              <a:rPr lang="ru-RU" sz="2000" dirty="0" smtClean="0"/>
+              <a:rPr lang="ru-RU" sz="2000" dirty="0"/>
               <a:t> и насколько допустимо отклонение?</a:t>
             </a:r>
           </a:p>
           <a:p>
             <a:r>
-              <a:rPr lang="ru-RU" sz="2000" dirty="0" smtClean="0"/>
+              <a:rPr lang="ru-RU" sz="2000" dirty="0"/>
               <a:t>Для повышения надежности возможны несколько типов кросс </a:t>
             </a:r>
             <a:r>
-              <a:rPr lang="ru-RU" sz="2000" dirty="0" err="1" smtClean="0"/>
+              <a:rPr lang="ru-RU" sz="2000" dirty="0" err="1"/>
               <a:t>валидации</a:t>
             </a:r>
             <a:r>
-              <a:rPr lang="en-US" sz="2000" dirty="0" smtClean="0"/>
+              <a:rPr lang="en-US" sz="2000" dirty="0"/>
               <a:t> c </a:t>
             </a:r>
             <a:r>
-              <a:rPr lang="ru-RU" sz="2000" dirty="0" smtClean="0"/>
+              <a:rPr lang="ru-RU" sz="2000" dirty="0"/>
               <a:t>симуляцией проявления различных эффектов в </a:t>
             </a:r>
             <a:r>
-              <a:rPr lang="ru-RU" sz="2000" dirty="0" err="1" smtClean="0"/>
+              <a:rPr lang="ru-RU" sz="2000" dirty="0" err="1"/>
               <a:t>валидационной</a:t>
             </a:r>
             <a:r>
-              <a:rPr lang="ru-RU" sz="2000" dirty="0" smtClean="0"/>
+              <a:rPr lang="ru-RU" sz="2000" dirty="0"/>
               <a:t> выборке </a:t>
             </a:r>
-            <a:endParaRPr lang="ru-RU" sz="2000" dirty="0"/>
           </a:p>
         </p:txBody>
       </p:sp>
@@ -18855,18 +18696,17 @@
           <a:lstStyle/>
           <a:p>
             <a:r>
-              <a:rPr lang="ru-RU" dirty="0" smtClean="0"/>
+              <a:rPr lang="ru-RU" dirty="0"/>
               <a:t>Кросс-</a:t>
             </a:r>
             <a:r>
-              <a:rPr lang="ru-RU" dirty="0" err="1" smtClean="0"/>
+              <a:rPr lang="ru-RU" dirty="0" err="1"/>
               <a:t>валидация</a:t>
             </a:r>
             <a:r>
-              <a:rPr lang="ru-RU" dirty="0" smtClean="0"/>
+              <a:rPr lang="ru-RU" dirty="0"/>
               <a:t> со смещающимся окном </a:t>
             </a:r>
-            <a:endParaRPr lang="ru-RU" dirty="0"/>
           </a:p>
         </p:txBody>
       </p:sp>
@@ -18892,18 +18732,17 @@
           <a:lstStyle/>
           <a:p>
             <a:r>
-              <a:rPr lang="ru-RU" dirty="0" smtClean="0"/>
+              <a:rPr lang="ru-RU" dirty="0"/>
               <a:t>Кросс-</a:t>
             </a:r>
             <a:r>
-              <a:rPr lang="ru-RU" dirty="0" err="1" smtClean="0"/>
+              <a:rPr lang="ru-RU" dirty="0" err="1"/>
               <a:t>валидация</a:t>
             </a:r>
             <a:r>
-              <a:rPr lang="ru-RU" dirty="0" smtClean="0"/>
+              <a:rPr lang="ru-RU" dirty="0"/>
               <a:t> с расширяющимся окном </a:t>
             </a:r>
-            <a:endParaRPr lang="ru-RU" dirty="0"/>
           </a:p>
         </p:txBody>
       </p:sp>
@@ -18945,17 +18784,346 @@
   <p:clrMapOvr>
     <a:masterClrMapping/>
   </p:clrMapOvr>
-  <p:timing>
-    <p:tnLst>
-      <p:par>
-        <p:cTn id="1" dur="indefinite" restart="never" nodeType="tmRoot"/>
-      </p:par>
-    </p:tnLst>
-  </p:timing>
 </p:sld>
 </file>
 
 <file path=ppt/slides/slide7.xml><?xml version="1.0" encoding="utf-8"?>
+<p:sld xmlns:a="http://schemas.openxmlformats.org/drawingml/2006/main" xmlns:r="http://schemas.openxmlformats.org/officeDocument/2006/relationships" xmlns:p="http://schemas.openxmlformats.org/presentationml/2006/main">
+  <p:cSld>
+    <p:spTree>
+      <p:nvGrpSpPr>
+        <p:cNvPr id="1" name="">
+          <a:extLst>
+            <a:ext uri="{FF2B5EF4-FFF2-40B4-BE49-F238E27FC236}">
+              <a16:creationId xmlns:a16="http://schemas.microsoft.com/office/drawing/2014/main" id="{7C3E9FF0-0758-840B-74C0-5820149D09EB}"/>
+            </a:ext>
+          </a:extLst>
+        </p:cNvPr>
+        <p:cNvGrpSpPr/>
+        <p:nvPr/>
+      </p:nvGrpSpPr>
+      <p:grpSpPr>
+        <a:xfrm>
+          <a:off x="0" y="0"/>
+          <a:ext cx="0" cy="0"/>
+          <a:chOff x="0" y="0"/>
+          <a:chExt cx="0" cy="0"/>
+        </a:xfrm>
+      </p:grpSpPr>
+      <p:sp>
+        <p:nvSpPr>
+          <p:cNvPr id="2" name="Заголовок 1">
+            <a:extLst>
+              <a:ext uri="{FF2B5EF4-FFF2-40B4-BE49-F238E27FC236}">
+                <a16:creationId xmlns:a16="http://schemas.microsoft.com/office/drawing/2014/main" id="{7DE37009-9F52-2597-07E4-01B909063B5D}"/>
+              </a:ext>
+            </a:extLst>
+          </p:cNvPr>
+          <p:cNvSpPr>
+            <a:spLocks noGrp="1"/>
+          </p:cNvSpPr>
+          <p:nvPr>
+            <p:ph type="title"/>
+          </p:nvPr>
+        </p:nvSpPr>
+        <p:spPr>
+          <a:xfrm>
+            <a:off x="307428" y="129977"/>
+            <a:ext cx="11180379" cy="620220"/>
+          </a:xfrm>
+        </p:spPr>
+        <p:txBody>
+          <a:bodyPr>
+            <a:normAutofit fontScale="90000"/>
+          </a:bodyPr>
+          <a:lstStyle/>
+          <a:p>
+            <a:pPr algn="ctr"/>
+            <a:r>
+              <a:rPr lang="en-US" dirty="0"/>
+              <a:t>Walk-forward </a:t>
+            </a:r>
+            <a:r>
+              <a:rPr lang="ru-RU" dirty="0"/>
+              <a:t>кросс-</a:t>
+            </a:r>
+            <a:r>
+              <a:rPr lang="ru-RU" dirty="0" err="1"/>
+              <a:t>валидация</a:t>
+            </a:r>
+            <a:r>
+              <a:rPr lang="ru-RU" dirty="0"/>
+              <a:t> </a:t>
+            </a:r>
+            <a:endParaRPr lang="ru-RU" b="1" dirty="0"/>
+          </a:p>
+        </p:txBody>
+      </p:sp>
+      <p:sp>
+        <p:nvSpPr>
+          <p:cNvPr id="3" name="Объект 2">
+            <a:extLst>
+              <a:ext uri="{FF2B5EF4-FFF2-40B4-BE49-F238E27FC236}">
+                <a16:creationId xmlns:a16="http://schemas.microsoft.com/office/drawing/2014/main" id="{F74D3975-52FE-820F-08B0-CDFA0E635A43}"/>
+              </a:ext>
+            </a:extLst>
+          </p:cNvPr>
+          <p:cNvSpPr>
+            <a:spLocks noGrp="1"/>
+          </p:cNvSpPr>
+          <p:nvPr>
+            <p:ph idx="1"/>
+          </p:nvPr>
+        </p:nvSpPr>
+        <p:spPr>
+          <a:xfrm>
+            <a:off x="307428" y="3363277"/>
+            <a:ext cx="11351172" cy="2703377"/>
+          </a:xfrm>
+        </p:spPr>
+        <p:txBody>
+          <a:bodyPr>
+            <a:normAutofit fontScale="62500" lnSpcReduction="20000"/>
+          </a:bodyPr>
+          <a:lstStyle/>
+          <a:p>
+            <a:r>
+              <a:rPr lang="ru-RU" dirty="0"/>
+              <a:t>Эти две схемы отличаются только размером обучающего множества. В первом случае он постоянно растет, во втором – не меняется, а само обучающее множество при этом сдвигается. Ту или иную схему на практике стоит использовать в зависимости от того, какая решается задача. Например, если данных достаточно много и предполагается онлайн работа модели с периодическим дообучением, то обычно при каждом дообучении размер обучающего множества фиксируют. В таком случае имеет смысл воспользоваться второй схемой, чтобы оценить качество модели, обученной именно на таким количестве данных. Если же данных немного, то для обучения желательно использовать все доступные данные. В таком случае имеет смысл использовать первую схему.</a:t>
+            </a:r>
+          </a:p>
+          <a:p>
+            <a:r>
+              <a:rPr lang="ru-RU" dirty="0"/>
+              <a:t>Обратите внимание, что во всех случаях размер тестового интервала времени фиксирован. Это необходимое условие, потому как распределение значений метрики на разных размерах данных может отличаться. Вспомните, например, про зависимость дисперсии выборочного от размера выборки.</a:t>
+            </a:r>
+          </a:p>
+          <a:p>
+            <a:pPr marL="0" indent="0">
+              <a:buNone/>
+            </a:pPr>
+            <a:endParaRPr lang="ru-RU" sz="2000" dirty="0"/>
+          </a:p>
+        </p:txBody>
+      </p:sp>
+      <p:sp>
+        <p:nvSpPr>
+          <p:cNvPr id="4" name="Прямоугольник 3">
+            <a:extLst>
+              <a:ext uri="{FF2B5EF4-FFF2-40B4-BE49-F238E27FC236}">
+                <a16:creationId xmlns:a16="http://schemas.microsoft.com/office/drawing/2014/main" id="{73FEA093-94DC-7270-5080-647003DBFEF2}"/>
+              </a:ext>
+            </a:extLst>
+          </p:cNvPr>
+          <p:cNvSpPr/>
+          <p:nvPr/>
+        </p:nvSpPr>
+        <p:spPr>
+          <a:xfrm>
+            <a:off x="8725385" y="6492983"/>
+            <a:ext cx="3390415" cy="369332"/>
+          </a:xfrm>
+          <a:prstGeom prst="rect">
+            <a:avLst/>
+          </a:prstGeom>
+        </p:spPr>
+        <p:txBody>
+          <a:bodyPr wrap="none">
+            <a:spAutoFit/>
+          </a:bodyPr>
+          <a:lstStyle/>
+          <a:p>
+            <a:r>
+              <a:rPr lang="ru-RU" dirty="0"/>
+              <a:t>https://otexts.com/fpp3/tscv.html</a:t>
+            </a:r>
+          </a:p>
+        </p:txBody>
+      </p:sp>
+      <p:pic>
+        <p:nvPicPr>
+          <p:cNvPr id="1026" name="Picture 2" descr="image-title-here">
+            <a:extLst>
+              <a:ext uri="{FF2B5EF4-FFF2-40B4-BE49-F238E27FC236}">
+                <a16:creationId xmlns:a16="http://schemas.microsoft.com/office/drawing/2014/main" id="{0A8E7353-9012-7783-4EAE-1FBEB92301D7}"/>
+              </a:ext>
+            </a:extLst>
+          </p:cNvPr>
+          <p:cNvPicPr>
+            <a:picLocks noChangeAspect="1" noChangeArrowheads="1"/>
+          </p:cNvPicPr>
+          <p:nvPr/>
+        </p:nvPicPr>
+        <p:blipFill>
+          <a:blip r:embed="rId2">
+            <a:extLst>
+              <a:ext uri="{28A0092B-C50C-407E-A947-70E740481C1C}">
+                <a14:useLocalDpi xmlns:a14="http://schemas.microsoft.com/office/drawing/2010/main" val="0"/>
+              </a:ext>
+            </a:extLst>
+          </a:blip>
+          <a:srcRect/>
+          <a:stretch>
+            <a:fillRect/>
+          </a:stretch>
+        </p:blipFill>
+        <p:spPr bwMode="auto">
+          <a:xfrm>
+            <a:off x="307428" y="1002841"/>
+            <a:ext cx="3932768" cy="2232632"/>
+          </a:xfrm>
+          <a:prstGeom prst="rect">
+            <a:avLst/>
+          </a:prstGeom>
+          <a:noFill/>
+          <a:extLst>
+            <a:ext uri="{909E8E84-426E-40DD-AFC4-6F175D3DCCD1}">
+              <a14:hiddenFill xmlns:a14="http://schemas.microsoft.com/office/drawing/2010/main">
+                <a:solidFill>
+                  <a:srgbClr val="FFFFFF"/>
+                </a:solidFill>
+              </a14:hiddenFill>
+            </a:ext>
+          </a:extLst>
+        </p:spPr>
+      </p:pic>
+      <p:pic>
+        <p:nvPicPr>
+          <p:cNvPr id="1028" name="Picture 4" descr="image-title-here">
+            <a:extLst>
+              <a:ext uri="{FF2B5EF4-FFF2-40B4-BE49-F238E27FC236}">
+                <a16:creationId xmlns:a16="http://schemas.microsoft.com/office/drawing/2014/main" id="{054CB517-5047-577C-1DBE-3ABF95A013D9}"/>
+              </a:ext>
+            </a:extLst>
+          </p:cNvPr>
+          <p:cNvPicPr>
+            <a:picLocks noChangeAspect="1" noChangeArrowheads="1"/>
+          </p:cNvPicPr>
+          <p:nvPr/>
+        </p:nvPicPr>
+        <p:blipFill>
+          <a:blip r:embed="rId3">
+            <a:extLst>
+              <a:ext uri="{28A0092B-C50C-407E-A947-70E740481C1C}">
+                <a14:useLocalDpi xmlns:a14="http://schemas.microsoft.com/office/drawing/2010/main" val="0"/>
+              </a:ext>
+            </a:extLst>
+          </a:blip>
+          <a:srcRect/>
+          <a:stretch>
+            <a:fillRect/>
+          </a:stretch>
+        </p:blipFill>
+        <p:spPr bwMode="auto">
+          <a:xfrm>
+            <a:off x="7097486" y="875037"/>
+            <a:ext cx="4561114" cy="2663691"/>
+          </a:xfrm>
+          <a:prstGeom prst="rect">
+            <a:avLst/>
+          </a:prstGeom>
+          <a:noFill/>
+          <a:extLst>
+            <a:ext uri="{909E8E84-426E-40DD-AFC4-6F175D3DCCD1}">
+              <a14:hiddenFill xmlns:a14="http://schemas.microsoft.com/office/drawing/2010/main">
+                <a:solidFill>
+                  <a:srgbClr val="FFFFFF"/>
+                </a:solidFill>
+              </a14:hiddenFill>
+            </a:ext>
+          </a:extLst>
+        </p:spPr>
+      </p:pic>
+      <p:sp>
+        <p:nvSpPr>
+          <p:cNvPr id="9" name="TextBox 8">
+            <a:extLst>
+              <a:ext uri="{FF2B5EF4-FFF2-40B4-BE49-F238E27FC236}">
+                <a16:creationId xmlns:a16="http://schemas.microsoft.com/office/drawing/2014/main" id="{6A9793AD-6555-C255-EA20-FB7646D7CFC0}"/>
+              </a:ext>
+            </a:extLst>
+          </p:cNvPr>
+          <p:cNvSpPr txBox="1"/>
+          <p:nvPr/>
+        </p:nvSpPr>
+        <p:spPr>
+          <a:xfrm>
+            <a:off x="418616" y="6339094"/>
+            <a:ext cx="6096000" cy="307777"/>
+          </a:xfrm>
+          <a:prstGeom prst="rect">
+            <a:avLst/>
+          </a:prstGeom>
+          <a:noFill/>
+        </p:spPr>
+        <p:txBody>
+          <a:bodyPr wrap="square">
+            <a:spAutoFit/>
+          </a:bodyPr>
+          <a:lstStyle/>
+          <a:p>
+            <a:r>
+              <a:rPr lang="ru-RU" sz="1400" dirty="0" err="1"/>
+              <a:t>https</a:t>
+            </a:r>
+            <a:r>
+              <a:rPr lang="ru-RU" sz="1400" dirty="0"/>
+              <a:t>://</a:t>
+            </a:r>
+            <a:r>
+              <a:rPr lang="ru-RU" sz="1400" dirty="0" err="1"/>
+              <a:t>education.yandex.ru</a:t>
+            </a:r>
+            <a:r>
+              <a:rPr lang="ru-RU" sz="1400" dirty="0"/>
+              <a:t>/</a:t>
+            </a:r>
+            <a:r>
+              <a:rPr lang="ru-RU" sz="1400" dirty="0" err="1"/>
+              <a:t>handbook</a:t>
+            </a:r>
+            <a:r>
+              <a:rPr lang="ru-RU" sz="1400" dirty="0"/>
+              <a:t>/</a:t>
+            </a:r>
+            <a:r>
+              <a:rPr lang="ru-RU" sz="1400" dirty="0" err="1"/>
+              <a:t>ml</a:t>
+            </a:r>
+            <a:r>
+              <a:rPr lang="ru-RU" sz="1400" dirty="0"/>
+              <a:t>/</a:t>
+            </a:r>
+            <a:r>
+              <a:rPr lang="ru-RU" sz="1400" dirty="0" err="1"/>
+              <a:t>article</a:t>
+            </a:r>
+            <a:r>
+              <a:rPr lang="ru-RU" sz="1400" dirty="0"/>
+              <a:t>/</a:t>
+            </a:r>
+            <a:r>
+              <a:rPr lang="ru-RU" sz="1400" dirty="0" err="1"/>
+              <a:t>vremennye-ryady</a:t>
+            </a:r>
+            <a:endParaRPr lang="ru-RU" sz="1400" dirty="0"/>
+          </a:p>
+        </p:txBody>
+      </p:sp>
+    </p:spTree>
+    <p:extLst>
+      <p:ext uri="{BB962C8B-B14F-4D97-AF65-F5344CB8AC3E}">
+        <p14:creationId xmlns:p14="http://schemas.microsoft.com/office/powerpoint/2010/main" val="181638704"/>
+      </p:ext>
+    </p:extLst>
+  </p:cSld>
+  <p:clrMapOvr>
+    <a:masterClrMapping/>
+  </p:clrMapOvr>
+</p:sld>
+</file>
+
+<file path=ppt/slides/slide8.xml><?xml version="1.0" encoding="utf-8"?>
 <p:sld xmlns:a="http://schemas.openxmlformats.org/drawingml/2006/main" xmlns:r="http://schemas.openxmlformats.org/officeDocument/2006/relationships" xmlns:p="http://schemas.openxmlformats.org/presentationml/2006/main">
   <p:cSld>
     <p:spTree>
@@ -19031,22 +19199,22 @@
               </a:spcBef>
             </a:pPr>
             <a:r>
-              <a:rPr lang="ru-RU" sz="2400" b="1" dirty="0" smtClean="0"/>
+              <a:rPr lang="ru-RU" sz="2400" b="1" dirty="0"/>
               <a:t>кросс-</a:t>
             </a:r>
             <a:r>
-              <a:rPr lang="ru-RU" sz="2400" b="1" dirty="0" err="1" smtClean="0"/>
+              <a:rPr lang="ru-RU" sz="2400" b="1" dirty="0" err="1"/>
               <a:t>валидация</a:t>
             </a:r>
             <a:r>
-              <a:rPr lang="ru-RU" sz="2400" dirty="0" smtClean="0"/>
+              <a:rPr lang="ru-RU" sz="2400" dirty="0"/>
               <a:t> — оценка обобщающей способности модели и настройка </a:t>
             </a:r>
             <a:r>
-              <a:rPr lang="ru-RU" sz="2400" dirty="0" err="1" smtClean="0"/>
+              <a:rPr lang="ru-RU" sz="2400" dirty="0" err="1"/>
               <a:t>гиперпараметров</a:t>
             </a:r>
-            <a:endParaRPr lang="ru-RU" sz="2400" dirty="0" smtClean="0"/>
+            <a:endParaRPr lang="ru-RU" sz="2400" dirty="0"/>
           </a:p>
           <a:p>
             <a:pPr lvl="1">
@@ -19058,23 +19226,23 @@
               </a:spcBef>
             </a:pPr>
             <a:r>
-              <a:rPr lang="ru-RU" sz="2200" dirty="0" smtClean="0"/>
+              <a:rPr lang="ru-RU" sz="2200" dirty="0"/>
               <a:t>многократная итерация на последовательных обучающих и </a:t>
             </a:r>
             <a:r>
-              <a:rPr lang="ru-RU" sz="2200" dirty="0" err="1" smtClean="0"/>
+              <a:rPr lang="ru-RU" sz="2200" dirty="0" err="1"/>
               <a:t>валидационных</a:t>
             </a:r>
             <a:r>
-              <a:rPr lang="ru-RU" sz="2200" dirty="0" smtClean="0"/>
+              <a:rPr lang="ru-RU" sz="2200" dirty="0"/>
               <a:t> </a:t>
             </a:r>
             <a:r>
-              <a:rPr lang="ru-RU" sz="2200" dirty="0" err="1" smtClean="0"/>
+              <a:rPr lang="ru-RU" sz="2200" dirty="0" err="1"/>
               <a:t>подвыборках</a:t>
             </a:r>
             <a:r>
-              <a:rPr lang="ru-RU" sz="2200" dirty="0" smtClean="0"/>
+              <a:rPr lang="ru-RU" sz="2200" dirty="0"/>
               <a:t>.</a:t>
             </a:r>
           </a:p>
@@ -19088,15 +19256,15 @@
               </a:spcBef>
             </a:pPr>
             <a:r>
-              <a:rPr lang="ru-RU" sz="2200" dirty="0" smtClean="0"/>
+              <a:rPr lang="ru-RU" sz="2200" dirty="0"/>
               <a:t>Цель – разработка модели (усредненная оценка, аналог </a:t>
             </a:r>
             <a:r>
-              <a:rPr lang="en-US" sz="2200" dirty="0" smtClean="0"/>
+              <a:rPr lang="en-US" sz="2200" dirty="0"/>
               <a:t>k-folds)</a:t>
             </a:r>
             <a:r>
-              <a:rPr lang="ru-RU" sz="2200" dirty="0" smtClean="0"/>
+              <a:rPr lang="ru-RU" sz="2200" dirty="0"/>
               <a:t>. </a:t>
             </a:r>
           </a:p>
@@ -19110,7 +19278,7 @@
               </a:spcBef>
             </a:pPr>
             <a:r>
-              <a:rPr lang="ru-RU" sz="1800" dirty="0" smtClean="0"/>
+              <a:rPr lang="ru-RU" sz="1800" dirty="0"/>
               <a:t>Модель переобучают.</a:t>
             </a:r>
           </a:p>
@@ -19124,11 +19292,11 @@
               </a:spcBef>
             </a:pPr>
             <a:r>
-              <a:rPr lang="ru-RU" sz="2400" b="1" dirty="0" err="1" smtClean="0"/>
+              <a:rPr lang="ru-RU" sz="2400" b="1" dirty="0" err="1"/>
               <a:t>Backtesting</a:t>
             </a:r>
             <a:r>
-              <a:rPr lang="ru-RU" sz="2400" dirty="0" smtClean="0"/>
+              <a:rPr lang="ru-RU" sz="2400" dirty="0"/>
               <a:t> — проверка конкретной модели на исторических данных (как будто результаты прогона)</a:t>
             </a:r>
           </a:p>
@@ -19142,15 +19310,15 @@
               </a:spcBef>
             </a:pPr>
             <a:r>
-              <a:rPr lang="ru-RU" sz="2200" dirty="0" smtClean="0"/>
+              <a:rPr lang="ru-RU" sz="2200" dirty="0"/>
               <a:t>однократное обучение и проверка на всей доступной истории (разделенных на </a:t>
             </a:r>
             <a:r>
-              <a:rPr lang="ru-RU" sz="2200" dirty="0" err="1" smtClean="0"/>
+              <a:rPr lang="ru-RU" sz="2200" dirty="0" err="1"/>
               <a:t>подвыборки</a:t>
             </a:r>
             <a:r>
-              <a:rPr lang="ru-RU" sz="2200" dirty="0" smtClean="0"/>
+              <a:rPr lang="ru-RU" sz="2200" dirty="0"/>
               <a:t>)</a:t>
             </a:r>
           </a:p>
@@ -19164,7 +19332,7 @@
               </a:spcBef>
             </a:pPr>
             <a:r>
-              <a:rPr lang="ru-RU" sz="2200" dirty="0" smtClean="0"/>
+              <a:rPr lang="ru-RU" sz="2200" dirty="0"/>
               <a:t>Цель – проверка готовой модели на разных типах данных (в различных условиях).</a:t>
             </a:r>
           </a:p>
@@ -19178,7 +19346,7 @@
               </a:spcBef>
             </a:pPr>
             <a:r>
-              <a:rPr lang="ru-RU" sz="1800" dirty="0" smtClean="0"/>
+              <a:rPr lang="ru-RU" sz="1800" dirty="0"/>
               <a:t>Модель не переобучают</a:t>
             </a:r>
           </a:p>
@@ -19193,16 +19361,12 @@
               <a:buNone/>
             </a:pPr>
             <a:r>
-              <a:rPr lang="ru-RU" sz="2400" u="sng" dirty="0" smtClean="0"/>
+              <a:rPr lang="ru-RU" sz="2400" u="sng" dirty="0"/>
               <a:t>Сегодня часто эти термины перемешивают </a:t>
             </a:r>
             <a:r>
-              <a:rPr lang="en-US" sz="2400" u="sng" dirty="0" smtClean="0"/>
+              <a:rPr lang="en-US" sz="2400" u="sng" dirty="0"/>
               <a:t>!</a:t>
-            </a:r>
-            <a:r>
-              <a:rPr lang="ru-RU" sz="2600" dirty="0"/>
-              <a:t/>
             </a:r>
             <a:br>
               <a:rPr lang="ru-RU" sz="2600" dirty="0"/>
@@ -19303,17 +19467,10 @@
   <p:clrMapOvr>
     <a:masterClrMapping/>
   </p:clrMapOvr>
-  <p:timing>
-    <p:tnLst>
-      <p:par>
-        <p:cTn id="1" dur="indefinite" restart="never" nodeType="tmRoot"/>
-      </p:par>
-    </p:tnLst>
-  </p:timing>
 </p:sld>
 </file>
 
-<file path=ppt/slides/slide8.xml><?xml version="1.0" encoding="utf-8"?>
+<file path=ppt/slides/slide9.xml><?xml version="1.0" encoding="utf-8"?>
 <p:sld xmlns:a="http://schemas.openxmlformats.org/drawingml/2006/main" xmlns:r="http://schemas.openxmlformats.org/officeDocument/2006/relationships" xmlns:p="http://schemas.openxmlformats.org/presentationml/2006/main">
   <p:cSld>
     <p:spTree>
@@ -19497,7 +19654,7 @@
                     <a:lstStyle/>
                     <a:p>
                       <a:r>
-                        <a:rPr lang="ru-RU" sz="2200" dirty="0" err="1" smtClean="0"/>
+                        <a:rPr lang="ru-RU" sz="2200" dirty="0" err="1"/>
                         <a:t>Backtesting</a:t>
                       </a:r>
                       <a:endParaRPr lang="ru-RU" sz="2200" dirty="0"/>
@@ -19511,7 +19668,7 @@
                     <a:lstStyle/>
                     <a:p>
                       <a:r>
-                        <a:rPr lang="en-US" sz="2200" b="0" i="0" kern="1200" dirty="0" smtClean="0">
+                        <a:rPr lang="en-US" sz="2200" b="0" i="0" kern="1200" dirty="0">
                           <a:solidFill>
                             <a:schemeClr val="lt1"/>
                           </a:solidFill>
@@ -19523,7 +19680,7 @@
                         <a:t>Walk-forward </a:t>
                       </a:r>
                       <a:r>
-                        <a:rPr lang="en-US" sz="2200" dirty="0" smtClean="0"/>
+                        <a:rPr lang="en-US" sz="2200" dirty="0"/>
                         <a:t>Cross-validation</a:t>
                       </a:r>
                       <a:endParaRPr lang="ru-RU" sz="2200" dirty="0"/>
@@ -19537,7 +19694,7 @@
                     <a:lstStyle/>
                     <a:p>
                       <a:r>
-                        <a:rPr lang="ru-RU" sz="2200" dirty="0" err="1" smtClean="0"/>
+                        <a:rPr lang="ru-RU" sz="2200" dirty="0" err="1"/>
                         <a:t>Backtesting</a:t>
                       </a:r>
                       <a:endParaRPr lang="ru-RU" sz="2200" dirty="0"/>
@@ -19558,10 +19715,9 @@
                     <a:lstStyle/>
                     <a:p>
                       <a:r>
-                        <a:rPr lang="ru-RU" sz="2200" dirty="0" smtClean="0"/>
+                        <a:rPr lang="ru-RU" sz="2200" dirty="0"/>
                         <a:t>аналогия</a:t>
                       </a:r>
-                      <a:endParaRPr lang="ru-RU" sz="2200" dirty="0"/>
                     </a:p>
                   </a:txBody>
                   <a:tcPr/>
@@ -19589,15 +19745,15 @@
                         <a:defRPr/>
                       </a:pPr>
                       <a:r>
-                        <a:rPr lang="ru-RU" sz="2200" dirty="0" smtClean="0"/>
+                        <a:rPr lang="ru-RU" sz="2200" dirty="0"/>
                         <a:t>Аналог</a:t>
                       </a:r>
                       <a:r>
-                        <a:rPr lang="ru-RU" sz="2200" baseline="0" dirty="0" smtClean="0"/>
+                        <a:rPr lang="ru-RU" sz="2200" baseline="0" dirty="0"/>
                         <a:t> </a:t>
                       </a:r>
                       <a:r>
-                        <a:rPr lang="en-US" sz="2200" baseline="0" dirty="0" smtClean="0"/>
+                        <a:rPr lang="en-US" sz="2200" baseline="0" dirty="0"/>
                         <a:t>k-folds</a:t>
                       </a:r>
                       <a:endParaRPr lang="ru-RU" sz="2200" dirty="0"/>
@@ -19611,11 +19767,11 @@
                     <a:lstStyle/>
                     <a:p>
                       <a:r>
-                        <a:rPr lang="ru-RU" sz="2200" dirty="0" smtClean="0"/>
+                        <a:rPr lang="ru-RU" sz="2200" dirty="0"/>
                         <a:t>Аналог</a:t>
                       </a:r>
                       <a:r>
-                        <a:rPr lang="ru-RU" sz="2200" baseline="0" dirty="0" smtClean="0"/>
+                        <a:rPr lang="ru-RU" sz="2200" baseline="0" dirty="0"/>
                         <a:t> тестирования модели</a:t>
                       </a:r>
                       <a:endParaRPr lang="ru-RU" sz="2200" dirty="0"/>
@@ -19636,10 +19792,9 @@
                     <a:lstStyle/>
                     <a:p>
                       <a:r>
-                        <a:rPr lang="ru-RU" sz="2200" dirty="0" smtClean="0"/>
+                        <a:rPr lang="ru-RU" sz="2200" dirty="0"/>
                         <a:t>цели</a:t>
                       </a:r>
-                      <a:endParaRPr lang="ru-RU" sz="2200" dirty="0"/>
                     </a:p>
                   </a:txBody>
                   <a:tcPr/>
@@ -19667,15 +19822,15 @@
                         <a:defRPr/>
                       </a:pPr>
                       <a:r>
-                        <a:rPr lang="ru-RU" sz="2200" dirty="0" smtClean="0"/>
+                        <a:rPr lang="ru-RU" sz="2200" dirty="0"/>
                         <a:t>Оценка реальной точности,</a:t>
                       </a:r>
                       <a:r>
-                        <a:rPr lang="ru-RU" sz="2200" baseline="0" dirty="0" smtClean="0"/>
+                        <a:rPr lang="ru-RU" sz="2200" baseline="0" dirty="0"/>
                         <a:t> выбор </a:t>
                       </a:r>
                       <a:r>
-                        <a:rPr lang="ru-RU" sz="2200" baseline="0" dirty="0" err="1" smtClean="0"/>
+                        <a:rPr lang="ru-RU" sz="2200" baseline="0" dirty="0" err="1"/>
                         <a:t>гиперпараметров</a:t>
                       </a:r>
                       <a:endParaRPr lang="ru-RU" sz="2200" dirty="0"/>
@@ -19689,10 +19844,9 @@
                     <a:lstStyle/>
                     <a:p>
                       <a:r>
-                        <a:rPr lang="ru-RU" sz="2200" dirty="0" smtClean="0"/>
+                        <a:rPr lang="ru-RU" sz="2200" dirty="0"/>
                         <a:t>Выявление особенностей работы готовой модели на «будущих данных»</a:t>
                       </a:r>
-                      <a:endParaRPr lang="ru-RU" sz="2200" dirty="0"/>
                     </a:p>
                   </a:txBody>
                   <a:tcPr/>
@@ -19710,11 +19864,11 @@
                     <a:lstStyle/>
                     <a:p>
                       <a:r>
-                        <a:rPr lang="ru-RU" sz="2200" dirty="0" smtClean="0"/>
+                        <a:rPr lang="ru-RU" sz="2200" dirty="0"/>
                         <a:t>Обучение</a:t>
                       </a:r>
                       <a:r>
-                        <a:rPr lang="ru-RU" sz="2200" baseline="0" dirty="0" smtClean="0"/>
+                        <a:rPr lang="ru-RU" sz="2200" baseline="0" dirty="0"/>
                         <a:t> модели</a:t>
                       </a:r>
                       <a:endParaRPr lang="ru-RU" sz="2200" dirty="0"/>
@@ -19745,15 +19899,15 @@
                         <a:defRPr/>
                       </a:pPr>
                       <a:r>
-                        <a:rPr lang="ru-RU" sz="2200" dirty="0" smtClean="0"/>
+                        <a:rPr lang="ru-RU" sz="2200" dirty="0"/>
                         <a:t>обучение</a:t>
                       </a:r>
                       <a:r>
-                        <a:rPr lang="ru-RU" sz="2200" baseline="0" dirty="0" smtClean="0"/>
+                        <a:rPr lang="ru-RU" sz="2200" baseline="0" dirty="0"/>
                         <a:t> на </a:t>
                       </a:r>
                       <a:r>
-                        <a:rPr lang="ru-RU" sz="2200" baseline="0" dirty="0" err="1" smtClean="0"/>
+                        <a:rPr lang="ru-RU" sz="2200" baseline="0" dirty="0" err="1"/>
                         <a:t>фолдах</a:t>
                       </a:r>
                       <a:endParaRPr lang="ru-RU" sz="2200" dirty="0"/>
@@ -19767,11 +19921,11 @@
                     <a:lstStyle/>
                     <a:p>
                       <a:r>
-                        <a:rPr lang="ru-RU" sz="2200" dirty="0" smtClean="0"/>
+                        <a:rPr lang="ru-RU" sz="2200" dirty="0"/>
                         <a:t>Не предполагает обучения на </a:t>
                       </a:r>
                       <a:r>
-                        <a:rPr lang="ru-RU" sz="2200" dirty="0" err="1" smtClean="0"/>
+                        <a:rPr lang="ru-RU" sz="2200" dirty="0" err="1"/>
                         <a:t>фолдах</a:t>
                       </a:r>
                       <a:endParaRPr lang="ru-RU" sz="2200" dirty="0"/>
@@ -19792,7 +19946,7 @@
                     <a:lstStyle/>
                     <a:p>
                       <a:r>
-                        <a:rPr lang="ru-RU" sz="2200" b="0" i="0" kern="1200" dirty="0" smtClean="0">
+                        <a:rPr lang="ru-RU" sz="2200" b="0" i="0" kern="1200" dirty="0">
                           <a:solidFill>
                             <a:schemeClr val="dk1"/>
                           </a:solidFill>
@@ -19804,7 +19958,7 @@
                         <a:t>Примеры</a:t>
                       </a:r>
                       <a:r>
-                        <a:rPr lang="ru-RU" sz="2200" b="0" i="0" kern="1200" baseline="0" dirty="0" smtClean="0">
+                        <a:rPr lang="ru-RU" sz="2200" b="0" i="0" kern="1200" baseline="0" dirty="0">
                           <a:solidFill>
                             <a:schemeClr val="dk1"/>
                           </a:solidFill>
@@ -19816,7 +19970,7 @@
                         <a:t> </a:t>
                       </a:r>
                       <a:r>
-                        <a:rPr lang="ru-RU" sz="2200" b="0" i="0" kern="1200" dirty="0" smtClean="0">
+                        <a:rPr lang="ru-RU" sz="2200" b="0" i="0" kern="1200" dirty="0">
                           <a:solidFill>
                             <a:schemeClr val="dk1"/>
                           </a:solidFill>
@@ -19855,7 +20009,7 @@
                         <a:defRPr/>
                       </a:pPr>
                       <a:r>
-                        <a:rPr lang="en-US" sz="2200" b="0" i="0" kern="1200" dirty="0" smtClean="0">
+                        <a:rPr lang="en-US" sz="2200" b="0" i="0" kern="1200" dirty="0">
                           <a:solidFill>
                             <a:schemeClr val="dk1"/>
                           </a:solidFill>
@@ -19866,7 +20020,7 @@
                         </a:rPr>
                         <a:t>sliding window validation</a:t>
                       </a:r>
-                      <a:endParaRPr lang="ru-RU" sz="2200" b="0" i="0" kern="1200" dirty="0" smtClean="0">
+                      <a:endParaRPr lang="ru-RU" sz="2200" b="0" i="0" kern="1200" dirty="0">
                         <a:solidFill>
                           <a:schemeClr val="dk1"/>
                         </a:solidFill>
@@ -19895,7 +20049,7 @@
                         <a:defRPr/>
                       </a:pPr>
                       <a:r>
-                        <a:rPr lang="en-US" sz="2200" b="0" i="0" kern="1200" dirty="0" smtClean="0">
+                        <a:rPr lang="en-US" sz="2200" b="0" i="0" kern="1200" dirty="0">
                           <a:solidFill>
                             <a:schemeClr val="dk1"/>
                           </a:solidFill>
@@ -19917,7 +20071,7 @@
                     <a:lstStyle/>
                     <a:p>
                       <a:r>
-                        <a:rPr lang="en-US" sz="2200" b="0" i="0" kern="1200" dirty="0" smtClean="0">
+                        <a:rPr lang="en-US" sz="2200" b="0" i="0" kern="1200" dirty="0">
                           <a:solidFill>
                             <a:schemeClr val="dk1"/>
                           </a:solidFill>
@@ -19928,7 +20082,7 @@
                         </a:rPr>
                         <a:t>Multiple horizon evaluation</a:t>
                       </a:r>
-                      <a:endParaRPr lang="ru-RU" sz="2200" b="0" i="0" kern="1200" dirty="0" smtClean="0">
+                      <a:endParaRPr lang="ru-RU" sz="2200" b="0" i="0" kern="1200" dirty="0">
                         <a:solidFill>
                           <a:schemeClr val="dk1"/>
                         </a:solidFill>
@@ -19957,7 +20111,7 @@
                         <a:defRPr/>
                       </a:pPr>
                       <a:r>
-                        <a:rPr lang="en-US" sz="2200" b="0" i="0" kern="1200" dirty="0" smtClean="0">
+                        <a:rPr lang="en-US" sz="2200" b="0" i="0" kern="1200" dirty="0">
                           <a:solidFill>
                             <a:schemeClr val="dk1"/>
                           </a:solidFill>
@@ -20003,10 +20157,9 @@
                         <a:defRPr/>
                       </a:pPr>
                       <a:r>
-                        <a:rPr lang="ru-RU" sz="2200" dirty="0" smtClean="0"/>
+                        <a:rPr lang="ru-RU" sz="2200" dirty="0"/>
                         <a:t>Примеры статистик</a:t>
                       </a:r>
-                      <a:endParaRPr lang="ru-RU" sz="2200" dirty="0"/>
                     </a:p>
                   </a:txBody>
                   <a:tcPr/>
@@ -20017,11 +20170,11 @@
                     <a:lstStyle/>
                     <a:p>
                       <a:r>
-                        <a:rPr lang="ru-RU" sz="2200" dirty="0" smtClean="0"/>
+                        <a:rPr lang="ru-RU" sz="2200" dirty="0"/>
                         <a:t>Разброс</a:t>
                       </a:r>
                       <a:r>
-                        <a:rPr lang="ru-RU" sz="2200" baseline="0" dirty="0" smtClean="0"/>
+                        <a:rPr lang="ru-RU" sz="2200" baseline="0" dirty="0"/>
                         <a:t> и среднее ошибки</a:t>
                       </a:r>
                       <a:endParaRPr lang="ru-RU" sz="2200" dirty="0"/>
@@ -20052,7 +20205,7 @@
                         <a:defRPr/>
                       </a:pPr>
                       <a:r>
-                        <a:rPr lang="en-US" sz="2200" b="0" i="0" kern="1200" dirty="0" smtClean="0">
+                        <a:rPr lang="en-US" sz="2200" b="0" i="0" kern="1200" dirty="0">
                           <a:solidFill>
                             <a:schemeClr val="dk1"/>
                           </a:solidFill>
@@ -20063,7 +20216,7 @@
                         </a:rPr>
                         <a:t>Cumulative error analysis</a:t>
                       </a:r>
-                      <a:endParaRPr lang="ru-RU" sz="2200" b="0" i="0" kern="1200" dirty="0" smtClean="0">
+                      <a:endParaRPr lang="ru-RU" sz="2200" b="0" i="0" kern="1200" dirty="0">
                         <a:solidFill>
                           <a:schemeClr val="dk1"/>
                         </a:solidFill>
@@ -20092,7 +20245,7 @@
                         <a:defRPr/>
                       </a:pPr>
                       <a:r>
-                        <a:rPr lang="ru-RU" sz="2200" b="0" i="0" kern="1200" dirty="0" smtClean="0">
+                        <a:rPr lang="ru-RU" sz="2200" b="0" i="0" kern="1200" dirty="0">
                           <a:solidFill>
                             <a:schemeClr val="dk1"/>
                           </a:solidFill>
@@ -20128,461 +20281,6 @@
   <p:clrMapOvr>
     <a:masterClrMapping/>
   </p:clrMapOvr>
-  <p:timing>
-    <p:tnLst>
-      <p:par>
-        <p:cTn id="1" dur="indefinite" restart="never" nodeType="tmRoot"/>
-      </p:par>
-    </p:tnLst>
-  </p:timing>
-</p:sld>
-</file>
-
-<file path=ppt/slides/slide9.xml><?xml version="1.0" encoding="utf-8"?>
-<p:sld xmlns:a="http://schemas.openxmlformats.org/drawingml/2006/main" xmlns:r="http://schemas.openxmlformats.org/officeDocument/2006/relationships" xmlns:p="http://schemas.openxmlformats.org/presentationml/2006/main">
-  <p:cSld>
-    <p:spTree>
-      <p:nvGrpSpPr>
-        <p:cNvPr id="1" name=""/>
-        <p:cNvGrpSpPr/>
-        <p:nvPr/>
-      </p:nvGrpSpPr>
-      <p:grpSpPr>
-        <a:xfrm>
-          <a:off x="0" y="0"/>
-          <a:ext cx="0" cy="0"/>
-          <a:chOff x="0" y="0"/>
-          <a:chExt cx="0" cy="0"/>
-        </a:xfrm>
-      </p:grpSpPr>
-      <p:sp>
-        <p:nvSpPr>
-          <p:cNvPr id="2" name="Заголовок 1"/>
-          <p:cNvSpPr>
-            <a:spLocks noGrp="1"/>
-          </p:cNvSpPr>
-          <p:nvPr>
-            <p:ph type="title"/>
-          </p:nvPr>
-        </p:nvSpPr>
-        <p:spPr>
-          <a:xfrm>
-            <a:off x="307428" y="129977"/>
-            <a:ext cx="11180379" cy="620220"/>
-          </a:xfrm>
-        </p:spPr>
-        <p:txBody>
-          <a:bodyPr>
-            <a:normAutofit fontScale="90000"/>
-          </a:bodyPr>
-          <a:lstStyle/>
-          <a:p>
-            <a:pPr algn="ctr"/>
-            <a:r>
-              <a:rPr lang="ru-RU" dirty="0" smtClean="0"/>
-              <a:t>Преимущества</a:t>
-            </a:r>
-            <a:r>
-              <a:rPr lang="en-US" dirty="0"/>
-              <a:t> Walk-forward</a:t>
-            </a:r>
-            <a:r>
-              <a:rPr lang="ru-RU" dirty="0" smtClean="0"/>
-              <a:t> </a:t>
-            </a:r>
-            <a:r>
-              <a:rPr lang="en-US" dirty="0" smtClean="0"/>
-              <a:t>cross validation</a:t>
-            </a:r>
-            <a:endParaRPr lang="ru-RU" b="1" dirty="0"/>
-          </a:p>
-        </p:txBody>
-      </p:sp>
-      <p:sp>
-        <p:nvSpPr>
-          <p:cNvPr id="3" name="Объект 2"/>
-          <p:cNvSpPr>
-            <a:spLocks noGrp="1"/>
-          </p:cNvSpPr>
-          <p:nvPr>
-            <p:ph idx="1"/>
-          </p:nvPr>
-        </p:nvSpPr>
-        <p:spPr>
-          <a:xfrm>
-            <a:off x="307428" y="875037"/>
-            <a:ext cx="11351172" cy="5191617"/>
-          </a:xfrm>
-        </p:spPr>
-        <p:txBody>
-          <a:bodyPr>
-            <a:normAutofit/>
-          </a:bodyPr>
-          <a:lstStyle/>
-          <a:p>
-            <a:pPr marL="0" indent="0">
-              <a:buNone/>
-            </a:pPr>
-            <a:r>
-              <a:rPr lang="ru-RU" sz="2400" dirty="0" smtClean="0"/>
-              <a:t> </a:t>
-            </a:r>
-            <a:endParaRPr lang="ru-RU" sz="2400" dirty="0"/>
-          </a:p>
-        </p:txBody>
-      </p:sp>
-      <p:sp>
-        <p:nvSpPr>
-          <p:cNvPr id="4" name="Прямоугольник 3"/>
-          <p:cNvSpPr/>
-          <p:nvPr/>
-        </p:nvSpPr>
-        <p:spPr>
-          <a:xfrm>
-            <a:off x="6386813" y="6437836"/>
-            <a:ext cx="5732338" cy="307777"/>
-          </a:xfrm>
-          <a:prstGeom prst="rect">
-            <a:avLst/>
-          </a:prstGeom>
-        </p:spPr>
-        <p:txBody>
-          <a:bodyPr wrap="none">
-            <a:spAutoFit/>
-          </a:bodyPr>
-          <a:lstStyle/>
-          <a:p>
-            <a:r>
-              <a:rPr lang="en-US" sz="1400" b="1" dirty="0"/>
-              <a:t>https://github.com/tinkoff-ai/etna/blob/master/examples/backtest.ipynb</a:t>
-            </a:r>
-            <a:endParaRPr lang="ru-RU" sz="1400" b="1" dirty="0"/>
-          </a:p>
-        </p:txBody>
-      </p:sp>
-      <p:sp>
-        <p:nvSpPr>
-          <p:cNvPr id="7" name="Прямоугольник 6"/>
-          <p:cNvSpPr/>
-          <p:nvPr/>
-        </p:nvSpPr>
-        <p:spPr>
-          <a:xfrm>
-            <a:off x="473220" y="5268286"/>
-            <a:ext cx="6016383" cy="1323439"/>
-          </a:xfrm>
-          <a:prstGeom prst="rect">
-            <a:avLst/>
-          </a:prstGeom>
-        </p:spPr>
-        <p:txBody>
-          <a:bodyPr wrap="square">
-            <a:spAutoFit/>
-          </a:bodyPr>
-          <a:lstStyle/>
-          <a:p>
-            <a:r>
-              <a:rPr lang="ru-RU" sz="2000" i="1" u="sng" dirty="0" smtClean="0"/>
-              <a:t>Иногда модель дополнительно тестируют на перевернутом</a:t>
-            </a:r>
-          </a:p>
-          <a:p>
-            <a:r>
-              <a:rPr lang="ru-RU" sz="2000" i="1" u="sng" dirty="0" smtClean="0"/>
-              <a:t> временном ряду для повышения надежности выводов  </a:t>
-            </a:r>
-            <a:endParaRPr lang="ru-RU" sz="2000" i="1" u="sng" dirty="0"/>
-          </a:p>
-        </p:txBody>
-      </p:sp>
-      <p:pic>
-        <p:nvPicPr>
-          <p:cNvPr id="6" name="Рисунок 5"/>
-          <p:cNvPicPr>
-            <a:picLocks noChangeAspect="1"/>
-          </p:cNvPicPr>
-          <p:nvPr/>
-        </p:nvPicPr>
-        <p:blipFill>
-          <a:blip r:embed="rId2"/>
-          <a:stretch>
-            <a:fillRect/>
-          </a:stretch>
-        </p:blipFill>
-        <p:spPr>
-          <a:xfrm>
-            <a:off x="6579501" y="3266272"/>
-            <a:ext cx="5257980" cy="2926270"/>
-          </a:xfrm>
-          <a:prstGeom prst="rect">
-            <a:avLst/>
-          </a:prstGeom>
-        </p:spPr>
-      </p:pic>
-      <p:sp>
-        <p:nvSpPr>
-          <p:cNvPr id="12" name="Объект 2"/>
-          <p:cNvSpPr txBox="1">
-            <a:spLocks/>
-          </p:cNvSpPr>
-          <p:nvPr/>
-        </p:nvSpPr>
-        <p:spPr>
-          <a:xfrm>
-            <a:off x="310136" y="753168"/>
-            <a:ext cx="11706225" cy="5176838"/>
-          </a:xfrm>
-          <a:prstGeom prst="rect">
-            <a:avLst/>
-          </a:prstGeom>
-        </p:spPr>
-        <p:txBody>
-          <a:bodyPr vert="horz" lIns="91440" tIns="45720" rIns="91440" bIns="45720" rtlCol="0">
-            <a:normAutofit/>
-          </a:bodyPr>
-          <a:lstStyle>
-            <a:lvl1pPr marL="228600" indent="-228600" algn="l" defTabSz="914400" rtl="0" eaLnBrk="1" latinLnBrk="0" hangingPunct="1">
-              <a:lnSpc>
-                <a:spcPct val="90000"/>
-              </a:lnSpc>
-              <a:spcBef>
-                <a:spcPts val="1000"/>
-              </a:spcBef>
-              <a:buFont typeface="Arial" panose="020B0604020202020204" pitchFamily="34" charset="0"/>
-              <a:buChar char="•"/>
-              <a:defRPr sz="2800" kern="1200">
-                <a:solidFill>
-                  <a:schemeClr val="tx1"/>
-                </a:solidFill>
-                <a:latin typeface="+mn-lt"/>
-                <a:ea typeface="+mn-ea"/>
-                <a:cs typeface="+mn-cs"/>
-              </a:defRPr>
-            </a:lvl1pPr>
-            <a:lvl2pPr marL="685800" indent="-228600" algn="l" defTabSz="914400" rtl="0" eaLnBrk="1" latinLnBrk="0" hangingPunct="1">
-              <a:lnSpc>
-                <a:spcPct val="90000"/>
-              </a:lnSpc>
-              <a:spcBef>
-                <a:spcPts val="500"/>
-              </a:spcBef>
-              <a:buFont typeface="Arial" panose="020B0604020202020204" pitchFamily="34" charset="0"/>
-              <a:buChar char="•"/>
-              <a:defRPr sz="2400" kern="1200">
-                <a:solidFill>
-                  <a:schemeClr val="tx1"/>
-                </a:solidFill>
-                <a:latin typeface="+mn-lt"/>
-                <a:ea typeface="+mn-ea"/>
-                <a:cs typeface="+mn-cs"/>
-              </a:defRPr>
-            </a:lvl2pPr>
-            <a:lvl3pPr marL="1143000" indent="-228600" algn="l" defTabSz="914400" rtl="0" eaLnBrk="1" latinLnBrk="0" hangingPunct="1">
-              <a:lnSpc>
-                <a:spcPct val="90000"/>
-              </a:lnSpc>
-              <a:spcBef>
-                <a:spcPts val="500"/>
-              </a:spcBef>
-              <a:buFont typeface="Arial" panose="020B0604020202020204" pitchFamily="34" charset="0"/>
-              <a:buChar char="•"/>
-              <a:defRPr sz="2000" kern="1200">
-                <a:solidFill>
-                  <a:schemeClr val="tx1"/>
-                </a:solidFill>
-                <a:latin typeface="+mn-lt"/>
-                <a:ea typeface="+mn-ea"/>
-                <a:cs typeface="+mn-cs"/>
-              </a:defRPr>
-            </a:lvl3pPr>
-            <a:lvl4pPr marL="1600200" indent="-228600" algn="l" defTabSz="914400" rtl="0" eaLnBrk="1" latinLnBrk="0" hangingPunct="1">
-              <a:lnSpc>
-                <a:spcPct val="90000"/>
-              </a:lnSpc>
-              <a:spcBef>
-                <a:spcPts val="500"/>
-              </a:spcBef>
-              <a:buFont typeface="Arial" panose="020B0604020202020204" pitchFamily="34" charset="0"/>
-              <a:buChar char="•"/>
-              <a:defRPr sz="1800" kern="1200">
-                <a:solidFill>
-                  <a:schemeClr val="tx1"/>
-                </a:solidFill>
-                <a:latin typeface="+mn-lt"/>
-                <a:ea typeface="+mn-ea"/>
-                <a:cs typeface="+mn-cs"/>
-              </a:defRPr>
-            </a:lvl4pPr>
-            <a:lvl5pPr marL="2057400" indent="-228600" algn="l" defTabSz="914400" rtl="0" eaLnBrk="1" latinLnBrk="0" hangingPunct="1">
-              <a:lnSpc>
-                <a:spcPct val="90000"/>
-              </a:lnSpc>
-              <a:spcBef>
-                <a:spcPts val="500"/>
-              </a:spcBef>
-              <a:buFont typeface="Arial" panose="020B0604020202020204" pitchFamily="34" charset="0"/>
-              <a:buChar char="•"/>
-              <a:defRPr sz="1800" kern="1200">
-                <a:solidFill>
-                  <a:schemeClr val="tx1"/>
-                </a:solidFill>
-                <a:latin typeface="+mn-lt"/>
-                <a:ea typeface="+mn-ea"/>
-                <a:cs typeface="+mn-cs"/>
-              </a:defRPr>
-            </a:lvl5pPr>
-            <a:lvl6pPr marL="2514600" indent="-228600" algn="l" defTabSz="914400" rtl="0" eaLnBrk="1" latinLnBrk="0" hangingPunct="1">
-              <a:lnSpc>
-                <a:spcPct val="90000"/>
-              </a:lnSpc>
-              <a:spcBef>
-                <a:spcPts val="500"/>
-              </a:spcBef>
-              <a:buFont typeface="Arial" panose="020B0604020202020204" pitchFamily="34" charset="0"/>
-              <a:buChar char="•"/>
-              <a:defRPr sz="1800" kern="1200">
-                <a:solidFill>
-                  <a:schemeClr val="tx1"/>
-                </a:solidFill>
-                <a:latin typeface="+mn-lt"/>
-                <a:ea typeface="+mn-ea"/>
-                <a:cs typeface="+mn-cs"/>
-              </a:defRPr>
-            </a:lvl6pPr>
-            <a:lvl7pPr marL="2971800" indent="-228600" algn="l" defTabSz="914400" rtl="0" eaLnBrk="1" latinLnBrk="0" hangingPunct="1">
-              <a:lnSpc>
-                <a:spcPct val="90000"/>
-              </a:lnSpc>
-              <a:spcBef>
-                <a:spcPts val="500"/>
-              </a:spcBef>
-              <a:buFont typeface="Arial" panose="020B0604020202020204" pitchFamily="34" charset="0"/>
-              <a:buChar char="•"/>
-              <a:defRPr sz="1800" kern="1200">
-                <a:solidFill>
-                  <a:schemeClr val="tx1"/>
-                </a:solidFill>
-                <a:latin typeface="+mn-lt"/>
-                <a:ea typeface="+mn-ea"/>
-                <a:cs typeface="+mn-cs"/>
-              </a:defRPr>
-            </a:lvl7pPr>
-            <a:lvl8pPr marL="3429000" indent="-228600" algn="l" defTabSz="914400" rtl="0" eaLnBrk="1" latinLnBrk="0" hangingPunct="1">
-              <a:lnSpc>
-                <a:spcPct val="90000"/>
-              </a:lnSpc>
-              <a:spcBef>
-                <a:spcPts val="500"/>
-              </a:spcBef>
-              <a:buFont typeface="Arial" panose="020B0604020202020204" pitchFamily="34" charset="0"/>
-              <a:buChar char="•"/>
-              <a:defRPr sz="1800" kern="1200">
-                <a:solidFill>
-                  <a:schemeClr val="tx1"/>
-                </a:solidFill>
-                <a:latin typeface="+mn-lt"/>
-                <a:ea typeface="+mn-ea"/>
-                <a:cs typeface="+mn-cs"/>
-              </a:defRPr>
-            </a:lvl8pPr>
-            <a:lvl9pPr marL="3886200" indent="-228600" algn="l" defTabSz="914400" rtl="0" eaLnBrk="1" latinLnBrk="0" hangingPunct="1">
-              <a:lnSpc>
-                <a:spcPct val="90000"/>
-              </a:lnSpc>
-              <a:spcBef>
-                <a:spcPts val="500"/>
-              </a:spcBef>
-              <a:buFont typeface="Arial" panose="020B0604020202020204" pitchFamily="34" charset="0"/>
-              <a:buChar char="•"/>
-              <a:defRPr sz="1800" kern="1200">
-                <a:solidFill>
-                  <a:schemeClr val="tx1"/>
-                </a:solidFill>
-                <a:latin typeface="+mn-lt"/>
-                <a:ea typeface="+mn-ea"/>
-                <a:cs typeface="+mn-cs"/>
-              </a:defRPr>
-            </a:lvl9pPr>
-          </a:lstStyle>
-          <a:p>
-            <a:r>
-              <a:rPr lang="ru-RU" sz="2400" dirty="0" smtClean="0"/>
-              <a:t>Снижение смещения оценки </a:t>
-            </a:r>
-            <a:r>
-              <a:rPr lang="ru-RU" sz="2400" dirty="0"/>
-              <a:t>метрик</a:t>
-            </a:r>
-            <a:r>
-              <a:rPr lang="ru-RU" sz="2400" dirty="0" smtClean="0"/>
-              <a:t> по сравнению с одноразовой разбивкой. </a:t>
-            </a:r>
-            <a:endParaRPr lang="en-US" sz="2400" dirty="0" smtClean="0"/>
-          </a:p>
-          <a:p>
-            <a:r>
-              <a:rPr lang="ru-RU" sz="2400" dirty="0" smtClean="0"/>
-              <a:t>Оценка дисперсии метрик</a:t>
-            </a:r>
-          </a:p>
-          <a:p>
-            <a:r>
-              <a:rPr lang="ru-RU" sz="2400" dirty="0" smtClean="0"/>
-              <a:t>Поиск "плавающих" ошибок </a:t>
-            </a:r>
-            <a:r>
-              <a:rPr lang="ru-RU" sz="2400" dirty="0"/>
-              <a:t>в модели данных. </a:t>
-            </a:r>
-            <a:endParaRPr lang="ru-RU" sz="2400" dirty="0" smtClean="0"/>
-          </a:p>
-          <a:p>
-            <a:pPr lvl="1"/>
-            <a:r>
-              <a:rPr lang="ru-RU" sz="2000" dirty="0" smtClean="0"/>
-              <a:t>То </a:t>
-            </a:r>
-            <a:r>
-              <a:rPr lang="ru-RU" sz="2000" dirty="0"/>
-              <a:t>есть редкие, но достаточно регулярные ошибки (неучтенную </a:t>
-            </a:r>
-            <a:r>
-              <a:rPr lang="ru-RU" sz="2000" dirty="0" err="1"/>
-              <a:t>информоацию</a:t>
-            </a:r>
-            <a:r>
-              <a:rPr lang="ru-RU" sz="2000" dirty="0"/>
-              <a:t>), которые можно участь в модели.</a:t>
-            </a:r>
-          </a:p>
-          <a:p>
-            <a:r>
-              <a:rPr lang="ru-RU" sz="2400" dirty="0" smtClean="0"/>
-              <a:t>Оценка важности факторов в модели.</a:t>
-            </a:r>
-          </a:p>
-          <a:p>
-            <a:endParaRPr lang="ru-RU" sz="2400" dirty="0"/>
-          </a:p>
-        </p:txBody>
-      </p:sp>
-    </p:spTree>
-    <p:extLst>
-      <p:ext uri="{BB962C8B-B14F-4D97-AF65-F5344CB8AC3E}">
-        <p14:creationId xmlns:p14="http://schemas.microsoft.com/office/powerpoint/2010/main" val="3873255510"/>
-      </p:ext>
-    </p:extLst>
-  </p:cSld>
-  <p:clrMapOvr>
-    <a:masterClrMapping/>
-  </p:clrMapOvr>
-  <p:timing>
-    <p:tnLst>
-      <p:par>
-        <p:cTn id="1" dur="indefinite" restart="never" nodeType="tmRoot"/>
-      </p:par>
-    </p:tnLst>
-  </p:timing>
 </p:sld>
 </file>
 

--- a/2025/LEC/05-2 Оценка надежности предсказаний ВР.pptx
+++ b/2025/LEC/05-2 Оценка надежности предсказаний ВР.pptx
@@ -5,7 +5,7 @@
     <p:sldMasterId id="2147483648" r:id="rId1"/>
   </p:sldMasterIdLst>
   <p:notesMasterIdLst>
-    <p:notesMasterId r:id="rId27"/>
+    <p:notesMasterId r:id="rId28"/>
   </p:notesMasterIdLst>
   <p:sldIdLst>
     <p:sldId id="477" r:id="rId2"/>
@@ -19,20 +19,21 @@
     <p:sldId id="469" r:id="rId10"/>
     <p:sldId id="466" r:id="rId11"/>
     <p:sldId id="467" r:id="rId12"/>
-    <p:sldId id="470" r:id="rId13"/>
-    <p:sldId id="471" r:id="rId14"/>
-    <p:sldId id="475" r:id="rId15"/>
-    <p:sldId id="474" r:id="rId16"/>
-    <p:sldId id="473" r:id="rId17"/>
-    <p:sldId id="483" r:id="rId18"/>
-    <p:sldId id="481" r:id="rId19"/>
-    <p:sldId id="480" r:id="rId20"/>
-    <p:sldId id="484" r:id="rId21"/>
-    <p:sldId id="485" r:id="rId22"/>
-    <p:sldId id="472" r:id="rId23"/>
-    <p:sldId id="479" r:id="rId24"/>
-    <p:sldId id="468" r:id="rId25"/>
-    <p:sldId id="461" r:id="rId26"/>
+    <p:sldId id="487" r:id="rId13"/>
+    <p:sldId id="470" r:id="rId14"/>
+    <p:sldId id="471" r:id="rId15"/>
+    <p:sldId id="475" r:id="rId16"/>
+    <p:sldId id="474" r:id="rId17"/>
+    <p:sldId id="473" r:id="rId18"/>
+    <p:sldId id="483" r:id="rId19"/>
+    <p:sldId id="481" r:id="rId20"/>
+    <p:sldId id="480" r:id="rId21"/>
+    <p:sldId id="484" r:id="rId22"/>
+    <p:sldId id="485" r:id="rId23"/>
+    <p:sldId id="472" r:id="rId24"/>
+    <p:sldId id="479" r:id="rId25"/>
+    <p:sldId id="468" r:id="rId26"/>
+    <p:sldId id="461" r:id="rId27"/>
   </p:sldIdLst>
   <p:sldSz cx="12192000" cy="6858000"/>
   <p:notesSz cx="6858000" cy="9144000"/>
@@ -221,7 +222,7 @@
           <a:p>
             <a:fld id="{C730246F-5962-E14A-AAF2-985CCFDAC345}" type="datetimeFigureOut">
               <a:rPr lang="ru-RU" smtClean="0"/>
-              <a:t>08.08.2025</a:t>
+              <a:t>12.08.2025</a:t>
             </a:fld>
             <a:endParaRPr lang="ru-RU"/>
           </a:p>
@@ -637,7 +638,7 @@
           <a:p>
             <a:fld id="{44343DC6-30E4-4569-999A-C703F926F2AF}" type="datetimeFigureOut">
               <a:rPr lang="en-US" smtClean="0"/>
-              <a:t>8/8/25</a:t>
+              <a:t>8/12/2025</a:t>
             </a:fld>
             <a:endParaRPr lang="en-US"/>
           </a:p>
@@ -837,7 +838,7 @@
           <a:p>
             <a:fld id="{44343DC6-30E4-4569-999A-C703F926F2AF}" type="datetimeFigureOut">
               <a:rPr lang="en-US" smtClean="0"/>
-              <a:t>8/8/25</a:t>
+              <a:t>8/12/2025</a:t>
             </a:fld>
             <a:endParaRPr lang="en-US"/>
           </a:p>
@@ -1047,7 +1048,7 @@
           <a:p>
             <a:fld id="{44343DC6-30E4-4569-999A-C703F926F2AF}" type="datetimeFigureOut">
               <a:rPr lang="en-US" smtClean="0"/>
-              <a:t>8/8/25</a:t>
+              <a:t>8/12/2025</a:t>
             </a:fld>
             <a:endParaRPr lang="en-US"/>
           </a:p>
@@ -1247,7 +1248,7 @@
           <a:p>
             <a:fld id="{44343DC6-30E4-4569-999A-C703F926F2AF}" type="datetimeFigureOut">
               <a:rPr lang="en-US" smtClean="0"/>
-              <a:t>8/8/25</a:t>
+              <a:t>8/12/2025</a:t>
             </a:fld>
             <a:endParaRPr lang="en-US"/>
           </a:p>
@@ -1523,7 +1524,7 @@
           <a:p>
             <a:fld id="{44343DC6-30E4-4569-999A-C703F926F2AF}" type="datetimeFigureOut">
               <a:rPr lang="en-US" smtClean="0"/>
-              <a:t>8/8/25</a:t>
+              <a:t>8/12/2025</a:t>
             </a:fld>
             <a:endParaRPr lang="en-US"/>
           </a:p>
@@ -1791,7 +1792,7 @@
           <a:p>
             <a:fld id="{44343DC6-30E4-4569-999A-C703F926F2AF}" type="datetimeFigureOut">
               <a:rPr lang="en-US" smtClean="0"/>
-              <a:t>8/8/25</a:t>
+              <a:t>8/12/2025</a:t>
             </a:fld>
             <a:endParaRPr lang="en-US"/>
           </a:p>
@@ -2206,7 +2207,7 @@
           <a:p>
             <a:fld id="{44343DC6-30E4-4569-999A-C703F926F2AF}" type="datetimeFigureOut">
               <a:rPr lang="en-US" smtClean="0"/>
-              <a:t>8/8/25</a:t>
+              <a:t>8/12/2025</a:t>
             </a:fld>
             <a:endParaRPr lang="en-US"/>
           </a:p>
@@ -2348,7 +2349,7 @@
           <a:p>
             <a:fld id="{44343DC6-30E4-4569-999A-C703F926F2AF}" type="datetimeFigureOut">
               <a:rPr lang="en-US" smtClean="0"/>
-              <a:t>8/8/25</a:t>
+              <a:t>8/12/2025</a:t>
             </a:fld>
             <a:endParaRPr lang="en-US"/>
           </a:p>
@@ -2461,7 +2462,7 @@
           <a:p>
             <a:fld id="{44343DC6-30E4-4569-999A-C703F926F2AF}" type="datetimeFigureOut">
               <a:rPr lang="en-US" smtClean="0"/>
-              <a:t>8/8/25</a:t>
+              <a:t>8/12/2025</a:t>
             </a:fld>
             <a:endParaRPr lang="en-US"/>
           </a:p>
@@ -2774,7 +2775,7 @@
           <a:p>
             <a:fld id="{44343DC6-30E4-4569-999A-C703F926F2AF}" type="datetimeFigureOut">
               <a:rPr lang="en-US" smtClean="0"/>
-              <a:t>8/8/25</a:t>
+              <a:t>8/12/2025</a:t>
             </a:fld>
             <a:endParaRPr lang="en-US"/>
           </a:p>
@@ -3063,7 +3064,7 @@
           <a:p>
             <a:fld id="{44343DC6-30E4-4569-999A-C703F926F2AF}" type="datetimeFigureOut">
               <a:rPr lang="en-US" smtClean="0"/>
-              <a:t>8/8/25</a:t>
+              <a:t>8/12/2025</a:t>
             </a:fld>
             <a:endParaRPr lang="en-US"/>
           </a:p>
@@ -3306,7 +3307,7 @@
           <a:p>
             <a:fld id="{44343DC6-30E4-4569-999A-C703F926F2AF}" type="datetimeFigureOut">
               <a:rPr lang="en-US" smtClean="0"/>
-              <a:t>8/8/25</a:t>
+              <a:t>8/12/2025</a:t>
             </a:fld>
             <a:endParaRPr lang="en-US"/>
           </a:p>
@@ -4449,6 +4450,453 @@
         </p:nvSpPr>
         <p:spPr>
           <a:xfrm>
+            <a:off x="341832" y="365126"/>
+            <a:ext cx="12040668" cy="523638"/>
+          </a:xfrm>
+        </p:spPr>
+        <p:txBody>
+          <a:bodyPr>
+            <a:noAutofit/>
+          </a:bodyPr>
+          <a:lstStyle/>
+          <a:p>
+            <a:r>
+              <a:rPr lang="ru-RU" sz="3600" dirty="0" smtClean="0"/>
+              <a:t>Замечание. </a:t>
+            </a:r>
+            <a:r>
+              <a:rPr lang="en-US" sz="3600" dirty="0" err="1" smtClean="0"/>
+              <a:t>Backcast</a:t>
+            </a:r>
+            <a:r>
+              <a:rPr lang="ru-RU" sz="3600" dirty="0" smtClean="0"/>
+              <a:t>-дополнительная оценка надежности</a:t>
+            </a:r>
+            <a:endParaRPr lang="ru-RU" sz="3600" dirty="0"/>
+          </a:p>
+        </p:txBody>
+      </p:sp>
+      <p:sp>
+        <p:nvSpPr>
+          <p:cNvPr id="3" name="Объект 2"/>
+          <p:cNvSpPr>
+            <a:spLocks noGrp="1"/>
+          </p:cNvSpPr>
+          <p:nvPr>
+            <p:ph idx="1"/>
+          </p:nvPr>
+        </p:nvSpPr>
+        <p:spPr>
+          <a:xfrm>
+            <a:off x="219101" y="991312"/>
+            <a:ext cx="11859578" cy="5100193"/>
+          </a:xfrm>
+        </p:spPr>
+        <p:txBody>
+          <a:bodyPr>
+            <a:normAutofit/>
+          </a:bodyPr>
+          <a:lstStyle/>
+          <a:p>
+            <a:pPr marL="0" indent="0">
+              <a:buNone/>
+            </a:pPr>
+            <a:r>
+              <a:rPr lang="ru-RU" sz="2200" dirty="0" smtClean="0"/>
+              <a:t>Если ВР стационарный или как минимум регулярный, то оценку точности предсказания вперед </a:t>
+            </a:r>
+            <a:r>
+              <a:rPr lang="en-US" sz="2200" dirty="0" smtClean="0"/>
+              <a:t>(forecast)</a:t>
+            </a:r>
+            <a:r>
+              <a:rPr lang="ru-RU" sz="2200" dirty="0" smtClean="0"/>
+              <a:t> можно скорректировать оценкой точности ретроспективного предсказания (предсказания назад </a:t>
+            </a:r>
+            <a:r>
+              <a:rPr lang="en-US" sz="2200" dirty="0" err="1" smtClean="0"/>
+              <a:t>Backcast</a:t>
+            </a:r>
+            <a:r>
+              <a:rPr lang="ru-RU" sz="2200" dirty="0" smtClean="0"/>
+              <a:t>).</a:t>
+            </a:r>
+            <a:endParaRPr lang="ru-RU" sz="2200" dirty="0"/>
+          </a:p>
+        </p:txBody>
+      </p:sp>
+      <p:pic>
+        <p:nvPicPr>
+          <p:cNvPr id="1026" name="Picture 2" descr="https://robjhyndman.com/hyndsight/backcasting/index_files/figure-html/unnamed-chunk-1-1.png"/>
+          <p:cNvPicPr>
+            <a:picLocks noChangeAspect="1" noChangeArrowheads="1"/>
+          </p:cNvPicPr>
+          <p:nvPr/>
+        </p:nvPicPr>
+        <p:blipFill>
+          <a:blip r:embed="rId2">
+            <a:extLst>
+              <a:ext uri="{28A0092B-C50C-407E-A947-70E740481C1C}">
+                <a14:useLocalDpi xmlns:a14="http://schemas.microsoft.com/office/drawing/2010/main" val="0"/>
+              </a:ext>
+            </a:extLst>
+          </a:blip>
+          <a:srcRect/>
+          <a:stretch>
+            <a:fillRect/>
+          </a:stretch>
+        </p:blipFill>
+        <p:spPr bwMode="auto">
+          <a:xfrm>
+            <a:off x="366752" y="2035099"/>
+            <a:ext cx="4040505" cy="2886075"/>
+          </a:xfrm>
+          <a:prstGeom prst="rect">
+            <a:avLst/>
+          </a:prstGeom>
+          <a:noFill/>
+          <a:extLst>
+            <a:ext uri="{909E8E84-426E-40DD-AFC4-6F175D3DCCD1}">
+              <a14:hiddenFill xmlns:a14="http://schemas.microsoft.com/office/drawing/2010/main">
+                <a:solidFill>
+                  <a:srgbClr val="FFFFFF"/>
+                </a:solidFill>
+              </a14:hiddenFill>
+            </a:ext>
+          </a:extLst>
+        </p:spPr>
+      </p:pic>
+      <p:pic>
+        <p:nvPicPr>
+          <p:cNvPr id="1028" name="Picture 4" descr="Backcasts for quarterly retail trade in the Euro area using an ARIMA model."/>
+          <p:cNvPicPr>
+            <a:picLocks noChangeAspect="1" noChangeArrowheads="1"/>
+          </p:cNvPicPr>
+          <p:nvPr/>
+        </p:nvPicPr>
+        <p:blipFill>
+          <a:blip r:embed="rId3">
+            <a:extLst>
+              <a:ext uri="{28A0092B-C50C-407E-A947-70E740481C1C}">
+                <a14:useLocalDpi xmlns:a14="http://schemas.microsoft.com/office/drawing/2010/main" val="0"/>
+              </a:ext>
+            </a:extLst>
+          </a:blip>
+          <a:srcRect/>
+          <a:stretch>
+            <a:fillRect/>
+          </a:stretch>
+        </p:blipFill>
+        <p:spPr bwMode="auto">
+          <a:xfrm>
+            <a:off x="5436781" y="2255215"/>
+            <a:ext cx="3960502" cy="2445845"/>
+          </a:xfrm>
+          <a:prstGeom prst="rect">
+            <a:avLst/>
+          </a:prstGeom>
+          <a:noFill/>
+          <a:extLst>
+            <a:ext uri="{909E8E84-426E-40DD-AFC4-6F175D3DCCD1}">
+              <a14:hiddenFill xmlns:a14="http://schemas.microsoft.com/office/drawing/2010/main">
+                <a:solidFill>
+                  <a:srgbClr val="FFFFFF"/>
+                </a:solidFill>
+              </a14:hiddenFill>
+            </a:ext>
+          </a:extLst>
+        </p:spPr>
+      </p:pic>
+      <p:sp>
+        <p:nvSpPr>
+          <p:cNvPr id="4" name="Стрелка вправо 3"/>
+          <p:cNvSpPr/>
+          <p:nvPr/>
+        </p:nvSpPr>
+        <p:spPr>
+          <a:xfrm>
+            <a:off x="4554908" y="3478138"/>
+            <a:ext cx="529840" cy="317574"/>
+          </a:xfrm>
+          <a:prstGeom prst="rightArrow">
+            <a:avLst/>
+          </a:prstGeom>
+        </p:spPr>
+        <p:style>
+          <a:lnRef idx="2">
+            <a:schemeClr val="accent1">
+              <a:shade val="50000"/>
+            </a:schemeClr>
+          </a:lnRef>
+          <a:fillRef idx="1">
+            <a:schemeClr val="accent1"/>
+          </a:fillRef>
+          <a:effectRef idx="0">
+            <a:schemeClr val="accent1"/>
+          </a:effectRef>
+          <a:fontRef idx="minor">
+            <a:schemeClr val="lt1"/>
+          </a:fontRef>
+        </p:style>
+        <p:txBody>
+          <a:bodyPr rtlCol="0" anchor="ctr"/>
+          <a:lstStyle/>
+          <a:p>
+            <a:pPr algn="ctr"/>
+            <a:endParaRPr lang="ru-RU"/>
+          </a:p>
+        </p:txBody>
+      </p:sp>
+      <p:sp>
+        <p:nvSpPr>
+          <p:cNvPr id="7" name="Объект 2"/>
+          <p:cNvSpPr txBox="1">
+            <a:spLocks/>
+          </p:cNvSpPr>
+          <p:nvPr/>
+        </p:nvSpPr>
+        <p:spPr>
+          <a:xfrm>
+            <a:off x="219101" y="5007835"/>
+            <a:ext cx="11859578" cy="1274703"/>
+          </a:xfrm>
+          <a:prstGeom prst="rect">
+            <a:avLst/>
+          </a:prstGeom>
+        </p:spPr>
+        <p:txBody>
+          <a:bodyPr vert="horz" lIns="91440" tIns="45720" rIns="91440" bIns="45720" rtlCol="0">
+            <a:normAutofit/>
+          </a:bodyPr>
+          <a:lstStyle>
+            <a:lvl1pPr marL="228600" indent="-228600" algn="l" defTabSz="914400" rtl="0" eaLnBrk="1" latinLnBrk="0" hangingPunct="1">
+              <a:lnSpc>
+                <a:spcPct val="90000"/>
+              </a:lnSpc>
+              <a:spcBef>
+                <a:spcPts val="1000"/>
+              </a:spcBef>
+              <a:buFont typeface="Arial" panose="020B0604020202020204" pitchFamily="34" charset="0"/>
+              <a:buChar char="•"/>
+              <a:defRPr sz="2800" kern="1200">
+                <a:solidFill>
+                  <a:schemeClr val="tx1"/>
+                </a:solidFill>
+                <a:latin typeface="+mn-lt"/>
+                <a:ea typeface="+mn-ea"/>
+                <a:cs typeface="+mn-cs"/>
+              </a:defRPr>
+            </a:lvl1pPr>
+            <a:lvl2pPr marL="685800" indent="-228600" algn="l" defTabSz="914400" rtl="0" eaLnBrk="1" latinLnBrk="0" hangingPunct="1">
+              <a:lnSpc>
+                <a:spcPct val="90000"/>
+              </a:lnSpc>
+              <a:spcBef>
+                <a:spcPts val="500"/>
+              </a:spcBef>
+              <a:buFont typeface="Arial" panose="020B0604020202020204" pitchFamily="34" charset="0"/>
+              <a:buChar char="•"/>
+              <a:defRPr sz="2400" kern="1200">
+                <a:solidFill>
+                  <a:schemeClr val="tx1"/>
+                </a:solidFill>
+                <a:latin typeface="+mn-lt"/>
+                <a:ea typeface="+mn-ea"/>
+                <a:cs typeface="+mn-cs"/>
+              </a:defRPr>
+            </a:lvl2pPr>
+            <a:lvl3pPr marL="1143000" indent="-228600" algn="l" defTabSz="914400" rtl="0" eaLnBrk="1" latinLnBrk="0" hangingPunct="1">
+              <a:lnSpc>
+                <a:spcPct val="90000"/>
+              </a:lnSpc>
+              <a:spcBef>
+                <a:spcPts val="500"/>
+              </a:spcBef>
+              <a:buFont typeface="Arial" panose="020B0604020202020204" pitchFamily="34" charset="0"/>
+              <a:buChar char="•"/>
+              <a:defRPr sz="2000" kern="1200">
+                <a:solidFill>
+                  <a:schemeClr val="tx1"/>
+                </a:solidFill>
+                <a:latin typeface="+mn-lt"/>
+                <a:ea typeface="+mn-ea"/>
+                <a:cs typeface="+mn-cs"/>
+              </a:defRPr>
+            </a:lvl3pPr>
+            <a:lvl4pPr marL="1600200" indent="-228600" algn="l" defTabSz="914400" rtl="0" eaLnBrk="1" latinLnBrk="0" hangingPunct="1">
+              <a:lnSpc>
+                <a:spcPct val="90000"/>
+              </a:lnSpc>
+              <a:spcBef>
+                <a:spcPts val="500"/>
+              </a:spcBef>
+              <a:buFont typeface="Arial" panose="020B0604020202020204" pitchFamily="34" charset="0"/>
+              <a:buChar char="•"/>
+              <a:defRPr sz="1800" kern="1200">
+                <a:solidFill>
+                  <a:schemeClr val="tx1"/>
+                </a:solidFill>
+                <a:latin typeface="+mn-lt"/>
+                <a:ea typeface="+mn-ea"/>
+                <a:cs typeface="+mn-cs"/>
+              </a:defRPr>
+            </a:lvl4pPr>
+            <a:lvl5pPr marL="2057400" indent="-228600" algn="l" defTabSz="914400" rtl="0" eaLnBrk="1" latinLnBrk="0" hangingPunct="1">
+              <a:lnSpc>
+                <a:spcPct val="90000"/>
+              </a:lnSpc>
+              <a:spcBef>
+                <a:spcPts val="500"/>
+              </a:spcBef>
+              <a:buFont typeface="Arial" panose="020B0604020202020204" pitchFamily="34" charset="0"/>
+              <a:buChar char="•"/>
+              <a:defRPr sz="1800" kern="1200">
+                <a:solidFill>
+                  <a:schemeClr val="tx1"/>
+                </a:solidFill>
+                <a:latin typeface="+mn-lt"/>
+                <a:ea typeface="+mn-ea"/>
+                <a:cs typeface="+mn-cs"/>
+              </a:defRPr>
+            </a:lvl5pPr>
+            <a:lvl6pPr marL="2514600" indent="-228600" algn="l" defTabSz="914400" rtl="0" eaLnBrk="1" latinLnBrk="0" hangingPunct="1">
+              <a:lnSpc>
+                <a:spcPct val="90000"/>
+              </a:lnSpc>
+              <a:spcBef>
+                <a:spcPts val="500"/>
+              </a:spcBef>
+              <a:buFont typeface="Arial" panose="020B0604020202020204" pitchFamily="34" charset="0"/>
+              <a:buChar char="•"/>
+              <a:defRPr sz="1800" kern="1200">
+                <a:solidFill>
+                  <a:schemeClr val="tx1"/>
+                </a:solidFill>
+                <a:latin typeface="+mn-lt"/>
+                <a:ea typeface="+mn-ea"/>
+                <a:cs typeface="+mn-cs"/>
+              </a:defRPr>
+            </a:lvl6pPr>
+            <a:lvl7pPr marL="2971800" indent="-228600" algn="l" defTabSz="914400" rtl="0" eaLnBrk="1" latinLnBrk="0" hangingPunct="1">
+              <a:lnSpc>
+                <a:spcPct val="90000"/>
+              </a:lnSpc>
+              <a:spcBef>
+                <a:spcPts val="500"/>
+              </a:spcBef>
+              <a:buFont typeface="Arial" panose="020B0604020202020204" pitchFamily="34" charset="0"/>
+              <a:buChar char="•"/>
+              <a:defRPr sz="1800" kern="1200">
+                <a:solidFill>
+                  <a:schemeClr val="tx1"/>
+                </a:solidFill>
+                <a:latin typeface="+mn-lt"/>
+                <a:ea typeface="+mn-ea"/>
+                <a:cs typeface="+mn-cs"/>
+              </a:defRPr>
+            </a:lvl7pPr>
+            <a:lvl8pPr marL="3429000" indent="-228600" algn="l" defTabSz="914400" rtl="0" eaLnBrk="1" latinLnBrk="0" hangingPunct="1">
+              <a:lnSpc>
+                <a:spcPct val="90000"/>
+              </a:lnSpc>
+              <a:spcBef>
+                <a:spcPts val="500"/>
+              </a:spcBef>
+              <a:buFont typeface="Arial" panose="020B0604020202020204" pitchFamily="34" charset="0"/>
+              <a:buChar char="•"/>
+              <a:defRPr sz="1800" kern="1200">
+                <a:solidFill>
+                  <a:schemeClr val="tx1"/>
+                </a:solidFill>
+                <a:latin typeface="+mn-lt"/>
+                <a:ea typeface="+mn-ea"/>
+                <a:cs typeface="+mn-cs"/>
+              </a:defRPr>
+            </a:lvl8pPr>
+            <a:lvl9pPr marL="3886200" indent="-228600" algn="l" defTabSz="914400" rtl="0" eaLnBrk="1" latinLnBrk="0" hangingPunct="1">
+              <a:lnSpc>
+                <a:spcPct val="90000"/>
+              </a:lnSpc>
+              <a:spcBef>
+                <a:spcPts val="500"/>
+              </a:spcBef>
+              <a:buFont typeface="Arial" panose="020B0604020202020204" pitchFamily="34" charset="0"/>
+              <a:buChar char="•"/>
+              <a:defRPr sz="1800" kern="1200">
+                <a:solidFill>
+                  <a:schemeClr val="tx1"/>
+                </a:solidFill>
+                <a:latin typeface="+mn-lt"/>
+                <a:ea typeface="+mn-ea"/>
+                <a:cs typeface="+mn-cs"/>
+              </a:defRPr>
+            </a:lvl9pPr>
+          </a:lstStyle>
+          <a:p>
+            <a:pPr marL="0" indent="0">
+              <a:buFont typeface="Arial" panose="020B0604020202020204" pitchFamily="34" charset="0"/>
+              <a:buNone/>
+            </a:pPr>
+            <a:r>
+              <a:rPr lang="ru-RU" sz="2200" dirty="0" smtClean="0"/>
+              <a:t>Ретроспективный анализ будет работать если паттерны поведения остаются прежними!</a:t>
+            </a:r>
+          </a:p>
+          <a:p>
+            <a:pPr marL="0" indent="0">
+              <a:buFont typeface="Arial" panose="020B0604020202020204" pitchFamily="34" charset="0"/>
+              <a:buNone/>
+            </a:pPr>
+            <a:r>
+              <a:rPr lang="ru-RU" sz="2200" dirty="0" smtClean="0"/>
+              <a:t> </a:t>
+            </a:r>
+            <a:endParaRPr lang="ru-RU" sz="2200" dirty="0"/>
+          </a:p>
+        </p:txBody>
+      </p:sp>
+    </p:spTree>
+    <p:extLst>
+      <p:ext uri="{BB962C8B-B14F-4D97-AF65-F5344CB8AC3E}">
+        <p14:creationId xmlns:p14="http://schemas.microsoft.com/office/powerpoint/2010/main" val="3245342670"/>
+      </p:ext>
+    </p:extLst>
+  </p:cSld>
+  <p:clrMapOvr>
+    <a:masterClrMapping/>
+  </p:clrMapOvr>
+</p:sld>
+</file>
+
+<file path=ppt/slides/slide13.xml><?xml version="1.0" encoding="utf-8"?>
+<p:sld xmlns:a="http://schemas.openxmlformats.org/drawingml/2006/main" xmlns:r="http://schemas.openxmlformats.org/officeDocument/2006/relationships" xmlns:p="http://schemas.openxmlformats.org/presentationml/2006/main">
+  <p:cSld>
+    <p:spTree>
+      <p:nvGrpSpPr>
+        <p:cNvPr id="1" name=""/>
+        <p:cNvGrpSpPr/>
+        <p:nvPr/>
+      </p:nvGrpSpPr>
+      <p:grpSpPr>
+        <a:xfrm>
+          <a:off x="0" y="0"/>
+          <a:ext cx="0" cy="0"/>
+          <a:chOff x="0" y="0"/>
+          <a:chExt cx="0" cy="0"/>
+        </a:xfrm>
+      </p:grpSpPr>
+      <p:sp>
+        <p:nvSpPr>
+          <p:cNvPr id="2" name="Заголовок 1"/>
+          <p:cNvSpPr>
+            <a:spLocks noGrp="1"/>
+          </p:cNvSpPr>
+          <p:nvPr>
+            <p:ph type="title"/>
+          </p:nvPr>
+        </p:nvSpPr>
+        <p:spPr>
+          <a:xfrm>
             <a:off x="216152" y="120038"/>
             <a:ext cx="10991850" cy="635000"/>
           </a:xfrm>
@@ -4755,7 +5203,7 @@
 </p:sld>
 </file>
 
-<file path=ppt/slides/slide13.xml><?xml version="1.0" encoding="utf-8"?>
+<file path=ppt/slides/slide14.xml><?xml version="1.0" encoding="utf-8"?>
 <p:sld xmlns:a="http://schemas.openxmlformats.org/drawingml/2006/main" xmlns:r="http://schemas.openxmlformats.org/officeDocument/2006/relationships" xmlns:p="http://schemas.openxmlformats.org/presentationml/2006/main">
   <p:cSld>
     <p:spTree>
@@ -5191,7 +5639,7 @@
 </p:sld>
 </file>
 
-<file path=ppt/slides/slide14.xml><?xml version="1.0" encoding="utf-8"?>
+<file path=ppt/slides/slide15.xml><?xml version="1.0" encoding="utf-8"?>
 <p:sld xmlns:a="http://schemas.openxmlformats.org/drawingml/2006/main" xmlns:r="http://schemas.openxmlformats.org/officeDocument/2006/relationships" xmlns:p="http://schemas.openxmlformats.org/presentationml/2006/main">
   <p:cSld>
     <p:spTree>
@@ -5742,7 +6190,7 @@
 </p:sld>
 </file>
 
-<file path=ppt/slides/slide15.xml><?xml version="1.0" encoding="utf-8"?>
+<file path=ppt/slides/slide16.xml><?xml version="1.0" encoding="utf-8"?>
 <p:sld xmlns:a="http://schemas.openxmlformats.org/drawingml/2006/main" xmlns:r="http://schemas.openxmlformats.org/officeDocument/2006/relationships" xmlns:p="http://schemas.openxmlformats.org/presentationml/2006/main">
   <p:cSld>
     <p:spTree>
@@ -6512,7 +6960,7 @@
 </p:sld>
 </file>
 
-<file path=ppt/slides/slide16.xml><?xml version="1.0" encoding="utf-8"?>
+<file path=ppt/slides/slide17.xml><?xml version="1.0" encoding="utf-8"?>
 <p:sld xmlns:a="http://schemas.openxmlformats.org/drawingml/2006/main" xmlns:r="http://schemas.openxmlformats.org/officeDocument/2006/relationships" xmlns:p="http://schemas.openxmlformats.org/presentationml/2006/main">
   <p:cSld>
     <p:spTree>
@@ -7068,7 +7516,7 @@
 </p:sld>
 </file>
 
-<file path=ppt/slides/slide17.xml><?xml version="1.0" encoding="utf-8"?>
+<file path=ppt/slides/slide18.xml><?xml version="1.0" encoding="utf-8"?>
 <p:sld xmlns:a="http://schemas.openxmlformats.org/drawingml/2006/main" xmlns:r="http://schemas.openxmlformats.org/officeDocument/2006/relationships" xmlns:p="http://schemas.openxmlformats.org/presentationml/2006/main">
   <p:cSld>
     <p:spTree>
@@ -8413,7 +8861,7 @@
                                   </a:solidFill>
                                   <a:latin typeface="Cambria Math" panose="02040503050406030204" pitchFamily="18" charset="0"/>
                                 </a:rPr>
-                                <m:t> −норм</m:t>
+                                <m:t> −нормир</m:t>
                               </m:r>
                               <m:r>
                                 <a:rPr lang="ru-RU" sz="1900" dirty="0">
@@ -8422,7 +8870,7 @@
                                   </a:solidFill>
                                   <a:latin typeface="Cambria Math" panose="02040503050406030204" pitchFamily="18" charset="0"/>
                                 </a:rPr>
-                                <m:t>ированная ширина интервала</m:t>
+                                <m:t>ованная ширина интервала</m:t>
                               </m:r>
                             </m:oMath>
                           </a14:m>
@@ -10349,7 +10797,7 @@
 </p:sld>
 </file>
 
-<file path=ppt/slides/slide18.xml><?xml version="1.0" encoding="utf-8"?>
+<file path=ppt/slides/slide19.xml><?xml version="1.0" encoding="utf-8"?>
 <p:sld xmlns:a="http://schemas.openxmlformats.org/drawingml/2006/main" xmlns:r="http://schemas.openxmlformats.org/officeDocument/2006/relationships" xmlns:p="http://schemas.openxmlformats.org/presentationml/2006/main">
   <p:cSld>
     <p:spTree>
@@ -13804,7 +14252,525 @@
 </p:sld>
 </file>
 
-<file path=ppt/slides/slide19.xml><?xml version="1.0" encoding="utf-8"?>
+<file path=ppt/slides/slide2.xml><?xml version="1.0" encoding="utf-8"?>
+<p:sld xmlns:a="http://schemas.openxmlformats.org/drawingml/2006/main" xmlns:r="http://schemas.openxmlformats.org/officeDocument/2006/relationships" xmlns:p="http://schemas.openxmlformats.org/presentationml/2006/main">
+  <p:cSld>
+    <p:spTree>
+      <p:nvGrpSpPr>
+        <p:cNvPr id="1" name=""/>
+        <p:cNvGrpSpPr/>
+        <p:nvPr/>
+      </p:nvGrpSpPr>
+      <p:grpSpPr>
+        <a:xfrm>
+          <a:off x="0" y="0"/>
+          <a:ext cx="0" cy="0"/>
+          <a:chOff x="0" y="0"/>
+          <a:chExt cx="0" cy="0"/>
+        </a:xfrm>
+      </p:grpSpPr>
+      <p:sp>
+        <p:nvSpPr>
+          <p:cNvPr id="2" name="Заголовок 1"/>
+          <p:cNvSpPr>
+            <a:spLocks noGrp="1"/>
+          </p:cNvSpPr>
+          <p:nvPr>
+            <p:ph type="title"/>
+          </p:nvPr>
+        </p:nvSpPr>
+        <p:spPr>
+          <a:xfrm>
+            <a:off x="171450" y="161925"/>
+            <a:ext cx="11403106" cy="660827"/>
+          </a:xfrm>
+        </p:spPr>
+        <p:txBody>
+          <a:bodyPr>
+            <a:normAutofit fontScale="90000"/>
+          </a:bodyPr>
+          <a:lstStyle/>
+          <a:p>
+            <a:r>
+              <a:rPr lang="ru-RU" dirty="0"/>
+              <a:t>Надёжность предсказания временных рядов</a:t>
+            </a:r>
+          </a:p>
+        </p:txBody>
+      </p:sp>
+      <mc:AlternateContent xmlns:mc="http://schemas.openxmlformats.org/markup-compatibility/2006" xmlns:a14="http://schemas.microsoft.com/office/drawing/2010/main">
+        <mc:Choice Requires="a14">
+          <p:sp>
+            <p:nvSpPr>
+              <p:cNvPr id="3" name="Объект 2"/>
+              <p:cNvSpPr>
+                <a:spLocks noGrp="1"/>
+              </p:cNvSpPr>
+              <p:nvPr>
+                <p:ph idx="1"/>
+              </p:nvPr>
+            </p:nvSpPr>
+            <p:spPr>
+              <a:xfrm>
+                <a:off x="171450" y="822752"/>
+                <a:ext cx="11733519" cy="5780955"/>
+              </a:xfrm>
+            </p:spPr>
+            <p:txBody>
+              <a:bodyPr>
+                <a:normAutofit/>
+              </a:bodyPr>
+              <a:lstStyle/>
+              <a:p>
+                <a:pPr marL="0" indent="0">
+                  <a:buNone/>
+                </a:pPr>
+                <a:r>
+                  <a:rPr lang="ru-RU" sz="2400" b="1" dirty="0"/>
+                  <a:t>Надёжность предсказания временных рядов </a:t>
+                </a:r>
+                <a:r>
+                  <a:rPr lang="ru-RU" sz="2400" dirty="0"/>
+                  <a:t>— это мера, характеризующая степень уверенности в том, что реальное будущее значение временного ряда окажется в достаточно близко к предсезонному значению.</a:t>
+                </a:r>
+              </a:p>
+              <a:p>
+                <a:pPr marL="0" indent="0">
+                  <a:buNone/>
+                </a:pPr>
+                <a:r>
+                  <a:rPr lang="ru-RU" sz="2400" dirty="0"/>
+                  <a:t>	То есть в интервале </a:t>
+                </a:r>
+                <a:r>
+                  <a:rPr lang="ru-RU" sz="2400" dirty="0" err="1"/>
+                  <a:t>отн</a:t>
+                </a:r>
+                <a:r>
+                  <a:rPr lang="ru-RU" sz="2400" dirty="0"/>
+                  <a:t>. Средней оценке </a:t>
+                </a:r>
+                <a14:m>
+                  <m:oMath xmlns:m="http://schemas.openxmlformats.org/officeDocument/2006/math">
+                    <m:sSub>
+                      <m:sSubPr>
+                        <m:ctrlPr>
+                          <a:rPr lang="en-US" sz="2400" b="0" i="1" smtClean="0">
+                            <a:latin typeface="Cambria Math" panose="02040503050406030204" pitchFamily="18" charset="0"/>
+                          </a:rPr>
+                        </m:ctrlPr>
+                      </m:sSubPr>
+                      <m:e>
+                        <m:r>
+                          <a:rPr lang="en-US" sz="2400" b="0" i="1" smtClean="0">
+                            <a:latin typeface="Cambria Math" panose="02040503050406030204" pitchFamily="18" charset="0"/>
+                          </a:rPr>
+                          <m:t>𝑦</m:t>
+                        </m:r>
+                      </m:e>
+                      <m:sub>
+                        <m:r>
+                          <a:rPr lang="en-US" sz="2400" b="0" i="1" smtClean="0">
+                            <a:latin typeface="Cambria Math" panose="02040503050406030204" pitchFamily="18" charset="0"/>
+                          </a:rPr>
+                          <m:t>𝑇</m:t>
+                        </m:r>
+                      </m:sub>
+                    </m:sSub>
+                    <m:r>
+                      <a:rPr lang="en-US" sz="2400" b="0" i="1" smtClean="0">
+                        <a:latin typeface="Cambria Math" panose="02040503050406030204" pitchFamily="18" charset="0"/>
+                      </a:rPr>
+                      <m:t>∈[</m:t>
+                    </m:r>
+                    <m:sSub>
+                      <m:sSubPr>
+                        <m:ctrlPr>
+                          <a:rPr lang="en-US" sz="2400" b="0" i="1" smtClean="0">
+                            <a:latin typeface="Cambria Math" panose="02040503050406030204" pitchFamily="18" charset="0"/>
+                          </a:rPr>
+                        </m:ctrlPr>
+                      </m:sSubPr>
+                      <m:e>
+                        <m:sSub>
+                          <m:sSubPr>
+                            <m:ctrlPr>
+                              <a:rPr lang="en-US" sz="2400" i="1">
+                                <a:latin typeface="Cambria Math" panose="02040503050406030204" pitchFamily="18" charset="0"/>
+                              </a:rPr>
+                            </m:ctrlPr>
+                          </m:sSubPr>
+                          <m:e>
+                            <m:acc>
+                              <m:accPr>
+                                <m:chr m:val="̂"/>
+                                <m:ctrlPr>
+                                  <a:rPr lang="en-US" sz="2400" i="1">
+                                    <a:latin typeface="Cambria Math" panose="02040503050406030204" pitchFamily="18" charset="0"/>
+                                  </a:rPr>
+                                </m:ctrlPr>
+                              </m:accPr>
+                              <m:e>
+                                <m:r>
+                                  <a:rPr lang="en-US" sz="2400" i="1">
+                                    <a:latin typeface="Cambria Math" panose="02040503050406030204" pitchFamily="18" charset="0"/>
+                                  </a:rPr>
+                                  <m:t>𝑦</m:t>
+                                </m:r>
+                              </m:e>
+                            </m:acc>
+                          </m:e>
+                          <m:sub>
+                            <m:r>
+                              <a:rPr lang="en-US" sz="2400" i="1">
+                                <a:latin typeface="Cambria Math" panose="02040503050406030204" pitchFamily="18" charset="0"/>
+                              </a:rPr>
+                              <m:t>𝑇</m:t>
+                            </m:r>
+                          </m:sub>
+                        </m:sSub>
+                      </m:e>
+                      <m:sub>
+                        <m:r>
+                          <a:rPr lang="en-US" sz="2400" b="0" i="1" smtClean="0">
+                            <a:latin typeface="Cambria Math" panose="02040503050406030204" pitchFamily="18" charset="0"/>
+                          </a:rPr>
+                          <m:t>𝑙𝑜𝑤</m:t>
+                        </m:r>
+                      </m:sub>
+                    </m:sSub>
+                    <m:r>
+                      <a:rPr lang="en-US" sz="2400" b="0" i="1" smtClean="0">
+                        <a:latin typeface="Cambria Math" panose="02040503050406030204" pitchFamily="18" charset="0"/>
+                      </a:rPr>
+                      <m:t>,</m:t>
+                    </m:r>
+                    <m:sSub>
+                      <m:sSubPr>
+                        <m:ctrlPr>
+                          <a:rPr lang="en-US" sz="2400" i="1">
+                            <a:latin typeface="Cambria Math" panose="02040503050406030204" pitchFamily="18" charset="0"/>
+                          </a:rPr>
+                        </m:ctrlPr>
+                      </m:sSubPr>
+                      <m:e>
+                        <m:sSub>
+                          <m:sSubPr>
+                            <m:ctrlPr>
+                              <a:rPr lang="en-US" sz="2400" i="1">
+                                <a:latin typeface="Cambria Math" panose="02040503050406030204" pitchFamily="18" charset="0"/>
+                              </a:rPr>
+                            </m:ctrlPr>
+                          </m:sSubPr>
+                          <m:e>
+                            <m:acc>
+                              <m:accPr>
+                                <m:chr m:val="̂"/>
+                                <m:ctrlPr>
+                                  <a:rPr lang="en-US" sz="2400" i="1">
+                                    <a:latin typeface="Cambria Math" panose="02040503050406030204" pitchFamily="18" charset="0"/>
+                                  </a:rPr>
+                                </m:ctrlPr>
+                              </m:accPr>
+                              <m:e>
+                                <m:r>
+                                  <a:rPr lang="en-US" sz="2400" i="1">
+                                    <a:latin typeface="Cambria Math" panose="02040503050406030204" pitchFamily="18" charset="0"/>
+                                  </a:rPr>
+                                  <m:t>𝑦</m:t>
+                                </m:r>
+                              </m:e>
+                            </m:acc>
+                          </m:e>
+                          <m:sub>
+                            <m:r>
+                              <a:rPr lang="en-US" sz="2400" i="1">
+                                <a:latin typeface="Cambria Math" panose="02040503050406030204" pitchFamily="18" charset="0"/>
+                              </a:rPr>
+                              <m:t>𝑇</m:t>
+                            </m:r>
+                          </m:sub>
+                        </m:sSub>
+                      </m:e>
+                      <m:sub>
+                        <m:r>
+                          <a:rPr lang="en-US" sz="2400" b="0" i="1" smtClean="0">
+                            <a:latin typeface="Cambria Math" panose="02040503050406030204" pitchFamily="18" charset="0"/>
+                          </a:rPr>
+                          <m:t>h𝑖𝑔h</m:t>
+                        </m:r>
+                      </m:sub>
+                    </m:sSub>
+                    <m:r>
+                      <a:rPr lang="en-US" sz="2400" b="0" i="1" smtClean="0">
+                        <a:latin typeface="Cambria Math" panose="02040503050406030204" pitchFamily="18" charset="0"/>
+                      </a:rPr>
+                      <m:t>]</m:t>
+                    </m:r>
+                  </m:oMath>
+                </a14:m>
+                <a:endParaRPr lang="ru-RU" sz="2400" dirty="0"/>
+              </a:p>
+              <a:p>
+                <a:pPr marL="0" indent="0">
+                  <a:buNone/>
+                </a:pPr>
+                <a:r>
+                  <a:rPr lang="ru-RU" sz="2400" dirty="0"/>
+                  <a:t>		где </a:t>
+                </a:r>
+                <a14:m>
+                  <m:oMath xmlns:m="http://schemas.openxmlformats.org/officeDocument/2006/math">
+                    <m:sSub>
+                      <m:sSubPr>
+                        <m:ctrlPr>
+                          <a:rPr lang="en-US" sz="2400" i="1">
+                            <a:latin typeface="Cambria Math" panose="02040503050406030204" pitchFamily="18" charset="0"/>
+                          </a:rPr>
+                        </m:ctrlPr>
+                      </m:sSubPr>
+                      <m:e>
+                        <m:sSub>
+                          <m:sSubPr>
+                            <m:ctrlPr>
+                              <a:rPr lang="en-US" sz="2400" i="1">
+                                <a:latin typeface="Cambria Math" panose="02040503050406030204" pitchFamily="18" charset="0"/>
+                              </a:rPr>
+                            </m:ctrlPr>
+                          </m:sSubPr>
+                          <m:e>
+                            <m:acc>
+                              <m:accPr>
+                                <m:chr m:val="̂"/>
+                                <m:ctrlPr>
+                                  <a:rPr lang="en-US" sz="2400" i="1">
+                                    <a:latin typeface="Cambria Math" panose="02040503050406030204" pitchFamily="18" charset="0"/>
+                                  </a:rPr>
+                                </m:ctrlPr>
+                              </m:accPr>
+                              <m:e>
+                                <m:r>
+                                  <a:rPr lang="en-US" sz="2400" i="1">
+                                    <a:latin typeface="Cambria Math" panose="02040503050406030204" pitchFamily="18" charset="0"/>
+                                  </a:rPr>
+                                  <m:t>𝑦</m:t>
+                                </m:r>
+                              </m:e>
+                            </m:acc>
+                          </m:e>
+                          <m:sub>
+                            <m:r>
+                              <a:rPr lang="en-US" sz="2400" i="1">
+                                <a:latin typeface="Cambria Math" panose="02040503050406030204" pitchFamily="18" charset="0"/>
+                              </a:rPr>
+                              <m:t>𝑇</m:t>
+                            </m:r>
+                          </m:sub>
+                        </m:sSub>
+                      </m:e>
+                      <m:sub>
+                        <m:r>
+                          <a:rPr lang="en-US" sz="2400" i="1">
+                            <a:latin typeface="Cambria Math" panose="02040503050406030204" pitchFamily="18" charset="0"/>
+                          </a:rPr>
+                          <m:t>𝑙𝑜𝑤</m:t>
+                        </m:r>
+                      </m:sub>
+                    </m:sSub>
+                    <m:r>
+                      <a:rPr lang="en-US" sz="2400" i="1">
+                        <a:latin typeface="Cambria Math" panose="02040503050406030204" pitchFamily="18" charset="0"/>
+                      </a:rPr>
+                      <m:t>,</m:t>
+                    </m:r>
+                    <m:sSub>
+                      <m:sSubPr>
+                        <m:ctrlPr>
+                          <a:rPr lang="en-US" sz="2400" i="1">
+                            <a:latin typeface="Cambria Math" panose="02040503050406030204" pitchFamily="18" charset="0"/>
+                          </a:rPr>
+                        </m:ctrlPr>
+                      </m:sSubPr>
+                      <m:e>
+                        <m:sSub>
+                          <m:sSubPr>
+                            <m:ctrlPr>
+                              <a:rPr lang="en-US" sz="2400" i="1">
+                                <a:latin typeface="Cambria Math" panose="02040503050406030204" pitchFamily="18" charset="0"/>
+                              </a:rPr>
+                            </m:ctrlPr>
+                          </m:sSubPr>
+                          <m:e>
+                            <m:acc>
+                              <m:accPr>
+                                <m:chr m:val="̂"/>
+                                <m:ctrlPr>
+                                  <a:rPr lang="en-US" sz="2400" i="1">
+                                    <a:latin typeface="Cambria Math" panose="02040503050406030204" pitchFamily="18" charset="0"/>
+                                  </a:rPr>
+                                </m:ctrlPr>
+                              </m:accPr>
+                              <m:e>
+                                <m:r>
+                                  <a:rPr lang="en-US" sz="2400" i="1">
+                                    <a:latin typeface="Cambria Math" panose="02040503050406030204" pitchFamily="18" charset="0"/>
+                                  </a:rPr>
+                                  <m:t>𝑦</m:t>
+                                </m:r>
+                              </m:e>
+                            </m:acc>
+                          </m:e>
+                          <m:sub>
+                            <m:r>
+                              <a:rPr lang="en-US" sz="2400" i="1">
+                                <a:latin typeface="Cambria Math" panose="02040503050406030204" pitchFamily="18" charset="0"/>
+                              </a:rPr>
+                              <m:t>𝑇</m:t>
+                            </m:r>
+                          </m:sub>
+                        </m:sSub>
+                      </m:e>
+                      <m:sub>
+                        <m:r>
+                          <a:rPr lang="en-US" sz="2400" i="1">
+                            <a:latin typeface="Cambria Math" panose="02040503050406030204" pitchFamily="18" charset="0"/>
+                          </a:rPr>
+                          <m:t>h𝑖𝑔h</m:t>
+                        </m:r>
+                      </m:sub>
+                    </m:sSub>
+                  </m:oMath>
+                </a14:m>
+                <a:r>
+                  <a:rPr lang="ru-RU" sz="2400" dirty="0"/>
+                  <a:t> - оценки нижней и верхней границ интервала.</a:t>
+                </a:r>
+              </a:p>
+              <a:p>
+                <a:pPr marL="0" indent="0">
+                  <a:buNone/>
+                </a:pPr>
+                <a:r>
+                  <a:rPr lang="ru-RU" sz="2400" b="1" dirty="0"/>
+                  <a:t>Прогнозы всегда содержат неопределенность. </a:t>
+                </a:r>
+                <a:r>
+                  <a:rPr lang="ru-RU" sz="2400" dirty="0"/>
+                  <a:t>Надежный прогноз позволяет:</a:t>
+                </a:r>
+              </a:p>
+              <a:p>
+                <a:pPr lvl="1"/>
+                <a:r>
+                  <a:rPr lang="ru-RU" dirty="0"/>
+                  <a:t>Управлять рисками</a:t>
+                </a:r>
+              </a:p>
+              <a:p>
+                <a:pPr lvl="2"/>
+                <a:r>
+                  <a:rPr lang="ru-RU" dirty="0"/>
+                  <a:t>Пример: прогноз энергопотребления с учетом возможного пика</a:t>
+                </a:r>
+              </a:p>
+              <a:p>
+                <a:pPr lvl="1"/>
+                <a:r>
+                  <a:rPr lang="ru-RU" dirty="0"/>
+                  <a:t>Планировать сценарии развития</a:t>
+                </a:r>
+              </a:p>
+              <a:p>
+                <a:pPr lvl="2"/>
+                <a:r>
+                  <a:rPr lang="ru-RU" dirty="0"/>
+                  <a:t>Пример: управление запасами на складе</a:t>
+                </a:r>
+              </a:p>
+              <a:p>
+                <a:pPr lvl="1"/>
+                <a:r>
+                  <a:rPr lang="ru-RU" dirty="0"/>
+                  <a:t>Повышать доверие к модели</a:t>
+                </a:r>
+              </a:p>
+              <a:p>
+                <a:pPr lvl="2"/>
+                <a:r>
+                  <a:rPr lang="ru-RU" dirty="0"/>
+                  <a:t>Пример: выбор между моделью с высокой точностью (низкое </a:t>
+                </a:r>
+                <a:r>
+                  <a:rPr lang="ru-RU" dirty="0" err="1"/>
+                  <a:t>смещние</a:t>
+                </a:r>
+                <a:r>
+                  <a:rPr lang="ru-RU" dirty="0"/>
+                  <a:t>) и высоким разбросом и наоборот</a:t>
+                </a:r>
+              </a:p>
+              <a:p>
+                <a:pPr lvl="2"/>
+                <a:endParaRPr lang="ru-RU" dirty="0"/>
+              </a:p>
+              <a:p>
+                <a:endParaRPr lang="ru-RU" dirty="0"/>
+              </a:p>
+            </p:txBody>
+          </p:sp>
+        </mc:Choice>
+        <mc:Fallback xmlns="">
+          <p:sp>
+            <p:nvSpPr>
+              <p:cNvPr id="3" name="Объект 2"/>
+              <p:cNvSpPr>
+                <a:spLocks noGrp="1" noRot="1" noChangeAspect="1" noMove="1" noResize="1" noEditPoints="1" noAdjustHandles="1" noChangeArrowheads="1" noChangeShapeType="1" noTextEdit="1"/>
+              </p:cNvSpPr>
+              <p:nvPr>
+                <p:ph idx="1"/>
+              </p:nvPr>
+            </p:nvSpPr>
+            <p:spPr>
+              <a:xfrm>
+                <a:off x="171450" y="822752"/>
+                <a:ext cx="11733519" cy="5780955"/>
+              </a:xfrm>
+              <a:blipFill>
+                <a:blip r:embed="rId2"/>
+                <a:stretch>
+                  <a:fillRect l="-779" t="-1477" r="-104"/>
+                </a:stretch>
+              </a:blipFill>
+            </p:spPr>
+            <p:txBody>
+              <a:bodyPr/>
+              <a:lstStyle/>
+              <a:p>
+                <a:r>
+                  <a:rPr lang="ru-RU">
+                    <a:noFill/>
+                  </a:rPr>
+                  <a:t> </a:t>
+                </a:r>
+              </a:p>
+            </p:txBody>
+          </p:sp>
+        </mc:Fallback>
+      </mc:AlternateContent>
+    </p:spTree>
+    <p:extLst>
+      <p:ext uri="{BB962C8B-B14F-4D97-AF65-F5344CB8AC3E}">
+        <p14:creationId xmlns:p14="http://schemas.microsoft.com/office/powerpoint/2010/main" val="1104299574"/>
+      </p:ext>
+    </p:extLst>
+  </p:cSld>
+  <p:clrMapOvr>
+    <a:masterClrMapping/>
+  </p:clrMapOvr>
+</p:sld>
+</file>
+
+<file path=ppt/slides/slide20.xml><?xml version="1.0" encoding="utf-8"?>
 <p:sld xmlns:a="http://schemas.openxmlformats.org/drawingml/2006/main" xmlns:r="http://schemas.openxmlformats.org/officeDocument/2006/relationships" xmlns:p="http://schemas.openxmlformats.org/presentationml/2006/main">
   <p:cSld>
     <p:spTree>
@@ -14542,525 +15508,7 @@
 </p:sld>
 </file>
 
-<file path=ppt/slides/slide2.xml><?xml version="1.0" encoding="utf-8"?>
-<p:sld xmlns:a="http://schemas.openxmlformats.org/drawingml/2006/main" xmlns:r="http://schemas.openxmlformats.org/officeDocument/2006/relationships" xmlns:p="http://schemas.openxmlformats.org/presentationml/2006/main">
-  <p:cSld>
-    <p:spTree>
-      <p:nvGrpSpPr>
-        <p:cNvPr id="1" name=""/>
-        <p:cNvGrpSpPr/>
-        <p:nvPr/>
-      </p:nvGrpSpPr>
-      <p:grpSpPr>
-        <a:xfrm>
-          <a:off x="0" y="0"/>
-          <a:ext cx="0" cy="0"/>
-          <a:chOff x="0" y="0"/>
-          <a:chExt cx="0" cy="0"/>
-        </a:xfrm>
-      </p:grpSpPr>
-      <p:sp>
-        <p:nvSpPr>
-          <p:cNvPr id="2" name="Заголовок 1"/>
-          <p:cNvSpPr>
-            <a:spLocks noGrp="1"/>
-          </p:cNvSpPr>
-          <p:nvPr>
-            <p:ph type="title"/>
-          </p:nvPr>
-        </p:nvSpPr>
-        <p:spPr>
-          <a:xfrm>
-            <a:off x="171450" y="161925"/>
-            <a:ext cx="11403106" cy="660827"/>
-          </a:xfrm>
-        </p:spPr>
-        <p:txBody>
-          <a:bodyPr>
-            <a:normAutofit fontScale="90000"/>
-          </a:bodyPr>
-          <a:lstStyle/>
-          <a:p>
-            <a:r>
-              <a:rPr lang="ru-RU" dirty="0"/>
-              <a:t>Надёжность предсказания временных рядов</a:t>
-            </a:r>
-          </a:p>
-        </p:txBody>
-      </p:sp>
-      <mc:AlternateContent xmlns:mc="http://schemas.openxmlformats.org/markup-compatibility/2006" xmlns:a14="http://schemas.microsoft.com/office/drawing/2010/main">
-        <mc:Choice Requires="a14">
-          <p:sp>
-            <p:nvSpPr>
-              <p:cNvPr id="3" name="Объект 2"/>
-              <p:cNvSpPr>
-                <a:spLocks noGrp="1"/>
-              </p:cNvSpPr>
-              <p:nvPr>
-                <p:ph idx="1"/>
-              </p:nvPr>
-            </p:nvSpPr>
-            <p:spPr>
-              <a:xfrm>
-                <a:off x="171450" y="822752"/>
-                <a:ext cx="11733519" cy="5780955"/>
-              </a:xfrm>
-            </p:spPr>
-            <p:txBody>
-              <a:bodyPr>
-                <a:normAutofit/>
-              </a:bodyPr>
-              <a:lstStyle/>
-              <a:p>
-                <a:pPr marL="0" indent="0">
-                  <a:buNone/>
-                </a:pPr>
-                <a:r>
-                  <a:rPr lang="ru-RU" sz="2400" b="1" dirty="0"/>
-                  <a:t>Надёжность предсказания временных рядов </a:t>
-                </a:r>
-                <a:r>
-                  <a:rPr lang="ru-RU" sz="2400" dirty="0"/>
-                  <a:t>— это мера, характеризующая степень уверенности в том, что реальное будущее значение временного ряда окажется в достаточно близко к предсезонному значению.</a:t>
-                </a:r>
-              </a:p>
-              <a:p>
-                <a:pPr marL="0" indent="0">
-                  <a:buNone/>
-                </a:pPr>
-                <a:r>
-                  <a:rPr lang="ru-RU" sz="2400" dirty="0"/>
-                  <a:t>	То есть в интервале </a:t>
-                </a:r>
-                <a:r>
-                  <a:rPr lang="ru-RU" sz="2400" dirty="0" err="1"/>
-                  <a:t>отн</a:t>
-                </a:r>
-                <a:r>
-                  <a:rPr lang="ru-RU" sz="2400" dirty="0"/>
-                  <a:t>. Средней оценке </a:t>
-                </a:r>
-                <a14:m>
-                  <m:oMath xmlns:m="http://schemas.openxmlformats.org/officeDocument/2006/math">
-                    <m:sSub>
-                      <m:sSubPr>
-                        <m:ctrlPr>
-                          <a:rPr lang="en-US" sz="2400" b="0" i="1" smtClean="0">
-                            <a:latin typeface="Cambria Math" panose="02040503050406030204" pitchFamily="18" charset="0"/>
-                          </a:rPr>
-                        </m:ctrlPr>
-                      </m:sSubPr>
-                      <m:e>
-                        <m:r>
-                          <a:rPr lang="en-US" sz="2400" b="0" i="1" smtClean="0">
-                            <a:latin typeface="Cambria Math" panose="02040503050406030204" pitchFamily="18" charset="0"/>
-                          </a:rPr>
-                          <m:t>𝑦</m:t>
-                        </m:r>
-                      </m:e>
-                      <m:sub>
-                        <m:r>
-                          <a:rPr lang="en-US" sz="2400" b="0" i="1" smtClean="0">
-                            <a:latin typeface="Cambria Math" panose="02040503050406030204" pitchFamily="18" charset="0"/>
-                          </a:rPr>
-                          <m:t>𝑇</m:t>
-                        </m:r>
-                      </m:sub>
-                    </m:sSub>
-                    <m:r>
-                      <a:rPr lang="en-US" sz="2400" b="0" i="1" smtClean="0">
-                        <a:latin typeface="Cambria Math" panose="02040503050406030204" pitchFamily="18" charset="0"/>
-                      </a:rPr>
-                      <m:t>∈[</m:t>
-                    </m:r>
-                    <m:sSub>
-                      <m:sSubPr>
-                        <m:ctrlPr>
-                          <a:rPr lang="en-US" sz="2400" b="0" i="1" smtClean="0">
-                            <a:latin typeface="Cambria Math" panose="02040503050406030204" pitchFamily="18" charset="0"/>
-                          </a:rPr>
-                        </m:ctrlPr>
-                      </m:sSubPr>
-                      <m:e>
-                        <m:sSub>
-                          <m:sSubPr>
-                            <m:ctrlPr>
-                              <a:rPr lang="en-US" sz="2400" i="1">
-                                <a:latin typeface="Cambria Math" panose="02040503050406030204" pitchFamily="18" charset="0"/>
-                              </a:rPr>
-                            </m:ctrlPr>
-                          </m:sSubPr>
-                          <m:e>
-                            <m:acc>
-                              <m:accPr>
-                                <m:chr m:val="̂"/>
-                                <m:ctrlPr>
-                                  <a:rPr lang="en-US" sz="2400" i="1">
-                                    <a:latin typeface="Cambria Math" panose="02040503050406030204" pitchFamily="18" charset="0"/>
-                                  </a:rPr>
-                                </m:ctrlPr>
-                              </m:accPr>
-                              <m:e>
-                                <m:r>
-                                  <a:rPr lang="en-US" sz="2400" i="1">
-                                    <a:latin typeface="Cambria Math" panose="02040503050406030204" pitchFamily="18" charset="0"/>
-                                  </a:rPr>
-                                  <m:t>𝑦</m:t>
-                                </m:r>
-                              </m:e>
-                            </m:acc>
-                          </m:e>
-                          <m:sub>
-                            <m:r>
-                              <a:rPr lang="en-US" sz="2400" i="1">
-                                <a:latin typeface="Cambria Math" panose="02040503050406030204" pitchFamily="18" charset="0"/>
-                              </a:rPr>
-                              <m:t>𝑇</m:t>
-                            </m:r>
-                          </m:sub>
-                        </m:sSub>
-                      </m:e>
-                      <m:sub>
-                        <m:r>
-                          <a:rPr lang="en-US" sz="2400" b="0" i="1" smtClean="0">
-                            <a:latin typeface="Cambria Math" panose="02040503050406030204" pitchFamily="18" charset="0"/>
-                          </a:rPr>
-                          <m:t>𝑙𝑜𝑤</m:t>
-                        </m:r>
-                      </m:sub>
-                    </m:sSub>
-                    <m:r>
-                      <a:rPr lang="en-US" sz="2400" b="0" i="1" smtClean="0">
-                        <a:latin typeface="Cambria Math" panose="02040503050406030204" pitchFamily="18" charset="0"/>
-                      </a:rPr>
-                      <m:t>,</m:t>
-                    </m:r>
-                    <m:sSub>
-                      <m:sSubPr>
-                        <m:ctrlPr>
-                          <a:rPr lang="en-US" sz="2400" i="1">
-                            <a:latin typeface="Cambria Math" panose="02040503050406030204" pitchFamily="18" charset="0"/>
-                          </a:rPr>
-                        </m:ctrlPr>
-                      </m:sSubPr>
-                      <m:e>
-                        <m:sSub>
-                          <m:sSubPr>
-                            <m:ctrlPr>
-                              <a:rPr lang="en-US" sz="2400" i="1">
-                                <a:latin typeface="Cambria Math" panose="02040503050406030204" pitchFamily="18" charset="0"/>
-                              </a:rPr>
-                            </m:ctrlPr>
-                          </m:sSubPr>
-                          <m:e>
-                            <m:acc>
-                              <m:accPr>
-                                <m:chr m:val="̂"/>
-                                <m:ctrlPr>
-                                  <a:rPr lang="en-US" sz="2400" i="1">
-                                    <a:latin typeface="Cambria Math" panose="02040503050406030204" pitchFamily="18" charset="0"/>
-                                  </a:rPr>
-                                </m:ctrlPr>
-                              </m:accPr>
-                              <m:e>
-                                <m:r>
-                                  <a:rPr lang="en-US" sz="2400" i="1">
-                                    <a:latin typeface="Cambria Math" panose="02040503050406030204" pitchFamily="18" charset="0"/>
-                                  </a:rPr>
-                                  <m:t>𝑦</m:t>
-                                </m:r>
-                              </m:e>
-                            </m:acc>
-                          </m:e>
-                          <m:sub>
-                            <m:r>
-                              <a:rPr lang="en-US" sz="2400" i="1">
-                                <a:latin typeface="Cambria Math" panose="02040503050406030204" pitchFamily="18" charset="0"/>
-                              </a:rPr>
-                              <m:t>𝑇</m:t>
-                            </m:r>
-                          </m:sub>
-                        </m:sSub>
-                      </m:e>
-                      <m:sub>
-                        <m:r>
-                          <a:rPr lang="en-US" sz="2400" b="0" i="1" smtClean="0">
-                            <a:latin typeface="Cambria Math" panose="02040503050406030204" pitchFamily="18" charset="0"/>
-                          </a:rPr>
-                          <m:t>h𝑖𝑔h</m:t>
-                        </m:r>
-                      </m:sub>
-                    </m:sSub>
-                    <m:r>
-                      <a:rPr lang="en-US" sz="2400" b="0" i="1" smtClean="0">
-                        <a:latin typeface="Cambria Math" panose="02040503050406030204" pitchFamily="18" charset="0"/>
-                      </a:rPr>
-                      <m:t>]</m:t>
-                    </m:r>
-                  </m:oMath>
-                </a14:m>
-                <a:endParaRPr lang="ru-RU" sz="2400" dirty="0"/>
-              </a:p>
-              <a:p>
-                <a:pPr marL="0" indent="0">
-                  <a:buNone/>
-                </a:pPr>
-                <a:r>
-                  <a:rPr lang="ru-RU" sz="2400" dirty="0"/>
-                  <a:t>		где </a:t>
-                </a:r>
-                <a14:m>
-                  <m:oMath xmlns:m="http://schemas.openxmlformats.org/officeDocument/2006/math">
-                    <m:sSub>
-                      <m:sSubPr>
-                        <m:ctrlPr>
-                          <a:rPr lang="en-US" sz="2400" i="1">
-                            <a:latin typeface="Cambria Math" panose="02040503050406030204" pitchFamily="18" charset="0"/>
-                          </a:rPr>
-                        </m:ctrlPr>
-                      </m:sSubPr>
-                      <m:e>
-                        <m:sSub>
-                          <m:sSubPr>
-                            <m:ctrlPr>
-                              <a:rPr lang="en-US" sz="2400" i="1">
-                                <a:latin typeface="Cambria Math" panose="02040503050406030204" pitchFamily="18" charset="0"/>
-                              </a:rPr>
-                            </m:ctrlPr>
-                          </m:sSubPr>
-                          <m:e>
-                            <m:acc>
-                              <m:accPr>
-                                <m:chr m:val="̂"/>
-                                <m:ctrlPr>
-                                  <a:rPr lang="en-US" sz="2400" i="1">
-                                    <a:latin typeface="Cambria Math" panose="02040503050406030204" pitchFamily="18" charset="0"/>
-                                  </a:rPr>
-                                </m:ctrlPr>
-                              </m:accPr>
-                              <m:e>
-                                <m:r>
-                                  <a:rPr lang="en-US" sz="2400" i="1">
-                                    <a:latin typeface="Cambria Math" panose="02040503050406030204" pitchFamily="18" charset="0"/>
-                                  </a:rPr>
-                                  <m:t>𝑦</m:t>
-                                </m:r>
-                              </m:e>
-                            </m:acc>
-                          </m:e>
-                          <m:sub>
-                            <m:r>
-                              <a:rPr lang="en-US" sz="2400" i="1">
-                                <a:latin typeface="Cambria Math" panose="02040503050406030204" pitchFamily="18" charset="0"/>
-                              </a:rPr>
-                              <m:t>𝑇</m:t>
-                            </m:r>
-                          </m:sub>
-                        </m:sSub>
-                      </m:e>
-                      <m:sub>
-                        <m:r>
-                          <a:rPr lang="en-US" sz="2400" i="1">
-                            <a:latin typeface="Cambria Math" panose="02040503050406030204" pitchFamily="18" charset="0"/>
-                          </a:rPr>
-                          <m:t>𝑙𝑜𝑤</m:t>
-                        </m:r>
-                      </m:sub>
-                    </m:sSub>
-                    <m:r>
-                      <a:rPr lang="en-US" sz="2400" i="1">
-                        <a:latin typeface="Cambria Math" panose="02040503050406030204" pitchFamily="18" charset="0"/>
-                      </a:rPr>
-                      <m:t>,</m:t>
-                    </m:r>
-                    <m:sSub>
-                      <m:sSubPr>
-                        <m:ctrlPr>
-                          <a:rPr lang="en-US" sz="2400" i="1">
-                            <a:latin typeface="Cambria Math" panose="02040503050406030204" pitchFamily="18" charset="0"/>
-                          </a:rPr>
-                        </m:ctrlPr>
-                      </m:sSubPr>
-                      <m:e>
-                        <m:sSub>
-                          <m:sSubPr>
-                            <m:ctrlPr>
-                              <a:rPr lang="en-US" sz="2400" i="1">
-                                <a:latin typeface="Cambria Math" panose="02040503050406030204" pitchFamily="18" charset="0"/>
-                              </a:rPr>
-                            </m:ctrlPr>
-                          </m:sSubPr>
-                          <m:e>
-                            <m:acc>
-                              <m:accPr>
-                                <m:chr m:val="̂"/>
-                                <m:ctrlPr>
-                                  <a:rPr lang="en-US" sz="2400" i="1">
-                                    <a:latin typeface="Cambria Math" panose="02040503050406030204" pitchFamily="18" charset="0"/>
-                                  </a:rPr>
-                                </m:ctrlPr>
-                              </m:accPr>
-                              <m:e>
-                                <m:r>
-                                  <a:rPr lang="en-US" sz="2400" i="1">
-                                    <a:latin typeface="Cambria Math" panose="02040503050406030204" pitchFamily="18" charset="0"/>
-                                  </a:rPr>
-                                  <m:t>𝑦</m:t>
-                                </m:r>
-                              </m:e>
-                            </m:acc>
-                          </m:e>
-                          <m:sub>
-                            <m:r>
-                              <a:rPr lang="en-US" sz="2400" i="1">
-                                <a:latin typeface="Cambria Math" panose="02040503050406030204" pitchFamily="18" charset="0"/>
-                              </a:rPr>
-                              <m:t>𝑇</m:t>
-                            </m:r>
-                          </m:sub>
-                        </m:sSub>
-                      </m:e>
-                      <m:sub>
-                        <m:r>
-                          <a:rPr lang="en-US" sz="2400" i="1">
-                            <a:latin typeface="Cambria Math" panose="02040503050406030204" pitchFamily="18" charset="0"/>
-                          </a:rPr>
-                          <m:t>h𝑖𝑔h</m:t>
-                        </m:r>
-                      </m:sub>
-                    </m:sSub>
-                  </m:oMath>
-                </a14:m>
-                <a:r>
-                  <a:rPr lang="ru-RU" sz="2400" dirty="0"/>
-                  <a:t> - оценки нижней и верхней границ интервала.</a:t>
-                </a:r>
-              </a:p>
-              <a:p>
-                <a:pPr marL="0" indent="0">
-                  <a:buNone/>
-                </a:pPr>
-                <a:r>
-                  <a:rPr lang="ru-RU" sz="2400" b="1" dirty="0"/>
-                  <a:t>Прогнозы всегда содержат неопределенность. </a:t>
-                </a:r>
-                <a:r>
-                  <a:rPr lang="ru-RU" sz="2400" dirty="0"/>
-                  <a:t>Надежный прогноз позволяет:</a:t>
-                </a:r>
-              </a:p>
-              <a:p>
-                <a:pPr lvl="1"/>
-                <a:r>
-                  <a:rPr lang="ru-RU" dirty="0"/>
-                  <a:t>Управлять рисками</a:t>
-                </a:r>
-              </a:p>
-              <a:p>
-                <a:pPr lvl="2"/>
-                <a:r>
-                  <a:rPr lang="ru-RU" dirty="0"/>
-                  <a:t>Пример: прогноз энергопотребления с учетом возможного пика</a:t>
-                </a:r>
-              </a:p>
-              <a:p>
-                <a:pPr lvl="1"/>
-                <a:r>
-                  <a:rPr lang="ru-RU" dirty="0"/>
-                  <a:t>Планировать сценарии развития</a:t>
-                </a:r>
-              </a:p>
-              <a:p>
-                <a:pPr lvl="2"/>
-                <a:r>
-                  <a:rPr lang="ru-RU" dirty="0"/>
-                  <a:t>Пример: управление запасами на складе</a:t>
-                </a:r>
-              </a:p>
-              <a:p>
-                <a:pPr lvl="1"/>
-                <a:r>
-                  <a:rPr lang="ru-RU" dirty="0"/>
-                  <a:t>Повышать доверие к модели</a:t>
-                </a:r>
-              </a:p>
-              <a:p>
-                <a:pPr lvl="2"/>
-                <a:r>
-                  <a:rPr lang="ru-RU" dirty="0"/>
-                  <a:t>Пример: выбор между моделью с высокой точностью (низкое </a:t>
-                </a:r>
-                <a:r>
-                  <a:rPr lang="ru-RU" dirty="0" err="1"/>
-                  <a:t>смещние</a:t>
-                </a:r>
-                <a:r>
-                  <a:rPr lang="ru-RU" dirty="0"/>
-                  <a:t>) и высоким разбросом и наоборот</a:t>
-                </a:r>
-              </a:p>
-              <a:p>
-                <a:pPr lvl="2"/>
-                <a:endParaRPr lang="ru-RU" dirty="0"/>
-              </a:p>
-              <a:p>
-                <a:endParaRPr lang="ru-RU" dirty="0"/>
-              </a:p>
-            </p:txBody>
-          </p:sp>
-        </mc:Choice>
-        <mc:Fallback xmlns="">
-          <p:sp>
-            <p:nvSpPr>
-              <p:cNvPr id="3" name="Объект 2"/>
-              <p:cNvSpPr>
-                <a:spLocks noGrp="1" noRot="1" noChangeAspect="1" noMove="1" noResize="1" noEditPoints="1" noAdjustHandles="1" noChangeArrowheads="1" noChangeShapeType="1" noTextEdit="1"/>
-              </p:cNvSpPr>
-              <p:nvPr>
-                <p:ph idx="1"/>
-              </p:nvPr>
-            </p:nvSpPr>
-            <p:spPr>
-              <a:xfrm>
-                <a:off x="171450" y="822752"/>
-                <a:ext cx="11733519" cy="5780955"/>
-              </a:xfrm>
-              <a:blipFill>
-                <a:blip r:embed="rId2"/>
-                <a:stretch>
-                  <a:fillRect l="-779" t="-1477" r="-104"/>
-                </a:stretch>
-              </a:blipFill>
-            </p:spPr>
-            <p:txBody>
-              <a:bodyPr/>
-              <a:lstStyle/>
-              <a:p>
-                <a:r>
-                  <a:rPr lang="ru-RU">
-                    <a:noFill/>
-                  </a:rPr>
-                  <a:t> </a:t>
-                </a:r>
-              </a:p>
-            </p:txBody>
-          </p:sp>
-        </mc:Fallback>
-      </mc:AlternateContent>
-    </p:spTree>
-    <p:extLst>
-      <p:ext uri="{BB962C8B-B14F-4D97-AF65-F5344CB8AC3E}">
-        <p14:creationId xmlns:p14="http://schemas.microsoft.com/office/powerpoint/2010/main" val="1104299574"/>
-      </p:ext>
-    </p:extLst>
-  </p:cSld>
-  <p:clrMapOvr>
-    <a:masterClrMapping/>
-  </p:clrMapOvr>
-</p:sld>
-</file>
-
-<file path=ppt/slides/slide20.xml><?xml version="1.0" encoding="utf-8"?>
+<file path=ppt/slides/slide21.xml><?xml version="1.0" encoding="utf-8"?>
 <p:sld xmlns:a="http://schemas.openxmlformats.org/drawingml/2006/main" xmlns:r="http://schemas.openxmlformats.org/officeDocument/2006/relationships" xmlns:p="http://schemas.openxmlformats.org/presentationml/2006/main">
   <p:cSld>
     <p:spTree>
@@ -15478,7 +15926,7 @@
 </p:sld>
 </file>
 
-<file path=ppt/slides/slide21.xml><?xml version="1.0" encoding="utf-8"?>
+<file path=ppt/slides/slide22.xml><?xml version="1.0" encoding="utf-8"?>
 <p:sld xmlns:a="http://schemas.openxmlformats.org/drawingml/2006/main" xmlns:r="http://schemas.openxmlformats.org/officeDocument/2006/relationships" xmlns:p="http://schemas.openxmlformats.org/presentationml/2006/main">
   <p:cSld>
     <p:spTree>
@@ -15613,7 +16061,7 @@
 </p:sld>
 </file>
 
-<file path=ppt/slides/slide22.xml><?xml version="1.0" encoding="utf-8"?>
+<file path=ppt/slides/slide23.xml><?xml version="1.0" encoding="utf-8"?>
 <p:sld xmlns:a="http://schemas.openxmlformats.org/drawingml/2006/main" xmlns:r="http://schemas.openxmlformats.org/officeDocument/2006/relationships" xmlns:p="http://schemas.openxmlformats.org/presentationml/2006/main" show="0">
   <p:cSld>
     <p:spTree>
@@ -16131,10 +16579,18 @@
   <p:clrMapOvr>
     <a:masterClrMapping/>
   </p:clrMapOvr>
+  <mc:AlternateContent xmlns:mc="http://schemas.openxmlformats.org/markup-compatibility/2006">
+    <mc:Choice xmlns:p14="http://schemas.microsoft.com/office/powerpoint/2010/main" Requires="p14">
+      <p:transition spd="slow" p14:dur="2000"/>
+    </mc:Choice>
+    <mc:Fallback>
+      <p:transition spd="slow"/>
+    </mc:Fallback>
+  </mc:AlternateContent>
 </p:sld>
 </file>
 
-<file path=ppt/slides/slide23.xml><?xml version="1.0" encoding="utf-8"?>
+<file path=ppt/slides/slide24.xml><?xml version="1.0" encoding="utf-8"?>
 <p:sld xmlns:a="http://schemas.openxmlformats.org/drawingml/2006/main" xmlns:r="http://schemas.openxmlformats.org/officeDocument/2006/relationships" xmlns:p="http://schemas.openxmlformats.org/presentationml/2006/main" show="0">
   <p:cSld>
     <p:spTree>
@@ -16322,10 +16778,18 @@
   <p:clrMapOvr>
     <a:masterClrMapping/>
   </p:clrMapOvr>
+  <mc:AlternateContent xmlns:mc="http://schemas.openxmlformats.org/markup-compatibility/2006">
+    <mc:Choice xmlns:p14="http://schemas.microsoft.com/office/powerpoint/2010/main" Requires="p14">
+      <p:transition spd="slow" p14:dur="2000"/>
+    </mc:Choice>
+    <mc:Fallback>
+      <p:transition spd="slow"/>
+    </mc:Fallback>
+  </mc:AlternateContent>
 </p:sld>
 </file>
 
-<file path=ppt/slides/slide24.xml><?xml version="1.0" encoding="utf-8"?>
+<file path=ppt/slides/slide25.xml><?xml version="1.0" encoding="utf-8"?>
 <p:sld xmlns:a="http://schemas.openxmlformats.org/drawingml/2006/main" xmlns:r="http://schemas.openxmlformats.org/officeDocument/2006/relationships" xmlns:p="http://schemas.openxmlformats.org/presentationml/2006/main" show="0">
   <p:cSld>
     <p:spTree>
@@ -16401,6 +16865,12 @@
           </a:bodyPr>
           <a:lstStyle/>
           <a:p>
+            <a:r>
+              <a:rPr lang="en-US" b="1" dirty="0">
+                <a:latin typeface="Inter"/>
+              </a:rPr>
+              <a:t/>
+            </a:r>
             <a:br>
               <a:rPr lang="en-US" b="1" dirty="0">
                 <a:latin typeface="Inter"/>
@@ -16513,10 +16983,18 @@
   <p:clrMapOvr>
     <a:masterClrMapping/>
   </p:clrMapOvr>
+  <mc:AlternateContent xmlns:mc="http://schemas.openxmlformats.org/markup-compatibility/2006">
+    <mc:Choice xmlns:p14="http://schemas.microsoft.com/office/powerpoint/2010/main" Requires="p14">
+      <p:transition spd="slow" p14:dur="2000"/>
+    </mc:Choice>
+    <mc:Fallback>
+      <p:transition spd="slow"/>
+    </mc:Fallback>
+  </mc:AlternateContent>
 </p:sld>
 </file>
 
-<file path=ppt/slides/slide25.xml><?xml version="1.0" encoding="utf-8"?>
+<file path=ppt/slides/slide26.xml><?xml version="1.0" encoding="utf-8"?>
 <p:sld xmlns:a="http://schemas.openxmlformats.org/drawingml/2006/main" xmlns:r="http://schemas.openxmlformats.org/officeDocument/2006/relationships" xmlns:p="http://schemas.openxmlformats.org/presentationml/2006/main" show="0">
   <p:cSld>
     <p:spTree>
@@ -16793,6 +17271,14 @@
   <p:clrMapOvr>
     <a:masterClrMapping/>
   </p:clrMapOvr>
+  <mc:AlternateContent xmlns:mc="http://schemas.openxmlformats.org/markup-compatibility/2006">
+    <mc:Choice xmlns:p14="http://schemas.microsoft.com/office/powerpoint/2010/main" Requires="p14">
+      <p:transition spd="slow" p14:dur="2000"/>
+    </mc:Choice>
+    <mc:Fallback>
+      <p:transition spd="slow"/>
+    </mc:Fallback>
+  </mc:AlternateContent>
 </p:sld>
 </file>
 
@@ -19367,6 +19853,10 @@
             <a:r>
               <a:rPr lang="en-US" sz="2400" u="sng" dirty="0"/>
               <a:t>!</a:t>
+            </a:r>
+            <a:r>
+              <a:rPr lang="ru-RU" sz="2600" dirty="0"/>
+              <a:t/>
             </a:r>
             <a:br>
               <a:rPr lang="ru-RU" sz="2600" dirty="0"/>

--- a/2025/LEC/05-2 Оценка надежности предсказаний ВР.pptx
+++ b/2025/LEC/05-2 Оценка надежности предсказаний ВР.pptx
@@ -5,7 +5,7 @@
     <p:sldMasterId id="2147483648" r:id="rId1"/>
   </p:sldMasterIdLst>
   <p:notesMasterIdLst>
-    <p:notesMasterId r:id="rId28"/>
+    <p:notesMasterId r:id="rId29"/>
   </p:notesMasterIdLst>
   <p:sldIdLst>
     <p:sldId id="477" r:id="rId2"/>
@@ -29,11 +29,12 @@
     <p:sldId id="481" r:id="rId20"/>
     <p:sldId id="480" r:id="rId21"/>
     <p:sldId id="484" r:id="rId22"/>
-    <p:sldId id="485" r:id="rId23"/>
-    <p:sldId id="472" r:id="rId24"/>
-    <p:sldId id="479" r:id="rId25"/>
-    <p:sldId id="468" r:id="rId26"/>
-    <p:sldId id="461" r:id="rId27"/>
+    <p:sldId id="488" r:id="rId23"/>
+    <p:sldId id="485" r:id="rId24"/>
+    <p:sldId id="472" r:id="rId25"/>
+    <p:sldId id="479" r:id="rId26"/>
+    <p:sldId id="468" r:id="rId27"/>
+    <p:sldId id="461" r:id="rId28"/>
   </p:sldIdLst>
   <p:sldSz cx="12192000" cy="6858000"/>
   <p:notesSz cx="6858000" cy="9144000"/>
@@ -222,7 +223,7 @@
           <a:p>
             <a:fld id="{C730246F-5962-E14A-AAF2-985CCFDAC345}" type="datetimeFigureOut">
               <a:rPr lang="ru-RU" smtClean="0"/>
-              <a:t>12.08.2025</a:t>
+              <a:t>20.08.2025</a:t>
             </a:fld>
             <a:endParaRPr lang="ru-RU"/>
           </a:p>
@@ -638,7 +639,7 @@
           <a:p>
             <a:fld id="{44343DC6-30E4-4569-999A-C703F926F2AF}" type="datetimeFigureOut">
               <a:rPr lang="en-US" smtClean="0"/>
-              <a:t>8/12/2025</a:t>
+              <a:t>8/20/2025</a:t>
             </a:fld>
             <a:endParaRPr lang="en-US"/>
           </a:p>
@@ -838,7 +839,7 @@
           <a:p>
             <a:fld id="{44343DC6-30E4-4569-999A-C703F926F2AF}" type="datetimeFigureOut">
               <a:rPr lang="en-US" smtClean="0"/>
-              <a:t>8/12/2025</a:t>
+              <a:t>8/20/2025</a:t>
             </a:fld>
             <a:endParaRPr lang="en-US"/>
           </a:p>
@@ -1048,7 +1049,7 @@
           <a:p>
             <a:fld id="{44343DC6-30E4-4569-999A-C703F926F2AF}" type="datetimeFigureOut">
               <a:rPr lang="en-US" smtClean="0"/>
-              <a:t>8/12/2025</a:t>
+              <a:t>8/20/2025</a:t>
             </a:fld>
             <a:endParaRPr lang="en-US"/>
           </a:p>
@@ -1248,7 +1249,7 @@
           <a:p>
             <a:fld id="{44343DC6-30E4-4569-999A-C703F926F2AF}" type="datetimeFigureOut">
               <a:rPr lang="en-US" smtClean="0"/>
-              <a:t>8/12/2025</a:t>
+              <a:t>8/20/2025</a:t>
             </a:fld>
             <a:endParaRPr lang="en-US"/>
           </a:p>
@@ -1524,7 +1525,7 @@
           <a:p>
             <a:fld id="{44343DC6-30E4-4569-999A-C703F926F2AF}" type="datetimeFigureOut">
               <a:rPr lang="en-US" smtClean="0"/>
-              <a:t>8/12/2025</a:t>
+              <a:t>8/20/2025</a:t>
             </a:fld>
             <a:endParaRPr lang="en-US"/>
           </a:p>
@@ -1792,7 +1793,7 @@
           <a:p>
             <a:fld id="{44343DC6-30E4-4569-999A-C703F926F2AF}" type="datetimeFigureOut">
               <a:rPr lang="en-US" smtClean="0"/>
-              <a:t>8/12/2025</a:t>
+              <a:t>8/20/2025</a:t>
             </a:fld>
             <a:endParaRPr lang="en-US"/>
           </a:p>
@@ -2207,7 +2208,7 @@
           <a:p>
             <a:fld id="{44343DC6-30E4-4569-999A-C703F926F2AF}" type="datetimeFigureOut">
               <a:rPr lang="en-US" smtClean="0"/>
-              <a:t>8/12/2025</a:t>
+              <a:t>8/20/2025</a:t>
             </a:fld>
             <a:endParaRPr lang="en-US"/>
           </a:p>
@@ -2349,7 +2350,7 @@
           <a:p>
             <a:fld id="{44343DC6-30E4-4569-999A-C703F926F2AF}" type="datetimeFigureOut">
               <a:rPr lang="en-US" smtClean="0"/>
-              <a:t>8/12/2025</a:t>
+              <a:t>8/20/2025</a:t>
             </a:fld>
             <a:endParaRPr lang="en-US"/>
           </a:p>
@@ -2462,7 +2463,7 @@
           <a:p>
             <a:fld id="{44343DC6-30E4-4569-999A-C703F926F2AF}" type="datetimeFigureOut">
               <a:rPr lang="en-US" smtClean="0"/>
-              <a:t>8/12/2025</a:t>
+              <a:t>8/20/2025</a:t>
             </a:fld>
             <a:endParaRPr lang="en-US"/>
           </a:p>
@@ -2775,7 +2776,7 @@
           <a:p>
             <a:fld id="{44343DC6-30E4-4569-999A-C703F926F2AF}" type="datetimeFigureOut">
               <a:rPr lang="en-US" smtClean="0"/>
-              <a:t>8/12/2025</a:t>
+              <a:t>8/20/2025</a:t>
             </a:fld>
             <a:endParaRPr lang="en-US"/>
           </a:p>
@@ -3064,7 +3065,7 @@
           <a:p>
             <a:fld id="{44343DC6-30E4-4569-999A-C703F926F2AF}" type="datetimeFigureOut">
               <a:rPr lang="en-US" smtClean="0"/>
-              <a:t>8/12/2025</a:t>
+              <a:t>8/20/2025</a:t>
             </a:fld>
             <a:endParaRPr lang="en-US"/>
           </a:p>
@@ -3307,7 +3308,7 @@
           <a:p>
             <a:fld id="{44343DC6-30E4-4569-999A-C703F926F2AF}" type="datetimeFigureOut">
               <a:rPr lang="en-US" smtClean="0"/>
-              <a:t>8/12/2025</a:t>
+              <a:t>8/20/2025</a:t>
             </a:fld>
             <a:endParaRPr lang="en-US"/>
           </a:p>
@@ -8861,7 +8862,7 @@
                                   </a:solidFill>
                                   <a:latin typeface="Cambria Math" panose="02040503050406030204" pitchFamily="18" charset="0"/>
                                 </a:rPr>
-                                <m:t> −нормир</m:t>
+                                <m:t> −нормиров</m:t>
                               </m:r>
                               <m:r>
                                 <a:rPr lang="ru-RU" sz="1900" dirty="0">
@@ -8870,7 +8871,7 @@
                                   </a:solidFill>
                                   <a:latin typeface="Cambria Math" panose="02040503050406030204" pitchFamily="18" charset="0"/>
                                 </a:rPr>
-                                <m:t>ованная ширина интервала</m:t>
+                                <m:t>анная ширина интервала</m:t>
                               </m:r>
                             </m:oMath>
                           </a14:m>
@@ -15955,6 +15956,124 @@
         </p:nvSpPr>
         <p:spPr>
           <a:xfrm>
+            <a:off x="435835" y="271122"/>
+            <a:ext cx="11417181" cy="737282"/>
+          </a:xfrm>
+        </p:spPr>
+        <p:txBody>
+          <a:bodyPr/>
+          <a:lstStyle/>
+          <a:p>
+            <a:pPr algn="ctr"/>
+            <a:r>
+              <a:rPr lang="ru-RU" dirty="0" smtClean="0"/>
+              <a:t>Вопросы для самоконтроля</a:t>
+            </a:r>
+            <a:endParaRPr lang="ru-RU" dirty="0"/>
+          </a:p>
+        </p:txBody>
+      </p:sp>
+      <p:sp>
+        <p:nvSpPr>
+          <p:cNvPr id="3" name="Объект 2"/>
+          <p:cNvSpPr>
+            <a:spLocks noGrp="1"/>
+          </p:cNvSpPr>
+          <p:nvPr>
+            <p:ph idx="1"/>
+          </p:nvPr>
+        </p:nvSpPr>
+        <p:spPr>
+          <a:xfrm>
+            <a:off x="350379" y="1008405"/>
+            <a:ext cx="11502638" cy="5563312"/>
+          </a:xfrm>
+        </p:spPr>
+        <p:txBody>
+          <a:bodyPr/>
+          <a:lstStyle/>
+          <a:p>
+            <a:pPr lvl="0"/>
+            <a:r>
+              <a:rPr lang="ru-RU" dirty="0"/>
+              <a:t>Объясните термин надежность предсказаний. Какие методы оценки надежности можно предложить. Приведите примеры задач для названных методов.</a:t>
+            </a:r>
+          </a:p>
+          <a:p>
+            <a:r>
+              <a:rPr lang="ru-RU" dirty="0" smtClean="0"/>
+              <a:t>Приведите примеры ВР, соответствующие рискам надежности ВР. Какие при этом будут особенности остатков модели. Как можно выявить проблемы на метриках и как это скажется на бизнес-метриках.</a:t>
+            </a:r>
+          </a:p>
+          <a:p>
+            <a:r>
+              <a:rPr lang="ru-RU" dirty="0" smtClean="0"/>
+              <a:t>Проанализируйте ситуацию когда для одного ВР есть несколько допустимых методов предсказаний. Какие методы какую надежность дадут? Обоснуйте ответ.</a:t>
+            </a:r>
+          </a:p>
+          <a:p>
+            <a:r>
+              <a:rPr lang="ru-RU" dirty="0" smtClean="0"/>
+              <a:t>Предложите </a:t>
+            </a:r>
+            <a:r>
+              <a:rPr lang="ru-RU" dirty="0" err="1" smtClean="0"/>
+              <a:t>пайплайн</a:t>
+            </a:r>
+            <a:r>
+              <a:rPr lang="ru-RU" dirty="0" smtClean="0"/>
+              <a:t> мониторинга работы метода предсказаний ВР. Как при этом будет надежность провялятся, какие будут риски </a:t>
+            </a:r>
+            <a:r>
+              <a:rPr lang="ru-RU" smtClean="0"/>
+              <a:t>для бизнес-метрик.</a:t>
+            </a:r>
+            <a:endParaRPr lang="ru-RU" dirty="0"/>
+          </a:p>
+        </p:txBody>
+      </p:sp>
+    </p:spTree>
+    <p:extLst>
+      <p:ext uri="{BB962C8B-B14F-4D97-AF65-F5344CB8AC3E}">
+        <p14:creationId xmlns:p14="http://schemas.microsoft.com/office/powerpoint/2010/main" val="1109120131"/>
+      </p:ext>
+    </p:extLst>
+  </p:cSld>
+  <p:clrMapOvr>
+    <a:masterClrMapping/>
+  </p:clrMapOvr>
+</p:sld>
+</file>
+
+<file path=ppt/slides/slide23.xml><?xml version="1.0" encoding="utf-8"?>
+<p:sld xmlns:a="http://schemas.openxmlformats.org/drawingml/2006/main" xmlns:r="http://schemas.openxmlformats.org/officeDocument/2006/relationships" xmlns:p="http://schemas.openxmlformats.org/presentationml/2006/main">
+  <p:cSld>
+    <p:spTree>
+      <p:nvGrpSpPr>
+        <p:cNvPr id="1" name=""/>
+        <p:cNvGrpSpPr/>
+        <p:nvPr/>
+      </p:nvGrpSpPr>
+      <p:grpSpPr>
+        <a:xfrm>
+          <a:off x="0" y="0"/>
+          <a:ext cx="0" cy="0"/>
+          <a:chOff x="0" y="0"/>
+          <a:chExt cx="0" cy="0"/>
+        </a:xfrm>
+      </p:grpSpPr>
+      <p:sp>
+        <p:nvSpPr>
+          <p:cNvPr id="2" name="Заголовок 1"/>
+          <p:cNvSpPr>
+            <a:spLocks noGrp="1"/>
+          </p:cNvSpPr>
+          <p:nvPr>
+            <p:ph type="title"/>
+          </p:nvPr>
+        </p:nvSpPr>
+        <p:spPr>
+          <a:xfrm>
             <a:off x="266700" y="365126"/>
             <a:ext cx="11087100" cy="806450"/>
           </a:xfrm>
@@ -16061,7 +16180,7 @@
 </p:sld>
 </file>
 
-<file path=ppt/slides/slide23.xml><?xml version="1.0" encoding="utf-8"?>
+<file path=ppt/slides/slide24.xml><?xml version="1.0" encoding="utf-8"?>
 <p:sld xmlns:a="http://schemas.openxmlformats.org/drawingml/2006/main" xmlns:r="http://schemas.openxmlformats.org/officeDocument/2006/relationships" xmlns:p="http://schemas.openxmlformats.org/presentationml/2006/main" show="0">
   <p:cSld>
     <p:spTree>
@@ -16579,18 +16698,18 @@
   <p:clrMapOvr>
     <a:masterClrMapping/>
   </p:clrMapOvr>
-  <mc:AlternateContent xmlns:mc="http://schemas.openxmlformats.org/markup-compatibility/2006">
-    <mc:Choice xmlns:p14="http://schemas.microsoft.com/office/powerpoint/2010/main" Requires="p14">
+  <mc:AlternateContent xmlns:mc="http://schemas.openxmlformats.org/markup-compatibility/2006" xmlns:p14="http://schemas.microsoft.com/office/powerpoint/2010/main">
+    <mc:Choice Requires="p14">
       <p:transition spd="slow" p14:dur="2000"/>
     </mc:Choice>
-    <mc:Fallback>
+    <mc:Fallback xmlns="">
       <p:transition spd="slow"/>
     </mc:Fallback>
   </mc:AlternateContent>
 </p:sld>
 </file>
 
-<file path=ppt/slides/slide24.xml><?xml version="1.0" encoding="utf-8"?>
+<file path=ppt/slides/slide25.xml><?xml version="1.0" encoding="utf-8"?>
 <p:sld xmlns:a="http://schemas.openxmlformats.org/drawingml/2006/main" xmlns:r="http://schemas.openxmlformats.org/officeDocument/2006/relationships" xmlns:p="http://schemas.openxmlformats.org/presentationml/2006/main" show="0">
   <p:cSld>
     <p:spTree>
@@ -16778,18 +16897,18 @@
   <p:clrMapOvr>
     <a:masterClrMapping/>
   </p:clrMapOvr>
-  <mc:AlternateContent xmlns:mc="http://schemas.openxmlformats.org/markup-compatibility/2006">
-    <mc:Choice xmlns:p14="http://schemas.microsoft.com/office/powerpoint/2010/main" Requires="p14">
+  <mc:AlternateContent xmlns:mc="http://schemas.openxmlformats.org/markup-compatibility/2006" xmlns:p14="http://schemas.microsoft.com/office/powerpoint/2010/main">
+    <mc:Choice Requires="p14">
       <p:transition spd="slow" p14:dur="2000"/>
     </mc:Choice>
-    <mc:Fallback>
+    <mc:Fallback xmlns="">
       <p:transition spd="slow"/>
     </mc:Fallback>
   </mc:AlternateContent>
 </p:sld>
 </file>
 
-<file path=ppt/slides/slide25.xml><?xml version="1.0" encoding="utf-8"?>
+<file path=ppt/slides/slide26.xml><?xml version="1.0" encoding="utf-8"?>
 <p:sld xmlns:a="http://schemas.openxmlformats.org/drawingml/2006/main" xmlns:r="http://schemas.openxmlformats.org/officeDocument/2006/relationships" xmlns:p="http://schemas.openxmlformats.org/presentationml/2006/main" show="0">
   <p:cSld>
     <p:spTree>
@@ -16983,18 +17102,18 @@
   <p:clrMapOvr>
     <a:masterClrMapping/>
   </p:clrMapOvr>
-  <mc:AlternateContent xmlns:mc="http://schemas.openxmlformats.org/markup-compatibility/2006">
-    <mc:Choice xmlns:p14="http://schemas.microsoft.com/office/powerpoint/2010/main" Requires="p14">
+  <mc:AlternateContent xmlns:mc="http://schemas.openxmlformats.org/markup-compatibility/2006" xmlns:p14="http://schemas.microsoft.com/office/powerpoint/2010/main">
+    <mc:Choice Requires="p14">
       <p:transition spd="slow" p14:dur="2000"/>
     </mc:Choice>
-    <mc:Fallback>
+    <mc:Fallback xmlns="">
       <p:transition spd="slow"/>
     </mc:Fallback>
   </mc:AlternateContent>
 </p:sld>
 </file>
 
-<file path=ppt/slides/slide26.xml><?xml version="1.0" encoding="utf-8"?>
+<file path=ppt/slides/slide27.xml><?xml version="1.0" encoding="utf-8"?>
 <p:sld xmlns:a="http://schemas.openxmlformats.org/drawingml/2006/main" xmlns:r="http://schemas.openxmlformats.org/officeDocument/2006/relationships" xmlns:p="http://schemas.openxmlformats.org/presentationml/2006/main" show="0">
   <p:cSld>
     <p:spTree>
@@ -17271,11 +17390,11 @@
   <p:clrMapOvr>
     <a:masterClrMapping/>
   </p:clrMapOvr>
-  <mc:AlternateContent xmlns:mc="http://schemas.openxmlformats.org/markup-compatibility/2006">
-    <mc:Choice xmlns:p14="http://schemas.microsoft.com/office/powerpoint/2010/main" Requires="p14">
+  <mc:AlternateContent xmlns:mc="http://schemas.openxmlformats.org/markup-compatibility/2006" xmlns:p14="http://schemas.microsoft.com/office/powerpoint/2010/main">
+    <mc:Choice Requires="p14">
       <p:transition spd="slow" p14:dur="2000"/>
     </mc:Choice>
-    <mc:Fallback>
+    <mc:Fallback xmlns="">
       <p:transition spd="slow"/>
     </mc:Fallback>
   </mc:AlternateContent>
@@ -19364,23 +19483,39 @@
         <p:spPr>
           <a:xfrm>
             <a:off x="307428" y="3363277"/>
-            <a:ext cx="11351172" cy="2703377"/>
+            <a:ext cx="11351172" cy="3302443"/>
           </a:xfrm>
         </p:spPr>
         <p:txBody>
           <a:bodyPr>
-            <a:normAutofit fontScale="62500" lnSpcReduction="20000"/>
+            <a:normAutofit fontScale="55000" lnSpcReduction="20000"/>
           </a:bodyPr>
           <a:lstStyle/>
           <a:p>
-            <a:r>
-              <a:rPr lang="ru-RU" dirty="0"/>
+            <a:pPr>
+              <a:lnSpc>
+                <a:spcPct val="120000"/>
+              </a:lnSpc>
+              <a:spcBef>
+                <a:spcPts val="400"/>
+              </a:spcBef>
+            </a:pPr>
+            <a:r>
+              <a:rPr lang="ru-RU" sz="3300" dirty="0"/>
               <a:t>Эти две схемы отличаются только размером обучающего множества. В первом случае он постоянно растет, во втором – не меняется, а само обучающее множество при этом сдвигается. Ту или иную схему на практике стоит использовать в зависимости от того, какая решается задача. Например, если данных достаточно много и предполагается онлайн работа модели с периодическим дообучением, то обычно при каждом дообучении размер обучающего множества фиксируют. В таком случае имеет смысл воспользоваться второй схемой, чтобы оценить качество модели, обученной именно на таким количестве данных. Если же данных немного, то для обучения желательно использовать все доступные данные. В таком случае имеет смысл использовать первую схему.</a:t>
             </a:r>
           </a:p>
           <a:p>
-            <a:r>
-              <a:rPr lang="ru-RU" dirty="0"/>
+            <a:pPr>
+              <a:lnSpc>
+                <a:spcPct val="120000"/>
+              </a:lnSpc>
+              <a:spcBef>
+                <a:spcPts val="400"/>
+              </a:spcBef>
+            </a:pPr>
+            <a:r>
+              <a:rPr lang="ru-RU" sz="3300" dirty="0"/>
               <a:t>Обратите внимание, что во всех случаях размер тестового интервала времени фиксирован. Это необходимое условие, потому как распределение значений метрики на разных размерах данных может отличаться. Вспомните, например, про зависимость дисперсии выборочного от размера выборки.</a:t>
             </a:r>
           </a:p>
@@ -19534,7 +19669,7 @@
         </p:nvSpPr>
         <p:spPr>
           <a:xfrm>
-            <a:off x="418616" y="6339094"/>
+            <a:off x="401524" y="6523760"/>
             <a:ext cx="6096000" cy="307777"/>
           </a:xfrm>
           <a:prstGeom prst="rect">
